--- a/Nuclear_Fuel_Performance/NE533_Spring2026/Module4/Lec20_Limits_WaterChem.pptx
+++ b/Nuclear_Fuel_Performance/NE533_Spring2026/Module4/Lec20_Limits_WaterChem.pptx
@@ -222,7 +222,7 @@
           <a:p>
             <a:fld id="{F190BC3A-953C-654D-BC1C-D0CE62D49644}" type="datetimeFigureOut">
               <a:rPr lang="en-US" smtClean="0"/>
-              <a:t>3/26/26</a:t>
+              <a:t>4/2/26</a:t>
             </a:fld>
             <a:endParaRPr lang="en-US"/>
           </a:p>
@@ -677,7 +677,7 @@
             </a:pPr>
             <a:fld id="{D6F3A803-A045-354B-887A-01433CE46FC2}" type="datetime1">
               <a:rPr lang="en-US" smtClean="0"/>
-              <a:t>3/26/26</a:t>
+              <a:t>4/2/26</a:t>
             </a:fld>
             <a:endParaRPr lang="en-US"/>
           </a:p>
@@ -870,7 +870,7 @@
             </a:pPr>
             <a:fld id="{A8B33C1D-C2E2-1049-AA3F-CD6E91052752}" type="datetime1">
               <a:rPr lang="en-US" smtClean="0"/>
-              <a:t>3/26/26</a:t>
+              <a:t>4/2/26</a:t>
             </a:fld>
             <a:endParaRPr lang="en-US"/>
           </a:p>
@@ -1072,7 +1072,7 @@
             </a:pPr>
             <a:fld id="{2791AD68-B60C-4542-BDDD-2074DE6DE828}" type="datetime1">
               <a:rPr lang="en-US" smtClean="0"/>
-              <a:t>3/26/26</a:t>
+              <a:t>4/2/26</a:t>
             </a:fld>
             <a:endParaRPr lang="en-US"/>
           </a:p>
@@ -1279,7 +1279,7 @@
             </a:pPr>
             <a:fld id="{C5BD04BF-9DC2-6341-92B2-BD109A2EF3B1}" type="datetime1">
               <a:rPr lang="en-US" smtClean="0"/>
-              <a:t>3/26/26</a:t>
+              <a:t>4/2/26</a:t>
             </a:fld>
             <a:endParaRPr lang="en-US"/>
           </a:p>
@@ -1549,7 +1549,7 @@
             </a:pPr>
             <a:fld id="{FB0FFBC7-3028-644D-986B-D9855CB74B38}" type="datetime1">
               <a:rPr lang="en-US" smtClean="0"/>
-              <a:t>3/26/26</a:t>
+              <a:t>4/2/26</a:t>
             </a:fld>
             <a:endParaRPr lang="en-US"/>
           </a:p>
@@ -1869,7 +1869,7 @@
             </a:pPr>
             <a:fld id="{2C3B8AE4-01F5-CC42-9C62-61BC6528368B}" type="datetime1">
               <a:rPr lang="en-US" smtClean="0"/>
-              <a:t>3/26/26</a:t>
+              <a:t>4/2/26</a:t>
             </a:fld>
             <a:endParaRPr lang="en-US"/>
           </a:p>
@@ -2317,7 +2317,7 @@
             </a:pPr>
             <a:fld id="{77E49314-4A78-2444-9569-44EB70168344}" type="datetime1">
               <a:rPr lang="en-US" smtClean="0"/>
-              <a:t>3/26/26</a:t>
+              <a:t>4/2/26</a:t>
             </a:fld>
             <a:endParaRPr lang="en-US"/>
           </a:p>
@@ -2467,7 +2467,7 @@
             </a:pPr>
             <a:fld id="{5BC22837-4683-B242-B000-BCEE30621787}" type="datetime1">
               <a:rPr lang="en-US" smtClean="0"/>
-              <a:t>3/26/26</a:t>
+              <a:t>4/2/26</a:t>
             </a:fld>
             <a:endParaRPr lang="en-US"/>
           </a:p>
@@ -2586,7 +2586,7 @@
             </a:pPr>
             <a:fld id="{DCDAE926-7EF1-0B40-B57E-417D188A609C}" type="datetime1">
               <a:rPr lang="en-US" smtClean="0"/>
-              <a:t>3/26/26</a:t>
+              <a:t>4/2/26</a:t>
             </a:fld>
             <a:endParaRPr lang="en-US"/>
           </a:p>
@@ -2885,7 +2885,7 @@
             </a:pPr>
             <a:fld id="{518D107B-B9C7-5B41-A168-55258AB95F52}" type="datetime1">
               <a:rPr lang="en-US" smtClean="0"/>
-              <a:t>3/26/26</a:t>
+              <a:t>4/2/26</a:t>
             </a:fld>
             <a:endParaRPr lang="en-US"/>
           </a:p>
@@ -3169,7 +3169,7 @@
             </a:pPr>
             <a:fld id="{3AD92D36-EE82-3142-B011-9831FB5E702F}" type="datetime1">
               <a:rPr lang="en-US" smtClean="0"/>
-              <a:t>3/26/26</a:t>
+              <a:t>4/2/26</a:t>
             </a:fld>
             <a:endParaRPr lang="en-US"/>
           </a:p>
@@ -3310,7 +3310,7 @@
               </a14:hiddenLine>
             </a:ext>
             <a:ext uri="{FAA26D3D-D897-4be2-8F04-BA451C77F1D7}">
-              <ma14:placeholderFlag xmlns:ma14="http://schemas.microsoft.com/office/mac/drawingml/2011/main" xmlns="" val="1"/>
+              <ma14:placeholderFlag xmlns="" xmlns:ma14="http://schemas.microsoft.com/office/mac/drawingml/2011/main" val="1"/>
             </a:ext>
           </a:extLst>
         </p:spPr>
@@ -3378,7 +3378,7 @@
               </a14:hiddenLine>
             </a:ext>
             <a:ext uri="{FAA26D3D-D897-4be2-8F04-BA451C77F1D7}">
-              <ma14:placeholderFlag xmlns:ma14="http://schemas.microsoft.com/office/mac/drawingml/2011/main" xmlns="" val="1"/>
+              <ma14:placeholderFlag xmlns="" xmlns:ma14="http://schemas.microsoft.com/office/mac/drawingml/2011/main" val="1"/>
             </a:ext>
           </a:extLst>
         </p:spPr>
@@ -3474,7 +3474,7 @@
             </a:pPr>
             <a:fld id="{3EE08B4B-7256-494F-A90D-3891BD685F4A}" type="datetime1">
               <a:rPr lang="en-US" smtClean="0"/>
-              <a:t>3/26/26</a:t>
+              <a:t>4/2/26</a:t>
             </a:fld>
             <a:endParaRPr lang="en-US" dirty="0"/>
           </a:p>

--- a/Nuclear_Fuel_Performance/NE533_Spring2026/Module4/Lec20_Limits_WaterChem.pptx
+++ b/Nuclear_Fuel_Performance/NE533_Spring2026/Module4/Lec20_Limits_WaterChem.pptx
@@ -5,35 +5,36 @@
     <p:sldMasterId id="2147483660" r:id="rId1"/>
   </p:sldMasterIdLst>
   <p:notesMasterIdLst>
-    <p:notesMasterId r:id="rId28"/>
+    <p:notesMasterId r:id="rId29"/>
   </p:notesMasterIdLst>
   <p:sldIdLst>
     <p:sldId id="537" r:id="rId2"/>
-    <p:sldId id="600" r:id="rId3"/>
-    <p:sldId id="407" r:id="rId4"/>
-    <p:sldId id="561" r:id="rId5"/>
-    <p:sldId id="562" r:id="rId6"/>
-    <p:sldId id="563" r:id="rId7"/>
-    <p:sldId id="564" r:id="rId8"/>
-    <p:sldId id="565" r:id="rId9"/>
-    <p:sldId id="566" r:id="rId10"/>
-    <p:sldId id="567" r:id="rId11"/>
-    <p:sldId id="568" r:id="rId12"/>
-    <p:sldId id="569" r:id="rId13"/>
-    <p:sldId id="570" r:id="rId14"/>
-    <p:sldId id="577" r:id="rId15"/>
-    <p:sldId id="571" r:id="rId16"/>
-    <p:sldId id="586" r:id="rId17"/>
-    <p:sldId id="572" r:id="rId18"/>
-    <p:sldId id="573" r:id="rId19"/>
-    <p:sldId id="575" r:id="rId20"/>
-    <p:sldId id="579" r:id="rId21"/>
-    <p:sldId id="576" r:id="rId22"/>
-    <p:sldId id="585" r:id="rId23"/>
-    <p:sldId id="587" r:id="rId24"/>
-    <p:sldId id="597" r:id="rId25"/>
-    <p:sldId id="598" r:id="rId26"/>
-    <p:sldId id="578" r:id="rId27"/>
+    <p:sldId id="601" r:id="rId3"/>
+    <p:sldId id="600" r:id="rId4"/>
+    <p:sldId id="577" r:id="rId5"/>
+    <p:sldId id="571" r:id="rId6"/>
+    <p:sldId id="586" r:id="rId7"/>
+    <p:sldId id="572" r:id="rId8"/>
+    <p:sldId id="573" r:id="rId9"/>
+    <p:sldId id="602" r:id="rId10"/>
+    <p:sldId id="575" r:id="rId11"/>
+    <p:sldId id="579" r:id="rId12"/>
+    <p:sldId id="576" r:id="rId13"/>
+    <p:sldId id="585" r:id="rId14"/>
+    <p:sldId id="587" r:id="rId15"/>
+    <p:sldId id="597" r:id="rId16"/>
+    <p:sldId id="598" r:id="rId17"/>
+    <p:sldId id="605" r:id="rId18"/>
+    <p:sldId id="578" r:id="rId19"/>
+    <p:sldId id="407" r:id="rId20"/>
+    <p:sldId id="549" r:id="rId21"/>
+    <p:sldId id="423" r:id="rId22"/>
+    <p:sldId id="547" r:id="rId23"/>
+    <p:sldId id="550" r:id="rId24"/>
+    <p:sldId id="559" r:id="rId25"/>
+    <p:sldId id="551" r:id="rId26"/>
+    <p:sldId id="419" r:id="rId27"/>
+    <p:sldId id="552" r:id="rId28"/>
   </p:sldIdLst>
   <p:sldSz cx="12192000" cy="6858000"/>
   <p:notesSz cx="6858000" cy="9144000"/>
@@ -222,7 +223,7 @@
           <a:p>
             <a:fld id="{F190BC3A-953C-654D-BC1C-D0CE62D49644}" type="datetimeFigureOut">
               <a:rPr lang="en-US" smtClean="0"/>
-              <a:t>4/2/26</a:t>
+              <a:t>4/16/26</a:t>
             </a:fld>
             <a:endParaRPr lang="en-US"/>
           </a:p>
@@ -677,7 +678,7 @@
             </a:pPr>
             <a:fld id="{D6F3A803-A045-354B-887A-01433CE46FC2}" type="datetime1">
               <a:rPr lang="en-US" smtClean="0"/>
-              <a:t>4/2/26</a:t>
+              <a:t>4/16/26</a:t>
             </a:fld>
             <a:endParaRPr lang="en-US"/>
           </a:p>
@@ -870,7 +871,7 @@
             </a:pPr>
             <a:fld id="{A8B33C1D-C2E2-1049-AA3F-CD6E91052752}" type="datetime1">
               <a:rPr lang="en-US" smtClean="0"/>
-              <a:t>4/2/26</a:t>
+              <a:t>4/16/26</a:t>
             </a:fld>
             <a:endParaRPr lang="en-US"/>
           </a:p>
@@ -1072,7 +1073,7 @@
             </a:pPr>
             <a:fld id="{2791AD68-B60C-4542-BDDD-2074DE6DE828}" type="datetime1">
               <a:rPr lang="en-US" smtClean="0"/>
-              <a:t>4/2/26</a:t>
+              <a:t>4/16/26</a:t>
             </a:fld>
             <a:endParaRPr lang="en-US"/>
           </a:p>
@@ -1279,7 +1280,7 @@
             </a:pPr>
             <a:fld id="{C5BD04BF-9DC2-6341-92B2-BD109A2EF3B1}" type="datetime1">
               <a:rPr lang="en-US" smtClean="0"/>
-              <a:t>4/2/26</a:t>
+              <a:t>4/16/26</a:t>
             </a:fld>
             <a:endParaRPr lang="en-US"/>
           </a:p>
@@ -1549,7 +1550,7 @@
             </a:pPr>
             <a:fld id="{FB0FFBC7-3028-644D-986B-D9855CB74B38}" type="datetime1">
               <a:rPr lang="en-US" smtClean="0"/>
-              <a:t>4/2/26</a:t>
+              <a:t>4/16/26</a:t>
             </a:fld>
             <a:endParaRPr lang="en-US"/>
           </a:p>
@@ -1869,7 +1870,7 @@
             </a:pPr>
             <a:fld id="{2C3B8AE4-01F5-CC42-9C62-61BC6528368B}" type="datetime1">
               <a:rPr lang="en-US" smtClean="0"/>
-              <a:t>4/2/26</a:t>
+              <a:t>4/16/26</a:t>
             </a:fld>
             <a:endParaRPr lang="en-US"/>
           </a:p>
@@ -2317,7 +2318,7 @@
             </a:pPr>
             <a:fld id="{77E49314-4A78-2444-9569-44EB70168344}" type="datetime1">
               <a:rPr lang="en-US" smtClean="0"/>
-              <a:t>4/2/26</a:t>
+              <a:t>4/16/26</a:t>
             </a:fld>
             <a:endParaRPr lang="en-US"/>
           </a:p>
@@ -2467,7 +2468,7 @@
             </a:pPr>
             <a:fld id="{5BC22837-4683-B242-B000-BCEE30621787}" type="datetime1">
               <a:rPr lang="en-US" smtClean="0"/>
-              <a:t>4/2/26</a:t>
+              <a:t>4/16/26</a:t>
             </a:fld>
             <a:endParaRPr lang="en-US"/>
           </a:p>
@@ -2586,7 +2587,7 @@
             </a:pPr>
             <a:fld id="{DCDAE926-7EF1-0B40-B57E-417D188A609C}" type="datetime1">
               <a:rPr lang="en-US" smtClean="0"/>
-              <a:t>4/2/26</a:t>
+              <a:t>4/16/26</a:t>
             </a:fld>
             <a:endParaRPr lang="en-US"/>
           </a:p>
@@ -2885,7 +2886,7 @@
             </a:pPr>
             <a:fld id="{518D107B-B9C7-5B41-A168-55258AB95F52}" type="datetime1">
               <a:rPr lang="en-US" smtClean="0"/>
-              <a:t>4/2/26</a:t>
+              <a:t>4/16/26</a:t>
             </a:fld>
             <a:endParaRPr lang="en-US"/>
           </a:p>
@@ -3169,7 +3170,7 @@
             </a:pPr>
             <a:fld id="{3AD92D36-EE82-3142-B011-9831FB5E702F}" type="datetime1">
               <a:rPr lang="en-US" smtClean="0"/>
-              <a:t>4/2/26</a:t>
+              <a:t>4/16/26</a:t>
             </a:fld>
             <a:endParaRPr lang="en-US"/>
           </a:p>
@@ -3474,7 +3475,7 @@
             </a:pPr>
             <a:fld id="{3EE08B4B-7256-494F-A90D-3891BD685F4A}" type="datetime1">
               <a:rPr lang="en-US" smtClean="0"/>
-              <a:t>4/2/26</a:t>
+              <a:t>4/16/26</a:t>
             </a:fld>
             <a:endParaRPr lang="en-US" dirty="0"/>
           </a:p>
@@ -4101,7 +4102,7 @@
           <a:p>
             <a:r>
               <a:rPr lang="en-US" dirty="0"/>
-              <a:t>Spring 2025</a:t>
+              <a:t>Spring 2026</a:t>
             </a:r>
           </a:p>
         </p:txBody>
@@ -4176,7 +4177,7 @@
           <p:cNvPr id="2" name="Title 1">
             <a:extLst>
               <a:ext uri="{FF2B5EF4-FFF2-40B4-BE49-F238E27FC236}">
-                <a16:creationId xmlns:a16="http://schemas.microsoft.com/office/drawing/2014/main" id="{8A29BCA4-0B4B-F740-8201-49C110294E2D}"/>
+                <a16:creationId xmlns:a16="http://schemas.microsoft.com/office/drawing/2014/main" id="{223748FC-36C3-5C4F-941A-D87FB9DED5C1}"/>
               </a:ext>
             </a:extLst>
           </p:cNvPr>
@@ -4194,7 +4195,7 @@
           <a:p>
             <a:r>
               <a:rPr lang="en-US" dirty="0"/>
-              <a:t>Limiting Phenomena</a:t>
+              <a:t>PWR Water Chemistry</a:t>
             </a:r>
           </a:p>
         </p:txBody>
@@ -4204,7 +4205,7 @@
           <p:cNvPr id="3" name="Content Placeholder 2">
             <a:extLst>
               <a:ext uri="{FF2B5EF4-FFF2-40B4-BE49-F238E27FC236}">
-                <a16:creationId xmlns:a16="http://schemas.microsoft.com/office/drawing/2014/main" id="{C3D7765C-81F5-5540-9F76-54FF10BA4742}"/>
+                <a16:creationId xmlns:a16="http://schemas.microsoft.com/office/drawing/2014/main" id="{28D3FEC1-F7DC-0244-B126-8B006EC8A4BF}"/>
               </a:ext>
             </a:extLst>
           </p:cNvPr>
@@ -4222,45 +4223,39 @@
           <a:p>
             <a:r>
               <a:rPr lang="en-US" sz="2000" dirty="0"/>
-              <a:t>Fuel rod internal pressure</a:t>
+              <a:t>PWR problems were initially mitigated by imposing a hydrogen overpressure on the primary system, reducing the corrosion/oxygen potential, and raising the primary chemistry pH</a:t>
             </a:r>
           </a:p>
           <a:p>
             <a:r>
               <a:rPr lang="en-US" sz="2000" dirty="0"/>
-              <a:t>Significant reopening of the radial gap between the fuel stack and the cladding must be avoided to ensure the heat transfer to the coolant</a:t>
+              <a:t>Commercial PWR power plants use a steadily decreasing concentration of boric acid as a chemical shim for reactivity control throughout the fuel cycle, which results in the use of lithium hydroxide to control pH</a:t>
             </a:r>
           </a:p>
           <a:p>
             <a:r>
               <a:rPr lang="en-US" sz="2000" dirty="0"/>
-              <a:t>If a gap opens, fuel overheating and excessive fission gas release can occur, ultimately leading to fuel failure</a:t>
-            </a:r>
-          </a:p>
-          <a:p>
+              <a:t>The concept of ‘coordinated boron and lithium’ was developed, whereby the concentration of </a:t>
+            </a:r>
+            <a:r>
+              <a:rPr lang="en-US" sz="2000" dirty="0" err="1"/>
+              <a:t>LiOH</a:t>
+            </a:r>
             <a:r>
               <a:rPr lang="en-US" sz="2000" dirty="0"/>
-              <a:t>The original criterion required that the rod inner pressure must never exceed the outer coolant pressure</a:t>
+              <a:t> was gradually reduced in line with the boric acid reduction to maintain a constant pH</a:t>
             </a:r>
           </a:p>
           <a:p>
             <a:r>
               <a:rPr lang="en-US" sz="2000" dirty="0"/>
-              <a:t>This criterion was over-conservative and has been replaced by a ‘</a:t>
-            </a:r>
-            <a:r>
-              <a:rPr lang="en-US" sz="2000" dirty="0" err="1"/>
-              <a:t>nonlift</a:t>
-            </a:r>
+              <a:t>It was determined that heavy fuel crud buildup was avoided if a constant pH of &gt; 6.9 was maintained, as the solubility of Ni and Fe is dependent on pH</a:t>
+            </a:r>
+          </a:p>
+          <a:p>
             <a:r>
               <a:rPr lang="en-US" sz="2000" dirty="0"/>
-              <a:t>-off’ criterion, where the radial creep-out of the cladding (driven by gas pressure in excess of the system pressure) must never exceed the expansion rate of the pellet</a:t>
-            </a:r>
-          </a:p>
-          <a:p>
-            <a:r>
-              <a:rPr lang="en-US" sz="2000" dirty="0"/>
-              <a:t>Experiments have shown that a large overpressure of the gas (considerably more than 5.0 MPa) is needed to initiate the reopening</a:t>
+              <a:t>Zinc injection is utilized to reduce radiation fields, and also inhibits SCC</a:t>
             </a:r>
           </a:p>
           <a:p>
@@ -4269,9 +4264,6 @@
           <a:p>
             <a:endParaRPr lang="en-US" sz="2000" dirty="0"/>
           </a:p>
-          <a:p>
-            <a:endParaRPr lang="en-US" sz="2000" dirty="0"/>
-          </a:p>
         </p:txBody>
       </p:sp>
       <p:sp>
@@ -4279,7 +4271,7 @@
           <p:cNvPr id="4" name="Slide Number Placeholder 3">
             <a:extLst>
               <a:ext uri="{FF2B5EF4-FFF2-40B4-BE49-F238E27FC236}">
-                <a16:creationId xmlns:a16="http://schemas.microsoft.com/office/drawing/2014/main" id="{4D9A9137-2D69-5849-8A63-E4E592AAFEB7}"/>
+                <a16:creationId xmlns:a16="http://schemas.microsoft.com/office/drawing/2014/main" id="{19113E70-3461-2748-91F6-6B737FEEDF89}"/>
               </a:ext>
             </a:extLst>
           </p:cNvPr>
@@ -4312,7 +4304,7 @@
     </p:spTree>
     <p:extLst>
       <p:ext uri="{BB962C8B-B14F-4D97-AF65-F5344CB8AC3E}">
-        <p14:creationId xmlns:p14="http://schemas.microsoft.com/office/powerpoint/2010/main" val="1393934104"/>
+        <p14:creationId xmlns:p14="http://schemas.microsoft.com/office/powerpoint/2010/main" val="3241420031"/>
       </p:ext>
     </p:extLst>
   </p:cSld>
@@ -4344,7 +4336,7 @@
           <p:cNvPr id="2" name="Title 1">
             <a:extLst>
               <a:ext uri="{FF2B5EF4-FFF2-40B4-BE49-F238E27FC236}">
-                <a16:creationId xmlns:a16="http://schemas.microsoft.com/office/drawing/2014/main" id="{8A29BCA4-0B4B-F740-8201-49C110294E2D}"/>
+                <a16:creationId xmlns:a16="http://schemas.microsoft.com/office/drawing/2014/main" id="{CBDD9220-1256-004D-A46A-860F4CCF4AD8}"/>
               </a:ext>
             </a:extLst>
           </p:cNvPr>
@@ -4362,7 +4354,7 @@
           <a:p>
             <a:r>
               <a:rPr lang="en-US" dirty="0"/>
-              <a:t>Limiting Phenomena</a:t>
+              <a:t>Radiation Control</a:t>
             </a:r>
           </a:p>
         </p:txBody>
@@ -4372,7 +4364,7 @@
           <p:cNvPr id="3" name="Content Placeholder 2">
             <a:extLst>
               <a:ext uri="{FF2B5EF4-FFF2-40B4-BE49-F238E27FC236}">
-                <a16:creationId xmlns:a16="http://schemas.microsoft.com/office/drawing/2014/main" id="{C3D7765C-81F5-5540-9F76-54FF10BA4742}"/>
+                <a16:creationId xmlns:a16="http://schemas.microsoft.com/office/drawing/2014/main" id="{E92720F9-E029-CA4F-905B-409E6DEB0733}"/>
               </a:ext>
             </a:extLst>
           </p:cNvPr>
@@ -4390,36 +4382,58 @@
           <a:p>
             <a:r>
               <a:rPr lang="en-US" sz="2000" dirty="0"/>
-              <a:t>Departure from nucleate boiling</a:t>
+              <a:t>Corrosion products deposited on the fuel become activated, are released back into the coolant, and may be deposited on out-of-core surfaces</a:t>
             </a:r>
           </a:p>
           <a:p>
             <a:r>
               <a:rPr lang="en-US" sz="2000" dirty="0"/>
-              <a:t>With increasing heat flux there comes a point at which the heat transfer from a fuel rod rapidly decreases due to the insulating effect of a steam blanket that forms on the rod surface, resulting in a severe increase of cladding temperature and possibly cladding failure</a:t>
+              <a:t>During shutdowns, the major radiation source for personnel exposure is activated corrosion products, deposited on primary system surfaces</a:t>
             </a:r>
           </a:p>
           <a:p>
             <a:r>
               <a:rPr lang="en-US" sz="2000" dirty="0"/>
-              <a:t>The ratio of the heat flux needed to cause departure from nucleate boiling (DNB) at given local coolant properties (pressure, enthalpy, mass flow rate) to the actual local heat flux of a fuel rod is defined as the DNBR</a:t>
-            </a:r>
-          </a:p>
-          <a:p>
+              <a:t>The mechanism of the zinc ion effect is complex, as release of </a:t>
+            </a:r>
+            <a:r>
+              <a:rPr lang="en-US" sz="2000" baseline="30000" dirty="0"/>
+              <a:t>60</a:t>
+            </a:r>
             <a:r>
               <a:rPr lang="en-US" sz="2000" dirty="0"/>
-              <a:t>This phenomenon may limit the maximum allowed thermal power of a given PWR</a:t>
+              <a:t>Co from fuel crud is reduced, and deposition out-core is also reduced</a:t>
+            </a:r>
+          </a:p>
+          <a:p>
+            <a:r>
+              <a:rPr lang="en-US" sz="2000" dirty="0"/>
+              <a:t>Aqueous zinc ion promotes the formation of a more protective spinel-structured corrosion film on stainless steel, especially when reducing conditions are present</a:t>
+            </a:r>
+          </a:p>
+          <a:p>
+            <a:r>
+              <a:rPr lang="en-US" sz="2000" dirty="0"/>
+              <a:t>Both cobalt and zinc favor tetrahedral sites in the spinel structure, but the site preference energy favors zinc incorporation</a:t>
+            </a:r>
+          </a:p>
+          <a:p>
+            <a:r>
+              <a:rPr lang="en-US" sz="2000" dirty="0"/>
+              <a:t>The </a:t>
+            </a:r>
+            <a:r>
+              <a:rPr lang="en-US" sz="2000" baseline="30000" dirty="0"/>
+              <a:t>60</a:t>
+            </a:r>
+            <a:r>
+              <a:rPr lang="en-US" sz="2000" dirty="0"/>
+              <a:t>Co remains longer in the water and is eventually removed by the cleanup system</a:t>
             </a:r>
           </a:p>
           <a:p>
             <a:endParaRPr lang="en-US" sz="2000" dirty="0"/>
           </a:p>
-          <a:p>
-            <a:endParaRPr lang="en-US" sz="2000" dirty="0"/>
-          </a:p>
-          <a:p>
-            <a:endParaRPr lang="en-US" sz="2000" dirty="0"/>
-          </a:p>
         </p:txBody>
       </p:sp>
       <p:sp>
@@ -4427,7 +4441,7 @@
           <p:cNvPr id="4" name="Slide Number Placeholder 3">
             <a:extLst>
               <a:ext uri="{FF2B5EF4-FFF2-40B4-BE49-F238E27FC236}">
-                <a16:creationId xmlns:a16="http://schemas.microsoft.com/office/drawing/2014/main" id="{4D9A9137-2D69-5849-8A63-E4E592AAFEB7}"/>
+                <a16:creationId xmlns:a16="http://schemas.microsoft.com/office/drawing/2014/main" id="{B161F9CF-48AB-2543-8AD6-EE3D9FF6F362}"/>
               </a:ext>
             </a:extLst>
           </p:cNvPr>
@@ -4460,7 +4474,7 @@
     </p:spTree>
     <p:extLst>
       <p:ext uri="{BB962C8B-B14F-4D97-AF65-F5344CB8AC3E}">
-        <p14:creationId xmlns:p14="http://schemas.microsoft.com/office/powerpoint/2010/main" val="3606355578"/>
+        <p14:creationId xmlns:p14="http://schemas.microsoft.com/office/powerpoint/2010/main" val="3509847149"/>
       </p:ext>
     </p:extLst>
   </p:cSld>
@@ -4492,7 +4506,7 @@
           <p:cNvPr id="2" name="Title 1">
             <a:extLst>
               <a:ext uri="{FF2B5EF4-FFF2-40B4-BE49-F238E27FC236}">
-                <a16:creationId xmlns:a16="http://schemas.microsoft.com/office/drawing/2014/main" id="{8A29BCA4-0B4B-F740-8201-49C110294E2D}"/>
+                <a16:creationId xmlns:a16="http://schemas.microsoft.com/office/drawing/2014/main" id="{1F3C3F2F-49AA-C446-870B-C96ED33952B4}"/>
               </a:ext>
             </a:extLst>
           </p:cNvPr>
@@ -4510,72 +4524,17 @@
           <a:p>
             <a:r>
               <a:rPr lang="en-US" dirty="0"/>
-              <a:t>Limiting Phenomena</a:t>
-            </a:r>
-          </a:p>
-        </p:txBody>
-      </p:sp>
-      <p:sp>
-        <p:nvSpPr>
-          <p:cNvPr id="3" name="Content Placeholder 2">
+              <a:t>PWR Water Chemistry</a:t>
+            </a:r>
+          </a:p>
+        </p:txBody>
+      </p:sp>
+      <p:sp>
+        <p:nvSpPr>
+          <p:cNvPr id="4" name="Slide Number Placeholder 3">
             <a:extLst>
               <a:ext uri="{FF2B5EF4-FFF2-40B4-BE49-F238E27FC236}">
-                <a16:creationId xmlns:a16="http://schemas.microsoft.com/office/drawing/2014/main" id="{C3D7765C-81F5-5540-9F76-54FF10BA4742}"/>
-              </a:ext>
-            </a:extLst>
-          </p:cNvPr>
-          <p:cNvSpPr>
-            <a:spLocks noGrp="1"/>
-          </p:cNvSpPr>
-          <p:nvPr>
-            <p:ph idx="1"/>
-          </p:nvPr>
-        </p:nvSpPr>
-        <p:spPr/>
-        <p:txBody>
-          <a:bodyPr/>
-          <a:lstStyle/>
-          <a:p>
-            <a:r>
-              <a:rPr lang="en-US" sz="2000" dirty="0"/>
-              <a:t>Normal operation limits</a:t>
-            </a:r>
-          </a:p>
-          <a:p>
-            <a:r>
-              <a:rPr lang="en-US" sz="2000" dirty="0"/>
-              <a:t>Constraints on the axial LHR distribution are typically applied at the core design level and during normal operation to guarantee that the conditions are never worse than those assumed in scenarios considered in the accident analyses</a:t>
-            </a:r>
-          </a:p>
-          <a:p>
-            <a:r>
-              <a:rPr lang="en-US" sz="2000" dirty="0"/>
-              <a:t>The maximum allowed LHR may depend on the axial position and on burnup, and can be reactor- and even cycle-specific</a:t>
-            </a:r>
-          </a:p>
-          <a:p>
-            <a:r>
-              <a:rPr lang="en-US" sz="2000" dirty="0"/>
-              <a:t>The fulfilment of the constraint is verified during the reload safety evaluation process as well as during plant operation</a:t>
-            </a:r>
-          </a:p>
-          <a:p>
-            <a:endParaRPr lang="en-US" sz="2000" dirty="0"/>
-          </a:p>
-          <a:p>
-            <a:endParaRPr lang="en-US" sz="2000" dirty="0"/>
-          </a:p>
-          <a:p>
-            <a:endParaRPr lang="en-US" sz="2000" dirty="0"/>
-          </a:p>
-        </p:txBody>
-      </p:sp>
-      <p:sp>
-        <p:nvSpPr>
-          <p:cNvPr id="4" name="Slide Number Placeholder 3">
-            <a:extLst>
-              <a:ext uri="{FF2B5EF4-FFF2-40B4-BE49-F238E27FC236}">
-                <a16:creationId xmlns:a16="http://schemas.microsoft.com/office/drawing/2014/main" id="{4D9A9137-2D69-5849-8A63-E4E592AAFEB7}"/>
+                <a16:creationId xmlns:a16="http://schemas.microsoft.com/office/drawing/2014/main" id="{A46367C6-E053-0442-B281-D57772FF1362}"/>
               </a:ext>
             </a:extLst>
           </p:cNvPr>
@@ -4605,10 +4564,70 @@
           </a:p>
         </p:txBody>
       </p:sp>
+      <p:pic>
+        <p:nvPicPr>
+          <p:cNvPr id="5" name="Picture 4">
+            <a:extLst>
+              <a:ext uri="{FF2B5EF4-FFF2-40B4-BE49-F238E27FC236}">
+                <a16:creationId xmlns:a16="http://schemas.microsoft.com/office/drawing/2014/main" id="{F2E66B19-9605-A24C-A925-111391E636CA}"/>
+              </a:ext>
+            </a:extLst>
+          </p:cNvPr>
+          <p:cNvPicPr>
+            <a:picLocks noChangeAspect="1"/>
+          </p:cNvPicPr>
+          <p:nvPr/>
+        </p:nvPicPr>
+        <p:blipFill>
+          <a:blip r:embed="rId2"/>
+          <a:stretch>
+            <a:fillRect/>
+          </a:stretch>
+        </p:blipFill>
+        <p:spPr>
+          <a:xfrm>
+            <a:off x="4940489" y="2198687"/>
+            <a:ext cx="7057409" cy="4220140"/>
+          </a:xfrm>
+          <a:prstGeom prst="rect">
+            <a:avLst/>
+          </a:prstGeom>
+        </p:spPr>
+      </p:pic>
+      <p:pic>
+        <p:nvPicPr>
+          <p:cNvPr id="6" name="Picture 5">
+            <a:extLst>
+              <a:ext uri="{FF2B5EF4-FFF2-40B4-BE49-F238E27FC236}">
+                <a16:creationId xmlns:a16="http://schemas.microsoft.com/office/drawing/2014/main" id="{0C721905-C656-AE49-800D-0371F73CE6DD}"/>
+              </a:ext>
+            </a:extLst>
+          </p:cNvPr>
+          <p:cNvPicPr>
+            <a:picLocks noChangeAspect="1"/>
+          </p:cNvPicPr>
+          <p:nvPr/>
+        </p:nvPicPr>
+        <p:blipFill>
+          <a:blip r:embed="rId3"/>
+          <a:stretch>
+            <a:fillRect/>
+          </a:stretch>
+        </p:blipFill>
+        <p:spPr>
+          <a:xfrm>
+            <a:off x="382801" y="2579686"/>
+            <a:ext cx="4711700" cy="3378200"/>
+          </a:xfrm>
+          <a:prstGeom prst="rect">
+            <a:avLst/>
+          </a:prstGeom>
+        </p:spPr>
+      </p:pic>
     </p:spTree>
     <p:extLst>
       <p:ext uri="{BB962C8B-B14F-4D97-AF65-F5344CB8AC3E}">
-        <p14:creationId xmlns:p14="http://schemas.microsoft.com/office/powerpoint/2010/main" val="1774682356"/>
+        <p14:creationId xmlns:p14="http://schemas.microsoft.com/office/powerpoint/2010/main" val="3092764370"/>
       </p:ext>
     </p:extLst>
   </p:cSld>
@@ -4640,7 +4659,7 @@
           <p:cNvPr id="2" name="Title 1">
             <a:extLst>
               <a:ext uri="{FF2B5EF4-FFF2-40B4-BE49-F238E27FC236}">
-                <a16:creationId xmlns:a16="http://schemas.microsoft.com/office/drawing/2014/main" id="{A72273D5-9605-154F-8A18-EF6B277587B3}"/>
+                <a16:creationId xmlns:a16="http://schemas.microsoft.com/office/drawing/2014/main" id="{EB85FC24-2EBA-A09B-C24A-74219BD03C53}"/>
               </a:ext>
             </a:extLst>
           </p:cNvPr>
@@ -4658,7 +4677,7 @@
           <a:p>
             <a:r>
               <a:rPr lang="en-US" dirty="0"/>
-              <a:t>Summary</a:t>
+              <a:t>BWR Water Chemistry</a:t>
             </a:r>
           </a:p>
         </p:txBody>
@@ -4668,7 +4687,7 @@
           <p:cNvPr id="3" name="Content Placeholder 2">
             <a:extLst>
               <a:ext uri="{FF2B5EF4-FFF2-40B4-BE49-F238E27FC236}">
-                <a16:creationId xmlns:a16="http://schemas.microsoft.com/office/drawing/2014/main" id="{26EDA549-36CE-4E41-9022-8F43E83AA88A}"/>
+                <a16:creationId xmlns:a16="http://schemas.microsoft.com/office/drawing/2014/main" id="{8FE8D090-DEFE-6C39-DF07-955626F08728}"/>
               </a:ext>
             </a:extLst>
           </p:cNvPr>
@@ -4679,36 +4698,26 @@
             <p:ph idx="1"/>
           </p:nvPr>
         </p:nvSpPr>
-        <p:spPr/>
+        <p:spPr>
+          <a:xfrm>
+            <a:off x="609600" y="2160495"/>
+            <a:ext cx="5486400" cy="3965670"/>
+          </a:xfrm>
+        </p:spPr>
         <p:txBody>
           <a:bodyPr/>
           <a:lstStyle/>
           <a:p>
             <a:r>
               <a:rPr lang="en-US" dirty="0"/>
-              <a:t>There are a variety of limiting phenomena in LWR fuel systems that provide the boundaries of operation and lifetime</a:t>
+              <a:t>Similarly, BWR water chemistry has to be optimized to meet requirements on material degradation, fuel performance, and control of radiation fields</a:t>
             </a:r>
           </a:p>
           <a:p>
             <a:r>
               <a:rPr lang="en-US" dirty="0"/>
-              <a:t>These limits include phenomena in the fuel, gap, cladding, corrosion, and assembly levels</a:t>
-            </a:r>
-          </a:p>
-          <a:p>
-            <a:r>
-              <a:rPr lang="en-US" dirty="0"/>
-              <a:t>The performance of uranium dioxide and MOX fuels in LWR nuclear reactors is well established</a:t>
-            </a:r>
-          </a:p>
-          <a:p>
-            <a:r>
-              <a:rPr lang="en-US" dirty="0"/>
-              <a:t>These fuels have demonstrated a very good behavior during irradiation, favored by their high melting temperature, providing large operating temperature margins</a:t>
-            </a:r>
-          </a:p>
-          <a:p>
-            <a:endParaRPr lang="en-US" dirty="0"/>
+              <a:t>BWR chemistry strategies have changed over time, focusing on purity, limiting SCC, and control of radiation fields</a:t>
+            </a:r>
           </a:p>
         </p:txBody>
       </p:sp>
@@ -4717,7 +4726,7 @@
           <p:cNvPr id="4" name="Slide Number Placeholder 3">
             <a:extLst>
               <a:ext uri="{FF2B5EF4-FFF2-40B4-BE49-F238E27FC236}">
-                <a16:creationId xmlns:a16="http://schemas.microsoft.com/office/drawing/2014/main" id="{2EED1C45-8DE4-B148-8306-CEB5503B2503}"/>
+                <a16:creationId xmlns:a16="http://schemas.microsoft.com/office/drawing/2014/main" id="{F17178F3-F12D-C831-FCB6-59A1A0A534D5}"/>
               </a:ext>
             </a:extLst>
           </p:cNvPr>
@@ -4747,10 +4756,70 @@
           </a:p>
         </p:txBody>
       </p:sp>
+      <p:pic>
+        <p:nvPicPr>
+          <p:cNvPr id="5" name="Picture 4">
+            <a:extLst>
+              <a:ext uri="{FF2B5EF4-FFF2-40B4-BE49-F238E27FC236}">
+                <a16:creationId xmlns:a16="http://schemas.microsoft.com/office/drawing/2014/main" id="{2D592F25-5B3B-84CF-4F64-47206818B7DF}"/>
+              </a:ext>
+            </a:extLst>
+          </p:cNvPr>
+          <p:cNvPicPr>
+            <a:picLocks noChangeAspect="1"/>
+          </p:cNvPicPr>
+          <p:nvPr/>
+        </p:nvPicPr>
+        <p:blipFill>
+          <a:blip r:embed="rId2"/>
+          <a:stretch>
+            <a:fillRect/>
+          </a:stretch>
+        </p:blipFill>
+        <p:spPr>
+          <a:xfrm>
+            <a:off x="5889876" y="1460641"/>
+            <a:ext cx="6196521" cy="2799052"/>
+          </a:xfrm>
+          <a:prstGeom prst="rect">
+            <a:avLst/>
+          </a:prstGeom>
+        </p:spPr>
+      </p:pic>
+      <p:pic>
+        <p:nvPicPr>
+          <p:cNvPr id="6" name="Picture 5">
+            <a:extLst>
+              <a:ext uri="{FF2B5EF4-FFF2-40B4-BE49-F238E27FC236}">
+                <a16:creationId xmlns:a16="http://schemas.microsoft.com/office/drawing/2014/main" id="{009DD2BD-A69A-E017-DC13-7B27DC080E54}"/>
+              </a:ext>
+            </a:extLst>
+          </p:cNvPr>
+          <p:cNvPicPr>
+            <a:picLocks noChangeAspect="1"/>
+          </p:cNvPicPr>
+          <p:nvPr/>
+        </p:nvPicPr>
+        <p:blipFill>
+          <a:blip r:embed="rId3"/>
+          <a:stretch>
+            <a:fillRect/>
+          </a:stretch>
+        </p:blipFill>
+        <p:spPr>
+          <a:xfrm>
+            <a:off x="7373257" y="4385975"/>
+            <a:ext cx="3417207" cy="2335501"/>
+          </a:xfrm>
+          <a:prstGeom prst="rect">
+            <a:avLst/>
+          </a:prstGeom>
+        </p:spPr>
+      </p:pic>
     </p:spTree>
     <p:extLst>
       <p:ext uri="{BB962C8B-B14F-4D97-AF65-F5344CB8AC3E}">
-        <p14:creationId xmlns:p14="http://schemas.microsoft.com/office/powerpoint/2010/main" val="1719977142"/>
+        <p14:creationId xmlns:p14="http://schemas.microsoft.com/office/powerpoint/2010/main" val="2103440818"/>
       </p:ext>
     </p:extLst>
   </p:cSld>
@@ -4782,7 +4851,7 @@
           <p:cNvPr id="2" name="Title 1">
             <a:extLst>
               <a:ext uri="{FF2B5EF4-FFF2-40B4-BE49-F238E27FC236}">
-                <a16:creationId xmlns:a16="http://schemas.microsoft.com/office/drawing/2014/main" id="{96329CC1-34E4-A34F-8621-801D8886CE7C}"/>
+                <a16:creationId xmlns:a16="http://schemas.microsoft.com/office/drawing/2014/main" id="{74BDDA82-5869-7FBE-87D9-EAD25B16D2D8}"/>
               </a:ext>
             </a:extLst>
           </p:cNvPr>
@@ -4793,20 +4862,64 @@
             <p:ph type="title"/>
           </p:nvPr>
         </p:nvSpPr>
-        <p:spPr>
-          <a:xfrm>
-            <a:off x="963084" y="1234721"/>
-            <a:ext cx="10363200" cy="1362075"/>
-          </a:xfrm>
-        </p:spPr>
+        <p:spPr/>
         <p:txBody>
           <a:bodyPr/>
           <a:lstStyle/>
           <a:p>
             <a:r>
               <a:rPr lang="en-US" dirty="0"/>
-              <a:t>water chemistry</a:t>
-            </a:r>
+              <a:t>IGSCC Mitigation</a:t>
+            </a:r>
+          </a:p>
+        </p:txBody>
+      </p:sp>
+      <p:sp>
+        <p:nvSpPr>
+          <p:cNvPr id="3" name="Content Placeholder 2">
+            <a:extLst>
+              <a:ext uri="{FF2B5EF4-FFF2-40B4-BE49-F238E27FC236}">
+                <a16:creationId xmlns:a16="http://schemas.microsoft.com/office/drawing/2014/main" id="{F21C536B-EEF7-C80A-B3F4-F689DDBB32F3}"/>
+              </a:ext>
+            </a:extLst>
+          </p:cNvPr>
+          <p:cNvSpPr>
+            <a:spLocks noGrp="1"/>
+          </p:cNvSpPr>
+          <p:nvPr>
+            <p:ph idx="1"/>
+          </p:nvPr>
+        </p:nvSpPr>
+        <p:spPr/>
+        <p:txBody>
+          <a:bodyPr/>
+          <a:lstStyle/>
+          <a:p>
+            <a:r>
+              <a:rPr lang="en-US" dirty="0"/>
+              <a:t>Intergranular SCC (IGSCC) of 304 stainless steel core internals (and other materials) is one of the key chemistry control issues in BWRs</a:t>
+            </a:r>
+          </a:p>
+          <a:p>
+            <a:r>
+              <a:rPr lang="en-US" dirty="0"/>
+              <a:t>The control of the electrochemical potential (Redox potential) by hydrogen injection was effective at reducing IGSCC</a:t>
+            </a:r>
+          </a:p>
+          <a:p>
+            <a:r>
+              <a:rPr lang="en-US" dirty="0"/>
+              <a:t>Move from normal water chemistry (NWC) to hydrogen water chemistry (HWC) limits crack growth</a:t>
+            </a:r>
+          </a:p>
+          <a:p>
+            <a:r>
+              <a:rPr lang="en-US" dirty="0"/>
+              <a:t>Added noble metals (such as Pt) as coating on surfaces, or injection into water to increase efficiency of HWC</a:t>
+            </a:r>
+          </a:p>
+          <a:p>
+            <a:endParaRPr lang="en-US" dirty="0"/>
           </a:p>
         </p:txBody>
       </p:sp>
@@ -4815,7 +4928,7 @@
           <p:cNvPr id="4" name="Slide Number Placeholder 3">
             <a:extLst>
               <a:ext uri="{FF2B5EF4-FFF2-40B4-BE49-F238E27FC236}">
-                <a16:creationId xmlns:a16="http://schemas.microsoft.com/office/drawing/2014/main" id="{2BFF06B0-02C9-F34D-82A4-D2D5BBAF6842}"/>
+                <a16:creationId xmlns:a16="http://schemas.microsoft.com/office/drawing/2014/main" id="{A1FB336E-AFB3-8CFE-6666-317CC409A1A6}"/>
               </a:ext>
             </a:extLst>
           </p:cNvPr>
@@ -4834,7 +4947,7 @@
             <a:pPr>
               <a:defRPr/>
             </a:pPr>
-            <a:fld id="{0DA6BD0F-ABBC-C14D-BC96-77BE126A748B}" type="slidenum">
+            <a:fld id="{3FF2C605-4958-CF43-AA48-80339EFDB0AF}" type="slidenum">
               <a:rPr lang="en-US" smtClean="0"/>
               <a:pPr>
                 <a:defRPr/>
@@ -4848,7 +4961,7 @@
     </p:spTree>
     <p:extLst>
       <p:ext uri="{BB962C8B-B14F-4D97-AF65-F5344CB8AC3E}">
-        <p14:creationId xmlns:p14="http://schemas.microsoft.com/office/powerpoint/2010/main" val="631912674"/>
+        <p14:creationId xmlns:p14="http://schemas.microsoft.com/office/powerpoint/2010/main" val="1582631921"/>
       </p:ext>
     </p:extLst>
   </p:cSld>
@@ -4880,7 +4993,7 @@
           <p:cNvPr id="2" name="Title 1">
             <a:extLst>
               <a:ext uri="{FF2B5EF4-FFF2-40B4-BE49-F238E27FC236}">
-                <a16:creationId xmlns:a16="http://schemas.microsoft.com/office/drawing/2014/main" id="{9AF52E77-31AB-F546-9341-5E688A3FEC64}"/>
+                <a16:creationId xmlns:a16="http://schemas.microsoft.com/office/drawing/2014/main" id="{8067AE1E-3F09-3329-B656-855C48A08C64}"/>
               </a:ext>
             </a:extLst>
           </p:cNvPr>
@@ -4898,7 +5011,7 @@
           <a:p>
             <a:r>
               <a:rPr lang="en-US" dirty="0"/>
-              <a:t>Water Chemistry</a:t>
+              <a:t>IGSCC Mitigation</a:t>
             </a:r>
           </a:p>
         </p:txBody>
@@ -4908,7 +5021,7 @@
           <p:cNvPr id="3" name="Content Placeholder 2">
             <a:extLst>
               <a:ext uri="{FF2B5EF4-FFF2-40B4-BE49-F238E27FC236}">
-                <a16:creationId xmlns:a16="http://schemas.microsoft.com/office/drawing/2014/main" id="{7C7F56AD-1ED8-C841-913F-284D136CDA16}"/>
+                <a16:creationId xmlns:a16="http://schemas.microsoft.com/office/drawing/2014/main" id="{5CCF6747-E57A-1ACD-5808-FA6030AFC528}"/>
               </a:ext>
             </a:extLst>
           </p:cNvPr>
@@ -4926,31 +5039,22 @@
           <a:p>
             <a:r>
               <a:rPr lang="en-US" dirty="0"/>
-              <a:t>Excellent water quality is essential if material degradation is to be controlled</a:t>
+              <a:t>Noble metal addition had previously only been conducted during outages, but changed to online addition to prevent ‘crack flanking’</a:t>
             </a:r>
           </a:p>
           <a:p>
             <a:r>
               <a:rPr lang="en-US" dirty="0"/>
-              <a:t>Primary system water chemistry affects fuel performance through the deposition of corrosion products on fuel pin surfaces</a:t>
-            </a:r>
+              <a:t>Areas in the core are protected by different mitigation strategies, based on temperatures and two-phase flow</a:t>
+            </a:r>
+          </a:p>
+          <a:p>
+            <a:endParaRPr lang="en-US" dirty="0"/>
           </a:p>
           <a:p>
             <a:r>
               <a:rPr lang="en-US" dirty="0"/>
-              <a:t>In the early days of nuclear power plant operation, impurities in the coolant water were a major factor in causing excessive corrosion</a:t>
-            </a:r>
-          </a:p>
-          <a:p>
-            <a:r>
-              <a:rPr lang="en-US" dirty="0"/>
-              <a:t>Chlorides and sulfates are particularly aggressive in increasing intergranular stress corrosion cracking (IGSCC) and other corrosion processes</a:t>
-            </a:r>
-          </a:p>
-          <a:p>
-            <a:r>
-              <a:rPr lang="en-US" dirty="0"/>
-              <a:t>Initial efforts to improve water quality brought about a slow but steady reduction in impurities through improved design and operation of purification systems</a:t>
+              <a:t>Radiation control: Zn injection also used in BWRs</a:t>
             </a:r>
           </a:p>
           <a:p>
@@ -4963,7 +5067,7 @@
           <p:cNvPr id="4" name="Slide Number Placeholder 3">
             <a:extLst>
               <a:ext uri="{FF2B5EF4-FFF2-40B4-BE49-F238E27FC236}">
-                <a16:creationId xmlns:a16="http://schemas.microsoft.com/office/drawing/2014/main" id="{99AC9B1E-E8C9-7143-98CB-9210C6D04189}"/>
+                <a16:creationId xmlns:a16="http://schemas.microsoft.com/office/drawing/2014/main" id="{E24BDF3A-1A97-5400-29FC-0AEE56472885}"/>
               </a:ext>
             </a:extLst>
           </p:cNvPr>
@@ -4996,7 +5100,7 @@
     </p:spTree>
     <p:extLst>
       <p:ext uri="{BB962C8B-B14F-4D97-AF65-F5344CB8AC3E}">
-        <p14:creationId xmlns:p14="http://schemas.microsoft.com/office/powerpoint/2010/main" val="2001452338"/>
+        <p14:creationId xmlns:p14="http://schemas.microsoft.com/office/powerpoint/2010/main" val="1690572744"/>
       </p:ext>
     </p:extLst>
   </p:cSld>
@@ -5028,7 +5132,7 @@
           <p:cNvPr id="2" name="Title 1">
             <a:extLst>
               <a:ext uri="{FF2B5EF4-FFF2-40B4-BE49-F238E27FC236}">
-                <a16:creationId xmlns:a16="http://schemas.microsoft.com/office/drawing/2014/main" id="{ED8C7DB5-8C9F-9272-DF93-739A40E25745}"/>
+                <a16:creationId xmlns:a16="http://schemas.microsoft.com/office/drawing/2014/main" id="{47E9658B-33B9-E822-6E99-661B220ED172}"/>
               </a:ext>
             </a:extLst>
           </p:cNvPr>
@@ -5046,7 +5150,7 @@
           <a:p>
             <a:r>
               <a:rPr lang="en-US" dirty="0"/>
-              <a:t>Water Chemistry</a:t>
+              <a:t>Fuel Performance Concerns</a:t>
             </a:r>
           </a:p>
         </p:txBody>
@@ -5056,7 +5160,7 @@
           <p:cNvPr id="3" name="Content Placeholder 2">
             <a:extLst>
               <a:ext uri="{FF2B5EF4-FFF2-40B4-BE49-F238E27FC236}">
-                <a16:creationId xmlns:a16="http://schemas.microsoft.com/office/drawing/2014/main" id="{329644BD-EDB8-9CB0-DEBB-F80F7AF8E06B}"/>
+                <a16:creationId xmlns:a16="http://schemas.microsoft.com/office/drawing/2014/main" id="{A555A769-8950-755F-FC45-CF5CE864CC75}"/>
               </a:ext>
             </a:extLst>
           </p:cNvPr>
@@ -5067,30 +5171,50 @@
             <p:ph idx="1"/>
           </p:nvPr>
         </p:nvSpPr>
-        <p:spPr/>
+        <p:spPr>
+          <a:xfrm>
+            <a:off x="609600" y="1968501"/>
+            <a:ext cx="10972800" cy="4157664"/>
+          </a:xfrm>
+        </p:spPr>
         <p:txBody>
           <a:bodyPr/>
           <a:lstStyle/>
           <a:p>
             <a:r>
-              <a:rPr lang="en-US" sz="2400" dirty="0"/>
-              <a:t>Excellent water chemistry alone is not sufficient to control corrosion, thus programs to modify water chemistry, including minimizing oxygen to reduce the electrochemical corrosion potential (ECP) in BWRs, and oxygen and pH control in PWRs, have been implemented </a:t>
-            </a:r>
-          </a:p>
-          <a:p>
-            <a:r>
-              <a:rPr lang="en-US" sz="2400" dirty="0"/>
-              <a:t>Additives to further inhibit the corrosion process have been developed and are now in widespread use</a:t>
-            </a:r>
-          </a:p>
-          <a:p>
-            <a:r>
-              <a:rPr lang="en-US" sz="2400" dirty="0"/>
-              <a:t>Water chemistry advances are now an important part of the overall operating strategy to control material degradation</a:t>
-            </a:r>
-          </a:p>
-          <a:p>
-            <a:endParaRPr lang="en-US" dirty="0"/>
+              <a:rPr lang="en-US" sz="2200" dirty="0"/>
+              <a:t>CRUD deposition on the cladding surface can reduce heat transfer, increasing fuel temperatures, which also increases oxidation rates</a:t>
+            </a:r>
+          </a:p>
+          <a:p>
+            <a:r>
+              <a:rPr lang="en-US" sz="2200" dirty="0"/>
+              <a:t>Addition of Zn and noble metals can increase the adherence of CRUD deposits on the cladding</a:t>
+            </a:r>
+          </a:p>
+          <a:p>
+            <a:r>
+              <a:rPr lang="en-US" sz="2200" dirty="0"/>
+              <a:t>Zn/noble metals also can cause a failure/cracking of the oxide layer, promoting further corrosion</a:t>
+            </a:r>
+          </a:p>
+          <a:p>
+            <a:r>
+              <a:rPr lang="en-US" sz="2200" dirty="0"/>
+              <a:t>There are concentration limits on Zn and noble metals to limit CRUD formation</a:t>
+            </a:r>
+          </a:p>
+          <a:p>
+            <a:r>
+              <a:rPr lang="en-US" sz="2200" dirty="0"/>
+              <a:t>In PWRs, CRUD-induced power shifts (CRIPs/CIPS) can occur by trapping boron in the CRUD, changing the power distribution</a:t>
+            </a:r>
+          </a:p>
+          <a:p>
+            <a:r>
+              <a:rPr lang="en-US" sz="2200" dirty="0"/>
+              <a:t>CRUD-related failures have been eliminated since about 2005</a:t>
+            </a:r>
           </a:p>
         </p:txBody>
       </p:sp>
@@ -5099,7 +5223,7 @@
           <p:cNvPr id="4" name="Slide Number Placeholder 3">
             <a:extLst>
               <a:ext uri="{FF2B5EF4-FFF2-40B4-BE49-F238E27FC236}">
-                <a16:creationId xmlns:a16="http://schemas.microsoft.com/office/drawing/2014/main" id="{2BBBF92D-7B6E-5B6B-CFEF-769C07D52DFD}"/>
+                <a16:creationId xmlns:a16="http://schemas.microsoft.com/office/drawing/2014/main" id="{DEE5DD47-C1C0-3C20-896F-35F39A343017}"/>
               </a:ext>
             </a:extLst>
           </p:cNvPr>
@@ -5132,7 +5256,7 @@
     </p:spTree>
     <p:extLst>
       <p:ext uri="{BB962C8B-B14F-4D97-AF65-F5344CB8AC3E}">
-        <p14:creationId xmlns:p14="http://schemas.microsoft.com/office/powerpoint/2010/main" val="2579169111"/>
+        <p14:creationId xmlns:p14="http://schemas.microsoft.com/office/powerpoint/2010/main" val="947350209"/>
       </p:ext>
     </p:extLst>
   </p:cSld>
@@ -5164,7 +5288,7 @@
           <p:cNvPr id="2" name="Title 1">
             <a:extLst>
               <a:ext uri="{FF2B5EF4-FFF2-40B4-BE49-F238E27FC236}">
-                <a16:creationId xmlns:a16="http://schemas.microsoft.com/office/drawing/2014/main" id="{D6B63320-2ECA-1E43-BDFF-1C32856B8FEE}"/>
+                <a16:creationId xmlns:a16="http://schemas.microsoft.com/office/drawing/2014/main" id="{D672ED49-9229-774F-532E-A2198BDEE4C1}"/>
               </a:ext>
             </a:extLst>
           </p:cNvPr>
@@ -5182,7 +5306,7 @@
           <a:p>
             <a:r>
               <a:rPr lang="en-US" dirty="0"/>
-              <a:t>PWR Water Chemistry</a:t>
+              <a:t>Key Themes Over Time</a:t>
             </a:r>
           </a:p>
         </p:txBody>
@@ -5192,7 +5316,7 @@
           <p:cNvPr id="3" name="Content Placeholder 2">
             <a:extLst>
               <a:ext uri="{FF2B5EF4-FFF2-40B4-BE49-F238E27FC236}">
-                <a16:creationId xmlns:a16="http://schemas.microsoft.com/office/drawing/2014/main" id="{4CC80E29-EDF9-0543-8546-62EDFAF23A66}"/>
+                <a16:creationId xmlns:a16="http://schemas.microsoft.com/office/drawing/2014/main" id="{98408B1D-0F92-E112-393A-469F6BD69ECB}"/>
               </a:ext>
             </a:extLst>
           </p:cNvPr>
@@ -5203,44 +5327,160 @@
             <p:ph idx="1"/>
           </p:nvPr>
         </p:nvSpPr>
-        <p:spPr>
-          <a:xfrm>
-            <a:off x="609600" y="2160495"/>
-            <a:ext cx="5486400" cy="3965670"/>
-          </a:xfrm>
-        </p:spPr>
-        <p:txBody>
-          <a:bodyPr/>
+        <p:spPr/>
+        <p:txBody>
+          <a:bodyPr>
+            <a:noAutofit/>
+          </a:bodyPr>
           <a:lstStyle/>
           <a:p>
-            <a:r>
-              <a:rPr lang="en-US" sz="2000" dirty="0"/>
-              <a:t>In the very early days of PWR operation, heavy crud buildup on fuel cladding surfaces was caused by the transport of corrosion products from the steam generators into the reactor core</a:t>
-            </a:r>
-          </a:p>
-          <a:p>
-            <a:r>
-              <a:rPr lang="en-US" sz="2000" dirty="0"/>
-              <a:t>Activated corrosion products caused high-radiation fields on out-of-core surfaces</a:t>
-            </a:r>
-          </a:p>
-          <a:p>
-            <a:r>
-              <a:rPr lang="en-US" sz="2000" dirty="0"/>
-              <a:t>Fuel performance was compromised, and even coolant flow issues were observed</a:t>
-            </a:r>
-          </a:p>
-          <a:p>
-            <a:endParaRPr lang="en-US" sz="2000" dirty="0"/>
-          </a:p>
-          <a:p>
-            <a:endParaRPr lang="en-US" sz="2000" dirty="0"/>
-          </a:p>
-          <a:p>
-            <a:endParaRPr lang="en-US" sz="2000" dirty="0"/>
-          </a:p>
-          <a:p>
-            <a:endParaRPr lang="en-US" sz="2000" dirty="0"/>
+            <a:pPr defTabSz="914400"/>
+            <a:r>
+              <a:rPr lang="en-US" altLang="en-US" sz="2100" dirty="0">
+                <a:solidFill>
+                  <a:srgbClr val="000000"/>
+                </a:solidFill>
+                <a:latin typeface="Arial" panose="020B0604020202020204" pitchFamily="34" charset="0"/>
+              </a:rPr>
+              <a:t>Increasing Chemical Precision</a:t>
+            </a:r>
+          </a:p>
+          <a:p>
+            <a:pPr lvl="1" defTabSz="914400"/>
+            <a:r>
+              <a:rPr lang="en-US" altLang="en-US" sz="2100" dirty="0">
+                <a:solidFill>
+                  <a:srgbClr val="000000"/>
+                </a:solidFill>
+                <a:latin typeface="Arial" panose="020B0604020202020204" pitchFamily="34" charset="0"/>
+              </a:rPr>
+              <a:t>From simple purity control to tightly optimized ppm/ppb-level adjustments</a:t>
+            </a:r>
+          </a:p>
+          <a:p>
+            <a:pPr defTabSz="914400"/>
+            <a:r>
+              <a:rPr lang="en-US" altLang="en-US" sz="2100" dirty="0">
+                <a:solidFill>
+                  <a:srgbClr val="000000"/>
+                </a:solidFill>
+                <a:latin typeface="Arial" panose="020B0604020202020204" pitchFamily="34" charset="0"/>
+              </a:rPr>
+              <a:t>Shift from Reactive to Predictive</a:t>
+            </a:r>
+          </a:p>
+          <a:p>
+            <a:pPr lvl="1" defTabSz="914400"/>
+            <a:r>
+              <a:rPr lang="en-US" altLang="en-US" sz="2100" dirty="0">
+                <a:solidFill>
+                  <a:srgbClr val="000000"/>
+                </a:solidFill>
+                <a:latin typeface="Arial" panose="020B0604020202020204" pitchFamily="34" charset="0"/>
+              </a:rPr>
+              <a:t>Early chemistry responded to problems; modern chemistry anticipates them via modeling</a:t>
+            </a:r>
+          </a:p>
+          <a:p>
+            <a:pPr defTabSz="914400"/>
+            <a:r>
+              <a:rPr lang="en-US" altLang="en-US" sz="2100" dirty="0">
+                <a:solidFill>
+                  <a:srgbClr val="000000"/>
+                </a:solidFill>
+                <a:latin typeface="Arial" panose="020B0604020202020204" pitchFamily="34" charset="0"/>
+              </a:rPr>
+              <a:t>Tradeoff Management</a:t>
+            </a:r>
+          </a:p>
+          <a:p>
+            <a:pPr lvl="1" defTabSz="914400"/>
+            <a:r>
+              <a:rPr lang="en-US" altLang="en-US" sz="2100" dirty="0">
+                <a:solidFill>
+                  <a:srgbClr val="000000"/>
+                </a:solidFill>
+                <a:latin typeface="Arial" panose="020B0604020202020204" pitchFamily="34" charset="0"/>
+              </a:rPr>
+              <a:t>Every chemistry choice affects multiple outcomes:</a:t>
+            </a:r>
+            <a:endParaRPr lang="en-US" altLang="en-US" sz="2100" dirty="0"/>
+          </a:p>
+          <a:p>
+            <a:pPr lvl="2" defTabSz="914400"/>
+            <a:r>
+              <a:rPr lang="en-US" altLang="en-US" sz="2100" dirty="0">
+                <a:solidFill>
+                  <a:srgbClr val="000000"/>
+                </a:solidFill>
+                <a:latin typeface="Arial" panose="020B0604020202020204" pitchFamily="34" charset="0"/>
+              </a:rPr>
+              <a:t>Higher pH leads to less corrosion, but possible fuel issues</a:t>
+            </a:r>
+          </a:p>
+          <a:p>
+            <a:pPr lvl="2" defTabSz="914400"/>
+            <a:r>
+              <a:rPr lang="en-US" altLang="en-US" sz="2100" dirty="0">
+                <a:solidFill>
+                  <a:srgbClr val="000000"/>
+                </a:solidFill>
+                <a:latin typeface="Arial" panose="020B0604020202020204" pitchFamily="34" charset="0"/>
+              </a:rPr>
+              <a:t>Hydrogen injection → less SCC, but higher dose rates (BWRs)</a:t>
+            </a:r>
+          </a:p>
+          <a:p>
+            <a:pPr defTabSz="914400"/>
+            <a:r>
+              <a:rPr lang="en-US" altLang="en-US" sz="2100" dirty="0">
+                <a:solidFill>
+                  <a:srgbClr val="000000"/>
+                </a:solidFill>
+                <a:latin typeface="Arial" panose="020B0604020202020204" pitchFamily="34" charset="0"/>
+              </a:rPr>
+              <a:t>Materials–Chemistry Coupling</a:t>
+            </a:r>
+          </a:p>
+          <a:p>
+            <a:pPr lvl="1" defTabSz="914400"/>
+            <a:r>
+              <a:rPr lang="en-US" altLang="en-US" sz="2100" dirty="0">
+                <a:solidFill>
+                  <a:srgbClr val="000000"/>
+                </a:solidFill>
+                <a:latin typeface="Arial" panose="020B0604020202020204" pitchFamily="34" charset="0"/>
+              </a:rPr>
+              <a:t>Water chemistry evolution closely tracks:</a:t>
+            </a:r>
+            <a:endParaRPr lang="en-US" altLang="en-US" sz="2100" dirty="0"/>
+          </a:p>
+          <a:p>
+            <a:pPr lvl="2" defTabSz="914400"/>
+            <a:r>
+              <a:rPr lang="en-US" altLang="en-US" sz="2100" dirty="0">
+                <a:solidFill>
+                  <a:srgbClr val="000000"/>
+                </a:solidFill>
+                <a:latin typeface="Arial" panose="020B0604020202020204" pitchFamily="34" charset="0"/>
+              </a:rPr>
+              <a:t>Alloy development (e.g., Inconel, stainless steels, Zircaloy)</a:t>
+            </a:r>
+          </a:p>
+          <a:p>
+            <a:pPr lvl="2" defTabSz="914400"/>
+            <a:r>
+              <a:rPr lang="en-US" altLang="en-US" sz="2100" dirty="0">
+                <a:solidFill>
+                  <a:srgbClr val="000000"/>
+                </a:solidFill>
+                <a:latin typeface="Arial" panose="020B0604020202020204" pitchFamily="34" charset="0"/>
+              </a:rPr>
+              <a:t>Fuel design changes (higher burnup, different claddings)</a:t>
+            </a:r>
+          </a:p>
+          <a:p>
+            <a:endParaRPr lang="en-US" sz="2100" dirty="0"/>
           </a:p>
         </p:txBody>
       </p:sp>
@@ -5249,7 +5489,7 @@
           <p:cNvPr id="4" name="Slide Number Placeholder 3">
             <a:extLst>
               <a:ext uri="{FF2B5EF4-FFF2-40B4-BE49-F238E27FC236}">
-                <a16:creationId xmlns:a16="http://schemas.microsoft.com/office/drawing/2014/main" id="{220672EE-E4FF-464D-87CA-23D31AAFB0E2}"/>
+                <a16:creationId xmlns:a16="http://schemas.microsoft.com/office/drawing/2014/main" id="{685EBD2F-262E-2772-288A-F16C4C351441}"/>
               </a:ext>
             </a:extLst>
           </p:cNvPr>
@@ -5274,6 +5514,2795 @@
                 <a:defRPr/>
               </a:pPr>
               <a:t>17</a:t>
+            </a:fld>
+            <a:endParaRPr lang="en-US"/>
+          </a:p>
+        </p:txBody>
+      </p:sp>
+    </p:spTree>
+    <p:extLst>
+      <p:ext uri="{BB962C8B-B14F-4D97-AF65-F5344CB8AC3E}">
+        <p14:creationId xmlns:p14="http://schemas.microsoft.com/office/powerpoint/2010/main" val="2219324694"/>
+      </p:ext>
+    </p:extLst>
+  </p:cSld>
+  <p:clrMapOvr>
+    <a:masterClrMapping/>
+  </p:clrMapOvr>
+</p:sld>
+</file>
+
+<file path=ppt/slides/slide18.xml><?xml version="1.0" encoding="utf-8"?>
+<p:sld xmlns:a="http://schemas.openxmlformats.org/drawingml/2006/main" xmlns:r="http://schemas.openxmlformats.org/officeDocument/2006/relationships" xmlns:p="http://schemas.openxmlformats.org/presentationml/2006/main">
+  <p:cSld>
+    <p:spTree>
+      <p:nvGrpSpPr>
+        <p:cNvPr id="1" name=""/>
+        <p:cNvGrpSpPr/>
+        <p:nvPr/>
+      </p:nvGrpSpPr>
+      <p:grpSpPr>
+        <a:xfrm>
+          <a:off x="0" y="0"/>
+          <a:ext cx="0" cy="0"/>
+          <a:chOff x="0" y="0"/>
+          <a:chExt cx="0" cy="0"/>
+        </a:xfrm>
+      </p:grpSpPr>
+      <p:sp>
+        <p:nvSpPr>
+          <p:cNvPr id="2" name="Title 1">
+            <a:extLst>
+              <a:ext uri="{FF2B5EF4-FFF2-40B4-BE49-F238E27FC236}">
+                <a16:creationId xmlns:a16="http://schemas.microsoft.com/office/drawing/2014/main" id="{B494E803-125B-E348-B0C9-85977B7214E8}"/>
+              </a:ext>
+            </a:extLst>
+          </p:cNvPr>
+          <p:cNvSpPr>
+            <a:spLocks noGrp="1"/>
+          </p:cNvSpPr>
+          <p:nvPr>
+            <p:ph type="title"/>
+          </p:nvPr>
+        </p:nvSpPr>
+        <p:spPr/>
+        <p:txBody>
+          <a:bodyPr/>
+          <a:lstStyle/>
+          <a:p>
+            <a:r>
+              <a:rPr lang="en-US" dirty="0"/>
+              <a:t>Summary</a:t>
+            </a:r>
+          </a:p>
+        </p:txBody>
+      </p:sp>
+      <p:sp>
+        <p:nvSpPr>
+          <p:cNvPr id="3" name="Content Placeholder 2">
+            <a:extLst>
+              <a:ext uri="{FF2B5EF4-FFF2-40B4-BE49-F238E27FC236}">
+                <a16:creationId xmlns:a16="http://schemas.microsoft.com/office/drawing/2014/main" id="{DF19A972-2863-5A46-B96A-18CA22718CD8}"/>
+              </a:ext>
+            </a:extLst>
+          </p:cNvPr>
+          <p:cNvSpPr>
+            <a:spLocks noGrp="1"/>
+          </p:cNvSpPr>
+          <p:nvPr>
+            <p:ph idx="1"/>
+          </p:nvPr>
+        </p:nvSpPr>
+        <p:spPr/>
+        <p:txBody>
+          <a:bodyPr/>
+          <a:lstStyle/>
+          <a:p>
+            <a:r>
+              <a:rPr lang="en-US" dirty="0"/>
+              <a:t>Primary system water chemistry affects fuel performance through the deposition of corrosion products on fuel pin surfaces</a:t>
+            </a:r>
+          </a:p>
+          <a:p>
+            <a:r>
+              <a:rPr lang="en-US" dirty="0"/>
+              <a:t>Control measures such as dissolved H2 and balancing </a:t>
+            </a:r>
+            <a:r>
+              <a:rPr lang="en-US" dirty="0" err="1"/>
+              <a:t>LiOH</a:t>
+            </a:r>
+            <a:r>
+              <a:rPr lang="en-US" dirty="0"/>
+              <a:t> to boron content are utilized to control the pH</a:t>
+            </a:r>
+          </a:p>
+          <a:p>
+            <a:r>
+              <a:rPr lang="en-US" dirty="0"/>
+              <a:t>Zinc injection is utilized to control radiation fields</a:t>
+            </a:r>
+          </a:p>
+          <a:p>
+            <a:r>
+              <a:rPr lang="en-US" dirty="0"/>
+              <a:t>CRUD can cause failures or CRIPs, affecting the performance of the fuel</a:t>
+            </a:r>
+          </a:p>
+          <a:p>
+            <a:r>
+              <a:rPr lang="en-US" dirty="0"/>
+              <a:t>Water chemistry is an evolving balancing act between corrosion of the core internals, radiation fields, CRUD development, pH, and reactivity</a:t>
+            </a:r>
+          </a:p>
+        </p:txBody>
+      </p:sp>
+      <p:sp>
+        <p:nvSpPr>
+          <p:cNvPr id="4" name="Slide Number Placeholder 3">
+            <a:extLst>
+              <a:ext uri="{FF2B5EF4-FFF2-40B4-BE49-F238E27FC236}">
+                <a16:creationId xmlns:a16="http://schemas.microsoft.com/office/drawing/2014/main" id="{55CA28B6-0FE4-1743-B12F-A0D6C68DB76F}"/>
+              </a:ext>
+            </a:extLst>
+          </p:cNvPr>
+          <p:cNvSpPr>
+            <a:spLocks noGrp="1"/>
+          </p:cNvSpPr>
+          <p:nvPr>
+            <p:ph type="sldNum" sz="quarter" idx="12"/>
+          </p:nvPr>
+        </p:nvSpPr>
+        <p:spPr/>
+        <p:txBody>
+          <a:bodyPr/>
+          <a:lstStyle/>
+          <a:p>
+            <a:pPr>
+              <a:defRPr/>
+            </a:pPr>
+            <a:fld id="{3FF2C605-4958-CF43-AA48-80339EFDB0AF}" type="slidenum">
+              <a:rPr lang="en-US" smtClean="0"/>
+              <a:pPr>
+                <a:defRPr/>
+              </a:pPr>
+              <a:t>18</a:t>
+            </a:fld>
+            <a:endParaRPr lang="en-US"/>
+          </a:p>
+        </p:txBody>
+      </p:sp>
+    </p:spTree>
+    <p:extLst>
+      <p:ext uri="{BB962C8B-B14F-4D97-AF65-F5344CB8AC3E}">
+        <p14:creationId xmlns:p14="http://schemas.microsoft.com/office/powerpoint/2010/main" val="338508001"/>
+      </p:ext>
+    </p:extLst>
+  </p:cSld>
+  <p:clrMapOvr>
+    <a:masterClrMapping/>
+  </p:clrMapOvr>
+</p:sld>
+</file>
+
+<file path=ppt/slides/slide19.xml><?xml version="1.0" encoding="utf-8"?>
+<p:sld xmlns:a="http://schemas.openxmlformats.org/drawingml/2006/main" xmlns:r="http://schemas.openxmlformats.org/officeDocument/2006/relationships" xmlns:p="http://schemas.openxmlformats.org/presentationml/2006/main">
+  <p:cSld>
+    <p:spTree>
+      <p:nvGrpSpPr>
+        <p:cNvPr id="1" name=""/>
+        <p:cNvGrpSpPr/>
+        <p:nvPr/>
+      </p:nvGrpSpPr>
+      <p:grpSpPr>
+        <a:xfrm>
+          <a:off x="0" y="0"/>
+          <a:ext cx="0" cy="0"/>
+          <a:chOff x="0" y="0"/>
+          <a:chExt cx="0" cy="0"/>
+        </a:xfrm>
+      </p:grpSpPr>
+      <p:sp>
+        <p:nvSpPr>
+          <p:cNvPr id="2" name="Title 1">
+            <a:extLst>
+              <a:ext uri="{FF2B5EF4-FFF2-40B4-BE49-F238E27FC236}">
+                <a16:creationId xmlns:a16="http://schemas.microsoft.com/office/drawing/2014/main" id="{96329CC1-34E4-A34F-8621-801D8886CE7C}"/>
+              </a:ext>
+            </a:extLst>
+          </p:cNvPr>
+          <p:cNvSpPr>
+            <a:spLocks noGrp="1"/>
+          </p:cNvSpPr>
+          <p:nvPr>
+            <p:ph type="title"/>
+          </p:nvPr>
+        </p:nvSpPr>
+        <p:spPr>
+          <a:xfrm>
+            <a:off x="963084" y="1234721"/>
+            <a:ext cx="10363200" cy="1362075"/>
+          </a:xfrm>
+        </p:spPr>
+        <p:txBody>
+          <a:bodyPr/>
+          <a:lstStyle/>
+          <a:p>
+            <a:r>
+              <a:rPr lang="en-US" dirty="0"/>
+              <a:t>Mixed oxide (MOX) fuels</a:t>
+            </a:r>
+          </a:p>
+        </p:txBody>
+      </p:sp>
+      <p:sp>
+        <p:nvSpPr>
+          <p:cNvPr id="4" name="Slide Number Placeholder 3">
+            <a:extLst>
+              <a:ext uri="{FF2B5EF4-FFF2-40B4-BE49-F238E27FC236}">
+                <a16:creationId xmlns:a16="http://schemas.microsoft.com/office/drawing/2014/main" id="{2BFF06B0-02C9-F34D-82A4-D2D5BBAF6842}"/>
+              </a:ext>
+            </a:extLst>
+          </p:cNvPr>
+          <p:cNvSpPr>
+            <a:spLocks noGrp="1"/>
+          </p:cNvSpPr>
+          <p:nvPr>
+            <p:ph type="sldNum" sz="quarter" idx="12"/>
+          </p:nvPr>
+        </p:nvSpPr>
+        <p:spPr/>
+        <p:txBody>
+          <a:bodyPr/>
+          <a:lstStyle/>
+          <a:p>
+            <a:pPr>
+              <a:defRPr/>
+            </a:pPr>
+            <a:fld id="{0DA6BD0F-ABBC-C14D-BC96-77BE126A748B}" type="slidenum">
+              <a:rPr lang="en-US" smtClean="0"/>
+              <a:pPr>
+                <a:defRPr/>
+              </a:pPr>
+              <a:t>19</a:t>
+            </a:fld>
+            <a:endParaRPr lang="en-US"/>
+          </a:p>
+        </p:txBody>
+      </p:sp>
+    </p:spTree>
+    <p:extLst>
+      <p:ext uri="{BB962C8B-B14F-4D97-AF65-F5344CB8AC3E}">
+        <p14:creationId xmlns:p14="http://schemas.microsoft.com/office/powerpoint/2010/main" val="2860324116"/>
+      </p:ext>
+    </p:extLst>
+  </p:cSld>
+  <p:clrMapOvr>
+    <a:masterClrMapping/>
+  </p:clrMapOvr>
+</p:sld>
+</file>
+
+<file path=ppt/slides/slide2.xml><?xml version="1.0" encoding="utf-8"?>
+<p:sld xmlns:a="http://schemas.openxmlformats.org/drawingml/2006/main" xmlns:r="http://schemas.openxmlformats.org/officeDocument/2006/relationships" xmlns:p="http://schemas.openxmlformats.org/presentationml/2006/main">
+  <p:cSld>
+    <p:spTree>
+      <p:nvGrpSpPr>
+        <p:cNvPr id="1" name=""/>
+        <p:cNvGrpSpPr/>
+        <p:nvPr/>
+      </p:nvGrpSpPr>
+      <p:grpSpPr>
+        <a:xfrm>
+          <a:off x="0" y="0"/>
+          <a:ext cx="0" cy="0"/>
+          <a:chOff x="0" y="0"/>
+          <a:chExt cx="0" cy="0"/>
+        </a:xfrm>
+      </p:grpSpPr>
+      <p:sp>
+        <p:nvSpPr>
+          <p:cNvPr id="2" name="Title 1">
+            <a:extLst>
+              <a:ext uri="{FF2B5EF4-FFF2-40B4-BE49-F238E27FC236}">
+                <a16:creationId xmlns:a16="http://schemas.microsoft.com/office/drawing/2014/main" id="{AFB3E88C-583B-EB4F-3FEB-0F5DF73729C0}"/>
+              </a:ext>
+            </a:extLst>
+          </p:cNvPr>
+          <p:cNvSpPr>
+            <a:spLocks noGrp="1"/>
+          </p:cNvSpPr>
+          <p:nvPr>
+            <p:ph type="title"/>
+          </p:nvPr>
+        </p:nvSpPr>
+        <p:spPr/>
+        <p:txBody>
+          <a:bodyPr/>
+          <a:lstStyle/>
+          <a:p>
+            <a:r>
+              <a:rPr lang="en-US" dirty="0"/>
+              <a:t>Housekeeping</a:t>
+            </a:r>
+          </a:p>
+        </p:txBody>
+      </p:sp>
+      <p:sp>
+        <p:nvSpPr>
+          <p:cNvPr id="3" name="Content Placeholder 2">
+            <a:extLst>
+              <a:ext uri="{FF2B5EF4-FFF2-40B4-BE49-F238E27FC236}">
+                <a16:creationId xmlns:a16="http://schemas.microsoft.com/office/drawing/2014/main" id="{B4FB761B-DEF7-9388-1FF2-976C1C69796C}"/>
+              </a:ext>
+            </a:extLst>
+          </p:cNvPr>
+          <p:cNvSpPr>
+            <a:spLocks noGrp="1"/>
+          </p:cNvSpPr>
+          <p:nvPr>
+            <p:ph idx="1"/>
+          </p:nvPr>
+        </p:nvSpPr>
+        <p:spPr/>
+        <p:txBody>
+          <a:bodyPr/>
+          <a:lstStyle/>
+          <a:p>
+            <a:r>
+              <a:rPr lang="en-US" sz="2100" dirty="0"/>
+              <a:t>Exam 3 stats:</a:t>
+            </a:r>
+          </a:p>
+          <a:p>
+            <a:pPr lvl="1"/>
+            <a:r>
+              <a:rPr lang="en-US" sz="2100" dirty="0"/>
+              <a:t>Avg: 84</a:t>
+            </a:r>
+          </a:p>
+          <a:p>
+            <a:pPr lvl="1"/>
+            <a:r>
+              <a:rPr lang="en-US" sz="2100" dirty="0"/>
+              <a:t>Curve of 6 points applied</a:t>
+            </a:r>
+          </a:p>
+          <a:p>
+            <a:r>
+              <a:rPr lang="en-US" sz="2100" dirty="0"/>
+              <a:t>Presentation and MOOSE part 2 grades out this week</a:t>
+            </a:r>
+          </a:p>
+          <a:p>
+            <a:endParaRPr lang="en-US" sz="2100" dirty="0"/>
+          </a:p>
+          <a:p>
+            <a:r>
+              <a:rPr lang="en-US" sz="2100" dirty="0"/>
+              <a:t>Plan is for the last exam to be on April 23 (week from today)</a:t>
+            </a:r>
+          </a:p>
+          <a:p>
+            <a:r>
+              <a:rPr lang="en-US" sz="2100" dirty="0"/>
+              <a:t>Last partial lecture and problem session next Tuesday</a:t>
+            </a:r>
+          </a:p>
+          <a:p>
+            <a:r>
+              <a:rPr lang="en-US" sz="2100" dirty="0"/>
+              <a:t>Reminder MOOSE part 3 is due April 28</a:t>
+            </a:r>
+          </a:p>
+          <a:p>
+            <a:endParaRPr lang="en-US" sz="2100" dirty="0"/>
+          </a:p>
+          <a:p>
+            <a:r>
+              <a:rPr lang="en-US" sz="2100" dirty="0" err="1"/>
+              <a:t>ClassEval</a:t>
+            </a:r>
+            <a:r>
+              <a:rPr lang="en-US" sz="2100" dirty="0"/>
+              <a:t> is active, please everyone fill this out</a:t>
+            </a:r>
+          </a:p>
+          <a:p>
+            <a:r>
+              <a:rPr lang="en-US" sz="2100" dirty="0"/>
+              <a:t>Send me the confirmation that you completed this, and you get +3 onto exam 4</a:t>
+            </a:r>
+          </a:p>
+          <a:p>
+            <a:r>
+              <a:rPr lang="en-US" sz="2100" dirty="0"/>
+              <a:t>Will also send out a link to my own personal survey (this is also anonymous), send me the confirmation you completed this, get another +3 onto exam 4</a:t>
+            </a:r>
+          </a:p>
+        </p:txBody>
+      </p:sp>
+      <p:sp>
+        <p:nvSpPr>
+          <p:cNvPr id="4" name="Slide Number Placeholder 3">
+            <a:extLst>
+              <a:ext uri="{FF2B5EF4-FFF2-40B4-BE49-F238E27FC236}">
+                <a16:creationId xmlns:a16="http://schemas.microsoft.com/office/drawing/2014/main" id="{31E4A3B8-A88E-4C87-31A3-9B41C6B2EF8F}"/>
+              </a:ext>
+            </a:extLst>
+          </p:cNvPr>
+          <p:cNvSpPr>
+            <a:spLocks noGrp="1"/>
+          </p:cNvSpPr>
+          <p:nvPr>
+            <p:ph type="sldNum" sz="quarter" idx="12"/>
+          </p:nvPr>
+        </p:nvSpPr>
+        <p:spPr/>
+        <p:txBody>
+          <a:bodyPr/>
+          <a:lstStyle/>
+          <a:p>
+            <a:pPr>
+              <a:defRPr/>
+            </a:pPr>
+            <a:fld id="{3FF2C605-4958-CF43-AA48-80339EFDB0AF}" type="slidenum">
+              <a:rPr lang="en-US" smtClean="0"/>
+              <a:pPr>
+                <a:defRPr/>
+              </a:pPr>
+              <a:t>2</a:t>
+            </a:fld>
+            <a:endParaRPr lang="en-US"/>
+          </a:p>
+        </p:txBody>
+      </p:sp>
+    </p:spTree>
+    <p:extLst>
+      <p:ext uri="{BB962C8B-B14F-4D97-AF65-F5344CB8AC3E}">
+        <p14:creationId xmlns:p14="http://schemas.microsoft.com/office/powerpoint/2010/main" val="2262670174"/>
+      </p:ext>
+    </p:extLst>
+  </p:cSld>
+  <p:clrMapOvr>
+    <a:masterClrMapping/>
+  </p:clrMapOvr>
+</p:sld>
+</file>
+
+<file path=ppt/slides/slide20.xml><?xml version="1.0" encoding="utf-8"?>
+<p:sld xmlns:a="http://schemas.openxmlformats.org/drawingml/2006/main" xmlns:r="http://schemas.openxmlformats.org/officeDocument/2006/relationships" xmlns:p="http://schemas.openxmlformats.org/presentationml/2006/main">
+  <p:cSld>
+    <p:spTree>
+      <p:nvGrpSpPr>
+        <p:cNvPr id="1" name=""/>
+        <p:cNvGrpSpPr/>
+        <p:nvPr/>
+      </p:nvGrpSpPr>
+      <p:grpSpPr>
+        <a:xfrm>
+          <a:off x="0" y="0"/>
+          <a:ext cx="0" cy="0"/>
+          <a:chOff x="0" y="0"/>
+          <a:chExt cx="0" cy="0"/>
+        </a:xfrm>
+      </p:grpSpPr>
+      <p:sp>
+        <p:nvSpPr>
+          <p:cNvPr id="2" name="Title 1">
+            <a:extLst>
+              <a:ext uri="{FF2B5EF4-FFF2-40B4-BE49-F238E27FC236}">
+                <a16:creationId xmlns:a16="http://schemas.microsoft.com/office/drawing/2014/main" id="{8C30DD18-4F2E-A146-8EF0-3C72A8EBF496}"/>
+              </a:ext>
+            </a:extLst>
+          </p:cNvPr>
+          <p:cNvSpPr>
+            <a:spLocks noGrp="1"/>
+          </p:cNvSpPr>
+          <p:nvPr>
+            <p:ph type="title"/>
+          </p:nvPr>
+        </p:nvSpPr>
+        <p:spPr/>
+        <p:txBody>
+          <a:bodyPr/>
+          <a:lstStyle/>
+          <a:p>
+            <a:r>
+              <a:rPr lang="en-US" dirty="0"/>
+              <a:t>Why MOX?</a:t>
+            </a:r>
+          </a:p>
+        </p:txBody>
+      </p:sp>
+      <p:sp>
+        <p:nvSpPr>
+          <p:cNvPr id="3" name="Content Placeholder 2">
+            <a:extLst>
+              <a:ext uri="{FF2B5EF4-FFF2-40B4-BE49-F238E27FC236}">
+                <a16:creationId xmlns:a16="http://schemas.microsoft.com/office/drawing/2014/main" id="{6A1A7F89-9DAD-8E47-ACCD-CE027EA50B54}"/>
+              </a:ext>
+            </a:extLst>
+          </p:cNvPr>
+          <p:cNvSpPr>
+            <a:spLocks noGrp="1"/>
+          </p:cNvSpPr>
+          <p:nvPr>
+            <p:ph idx="1"/>
+          </p:nvPr>
+        </p:nvSpPr>
+        <p:spPr>
+          <a:xfrm>
+            <a:off x="609600" y="2160495"/>
+            <a:ext cx="6109252" cy="3965670"/>
+          </a:xfrm>
+        </p:spPr>
+        <p:txBody>
+          <a:bodyPr/>
+          <a:lstStyle/>
+          <a:p>
+            <a:r>
+              <a:rPr lang="en-US" sz="2000" dirty="0"/>
+              <a:t>The first fast breeder reactors built in the 1950s used metallic fuel (plutonium and uranium), as metals offer the highest heavy metal density and therefore the highest breeding ratio</a:t>
+            </a:r>
+          </a:p>
+          <a:p>
+            <a:r>
+              <a:rPr lang="en-US" sz="2000" dirty="0"/>
+              <a:t>Because of dimensional instability due to swelling and growth, metal fuels couldn’t achieve high burnup</a:t>
+            </a:r>
+          </a:p>
+          <a:p>
+            <a:r>
+              <a:rPr lang="en-US" sz="2000" dirty="0"/>
+              <a:t>By the 1960s, mixed uranium and plutonium oxide (</a:t>
+            </a:r>
+            <a:r>
+              <a:rPr lang="en-US" sz="2000" dirty="0" err="1"/>
+              <a:t>U,Pu</a:t>
+            </a:r>
+            <a:r>
+              <a:rPr lang="en-US" sz="2000" dirty="0"/>
+              <a:t>)O2=MOX was known to be highly radiation tolerant and began to be considered as a reference fuel for fast reactors</a:t>
+            </a:r>
+          </a:p>
+          <a:p>
+            <a:endParaRPr lang="en-US" sz="2000" dirty="0"/>
+          </a:p>
+        </p:txBody>
+      </p:sp>
+      <p:sp>
+        <p:nvSpPr>
+          <p:cNvPr id="4" name="Slide Number Placeholder 3">
+            <a:extLst>
+              <a:ext uri="{FF2B5EF4-FFF2-40B4-BE49-F238E27FC236}">
+                <a16:creationId xmlns:a16="http://schemas.microsoft.com/office/drawing/2014/main" id="{F6C9D5C9-C143-C54E-8198-74512773E92E}"/>
+              </a:ext>
+            </a:extLst>
+          </p:cNvPr>
+          <p:cNvSpPr>
+            <a:spLocks noGrp="1"/>
+          </p:cNvSpPr>
+          <p:nvPr>
+            <p:ph type="sldNum" sz="quarter" idx="12"/>
+          </p:nvPr>
+        </p:nvSpPr>
+        <p:spPr/>
+        <p:txBody>
+          <a:bodyPr/>
+          <a:lstStyle/>
+          <a:p>
+            <a:pPr>
+              <a:defRPr/>
+            </a:pPr>
+            <a:fld id="{3FF2C605-4958-CF43-AA48-80339EFDB0AF}" type="slidenum">
+              <a:rPr lang="en-US" smtClean="0"/>
+              <a:pPr>
+                <a:defRPr/>
+              </a:pPr>
+              <a:t>20</a:t>
+            </a:fld>
+            <a:endParaRPr lang="en-US"/>
+          </a:p>
+        </p:txBody>
+      </p:sp>
+      <p:pic>
+        <p:nvPicPr>
+          <p:cNvPr id="1026" name="Picture 2" descr="Uranium dioxide - Wikipedia">
+            <a:extLst>
+              <a:ext uri="{FF2B5EF4-FFF2-40B4-BE49-F238E27FC236}">
+                <a16:creationId xmlns:a16="http://schemas.microsoft.com/office/drawing/2014/main" id="{7F746083-8293-0142-8CB9-CD3598C8FB22}"/>
+              </a:ext>
+            </a:extLst>
+          </p:cNvPr>
+          <p:cNvPicPr>
+            <a:picLocks noChangeAspect="1" noChangeArrowheads="1"/>
+          </p:cNvPicPr>
+          <p:nvPr/>
+        </p:nvPicPr>
+        <p:blipFill>
+          <a:blip r:embed="rId2">
+            <a:extLst>
+              <a:ext uri="{28A0092B-C50C-407E-A947-70E740481C1C}">
+                <a14:useLocalDpi xmlns:a14="http://schemas.microsoft.com/office/drawing/2010/main" val="0"/>
+              </a:ext>
+            </a:extLst>
+          </a:blip>
+          <a:srcRect/>
+          <a:stretch>
+            <a:fillRect/>
+          </a:stretch>
+        </p:blipFill>
+        <p:spPr bwMode="auto">
+          <a:xfrm>
+            <a:off x="8242472" y="776756"/>
+            <a:ext cx="3058319" cy="2767477"/>
+          </a:xfrm>
+          <a:prstGeom prst="rect">
+            <a:avLst/>
+          </a:prstGeom>
+          <a:noFill/>
+          <a:extLst>
+            <a:ext uri="{909E8E84-426E-40DD-AFC4-6F175D3DCCD1}">
+              <a14:hiddenFill xmlns:a14="http://schemas.microsoft.com/office/drawing/2010/main">
+                <a:solidFill>
+                  <a:srgbClr val="FFFFFF"/>
+                </a:solidFill>
+              </a14:hiddenFill>
+            </a:ext>
+          </a:extLst>
+        </p:spPr>
+      </p:pic>
+      <p:pic>
+        <p:nvPicPr>
+          <p:cNvPr id="1028" name="Picture 4" descr="27: A fragment of the U-Pu-O phase diagram, with the bi-phasic MO 2+x +...  | Download Scientific Diagram">
+            <a:extLst>
+              <a:ext uri="{FF2B5EF4-FFF2-40B4-BE49-F238E27FC236}">
+                <a16:creationId xmlns:a16="http://schemas.microsoft.com/office/drawing/2014/main" id="{8B14696A-6336-B54B-979F-2548EC69E2D3}"/>
+              </a:ext>
+            </a:extLst>
+          </p:cNvPr>
+          <p:cNvPicPr>
+            <a:picLocks noChangeAspect="1" noChangeArrowheads="1"/>
+          </p:cNvPicPr>
+          <p:nvPr/>
+        </p:nvPicPr>
+        <p:blipFill>
+          <a:blip r:embed="rId3">
+            <a:extLst>
+              <a:ext uri="{28A0092B-C50C-407E-A947-70E740481C1C}">
+                <a14:useLocalDpi xmlns:a14="http://schemas.microsoft.com/office/drawing/2010/main" val="0"/>
+              </a:ext>
+            </a:extLst>
+          </a:blip>
+          <a:srcRect/>
+          <a:stretch>
+            <a:fillRect/>
+          </a:stretch>
+        </p:blipFill>
+        <p:spPr bwMode="auto">
+          <a:xfrm>
+            <a:off x="7106478" y="3632149"/>
+            <a:ext cx="5009874" cy="2840893"/>
+          </a:xfrm>
+          <a:prstGeom prst="rect">
+            <a:avLst/>
+          </a:prstGeom>
+          <a:noFill/>
+          <a:extLst>
+            <a:ext uri="{909E8E84-426E-40DD-AFC4-6F175D3DCCD1}">
+              <a14:hiddenFill xmlns:a14="http://schemas.microsoft.com/office/drawing/2010/main">
+                <a:solidFill>
+                  <a:srgbClr val="FFFFFF"/>
+                </a:solidFill>
+              </a14:hiddenFill>
+            </a:ext>
+          </a:extLst>
+        </p:spPr>
+      </p:pic>
+    </p:spTree>
+    <p:extLst>
+      <p:ext uri="{BB962C8B-B14F-4D97-AF65-F5344CB8AC3E}">
+        <p14:creationId xmlns:p14="http://schemas.microsoft.com/office/powerpoint/2010/main" val="2976319327"/>
+      </p:ext>
+    </p:extLst>
+  </p:cSld>
+  <p:clrMapOvr>
+    <a:masterClrMapping/>
+  </p:clrMapOvr>
+</p:sld>
+</file>
+
+<file path=ppt/slides/slide21.xml><?xml version="1.0" encoding="utf-8"?>
+<p:sld xmlns:a="http://schemas.openxmlformats.org/drawingml/2006/main" xmlns:r="http://schemas.openxmlformats.org/officeDocument/2006/relationships" xmlns:p="http://schemas.openxmlformats.org/presentationml/2006/main">
+  <p:cSld>
+    <p:spTree>
+      <p:nvGrpSpPr>
+        <p:cNvPr id="1" name=""/>
+        <p:cNvGrpSpPr/>
+        <p:nvPr/>
+      </p:nvGrpSpPr>
+      <p:grpSpPr>
+        <a:xfrm>
+          <a:off x="0" y="0"/>
+          <a:ext cx="0" cy="0"/>
+          <a:chOff x="0" y="0"/>
+          <a:chExt cx="0" cy="0"/>
+        </a:xfrm>
+      </p:grpSpPr>
+      <p:sp>
+        <p:nvSpPr>
+          <p:cNvPr id="2" name="Title 1">
+            <a:extLst>
+              <a:ext uri="{FF2B5EF4-FFF2-40B4-BE49-F238E27FC236}">
+                <a16:creationId xmlns:a16="http://schemas.microsoft.com/office/drawing/2014/main" id="{2C308B5B-C3C6-0046-A7FC-AC7B4BC52204}"/>
+              </a:ext>
+            </a:extLst>
+          </p:cNvPr>
+          <p:cNvSpPr>
+            <a:spLocks noGrp="1"/>
+          </p:cNvSpPr>
+          <p:nvPr>
+            <p:ph type="title"/>
+          </p:nvPr>
+        </p:nvSpPr>
+        <p:spPr/>
+        <p:txBody>
+          <a:bodyPr/>
+          <a:lstStyle/>
+          <a:p>
+            <a:r>
+              <a:rPr lang="en-US" dirty="0"/>
+              <a:t>Mixed Oxides</a:t>
+            </a:r>
+          </a:p>
+        </p:txBody>
+      </p:sp>
+      <p:sp>
+        <p:nvSpPr>
+          <p:cNvPr id="3" name="Content Placeholder 2">
+            <a:extLst>
+              <a:ext uri="{FF2B5EF4-FFF2-40B4-BE49-F238E27FC236}">
+                <a16:creationId xmlns:a16="http://schemas.microsoft.com/office/drawing/2014/main" id="{EBC0CE87-399D-1641-BB35-A0279B0AE612}"/>
+              </a:ext>
+            </a:extLst>
+          </p:cNvPr>
+          <p:cNvSpPr>
+            <a:spLocks noGrp="1"/>
+          </p:cNvSpPr>
+          <p:nvPr>
+            <p:ph idx="1"/>
+          </p:nvPr>
+        </p:nvSpPr>
+        <p:spPr>
+          <a:xfrm>
+            <a:off x="609601" y="2160495"/>
+            <a:ext cx="5721625" cy="3965670"/>
+          </a:xfrm>
+        </p:spPr>
+        <p:txBody>
+          <a:bodyPr/>
+          <a:lstStyle/>
+          <a:p>
+            <a:r>
+              <a:rPr lang="en-US" sz="2000" dirty="0"/>
+              <a:t>MOX fuel allows to burn excess weapons grade plutonium</a:t>
+            </a:r>
+          </a:p>
+          <a:p>
+            <a:r>
+              <a:rPr lang="en-US" sz="2000" dirty="0"/>
+              <a:t>About 30 LWRs in Europe currently utilize a partial MOX core</a:t>
+            </a:r>
+          </a:p>
+          <a:p>
+            <a:r>
+              <a:rPr lang="en-US" sz="2000" dirty="0"/>
+              <a:t>Similar behavior to UO2, but different neutronics, fission gas release, thermal conductivity, etc.</a:t>
+            </a:r>
+          </a:p>
+          <a:p>
+            <a:r>
+              <a:rPr lang="en-US" sz="2000" dirty="0"/>
+              <a:t>Less common is inclusion of minor actinides in MOX to burn waste</a:t>
+            </a:r>
+          </a:p>
+          <a:p>
+            <a:r>
+              <a:rPr lang="en-US" sz="2000" dirty="0"/>
+              <a:t>Can also serve as a breeder</a:t>
+            </a:r>
+          </a:p>
+          <a:p>
+            <a:r>
+              <a:rPr lang="en-US" sz="2000" dirty="0"/>
+              <a:t>Also a fuel concept for SFRs</a:t>
+            </a:r>
+          </a:p>
+          <a:p>
+            <a:endParaRPr lang="en-US" sz="2000" dirty="0"/>
+          </a:p>
+        </p:txBody>
+      </p:sp>
+      <p:sp>
+        <p:nvSpPr>
+          <p:cNvPr id="4" name="Slide Number Placeholder 3">
+            <a:extLst>
+              <a:ext uri="{FF2B5EF4-FFF2-40B4-BE49-F238E27FC236}">
+                <a16:creationId xmlns:a16="http://schemas.microsoft.com/office/drawing/2014/main" id="{A3E645FF-8447-7742-9B0B-E489B4B6C19A}"/>
+              </a:ext>
+            </a:extLst>
+          </p:cNvPr>
+          <p:cNvSpPr>
+            <a:spLocks noGrp="1"/>
+          </p:cNvSpPr>
+          <p:nvPr>
+            <p:ph type="sldNum" sz="quarter" idx="12"/>
+          </p:nvPr>
+        </p:nvSpPr>
+        <p:spPr/>
+        <p:txBody>
+          <a:bodyPr/>
+          <a:lstStyle/>
+          <a:p>
+            <a:pPr>
+              <a:defRPr/>
+            </a:pPr>
+            <a:fld id="{3FF2C605-4958-CF43-AA48-80339EFDB0AF}" type="slidenum">
+              <a:rPr lang="en-US" smtClean="0"/>
+              <a:pPr>
+                <a:defRPr/>
+              </a:pPr>
+              <a:t>21</a:t>
+            </a:fld>
+            <a:endParaRPr lang="en-US" dirty="0"/>
+          </a:p>
+        </p:txBody>
+      </p:sp>
+      <p:pic>
+        <p:nvPicPr>
+          <p:cNvPr id="6" name="Picture 5">
+            <a:extLst>
+              <a:ext uri="{FF2B5EF4-FFF2-40B4-BE49-F238E27FC236}">
+                <a16:creationId xmlns:a16="http://schemas.microsoft.com/office/drawing/2014/main" id="{CC4DE424-C2E4-3744-8F0D-5F70CC36A2CD}"/>
+              </a:ext>
+            </a:extLst>
+          </p:cNvPr>
+          <p:cNvPicPr>
+            <a:picLocks noChangeAspect="1"/>
+          </p:cNvPicPr>
+          <p:nvPr/>
+        </p:nvPicPr>
+        <p:blipFill>
+          <a:blip r:embed="rId2"/>
+          <a:stretch>
+            <a:fillRect/>
+          </a:stretch>
+        </p:blipFill>
+        <p:spPr>
+          <a:xfrm>
+            <a:off x="6331226" y="1800740"/>
+            <a:ext cx="5553507" cy="4555611"/>
+          </a:xfrm>
+          <a:prstGeom prst="rect">
+            <a:avLst/>
+          </a:prstGeom>
+        </p:spPr>
+      </p:pic>
+    </p:spTree>
+    <p:extLst>
+      <p:ext uri="{BB962C8B-B14F-4D97-AF65-F5344CB8AC3E}">
+        <p14:creationId xmlns:p14="http://schemas.microsoft.com/office/powerpoint/2010/main" val="1991488018"/>
+      </p:ext>
+    </p:extLst>
+  </p:cSld>
+  <p:clrMapOvr>
+    <a:masterClrMapping/>
+  </p:clrMapOvr>
+</p:sld>
+</file>
+
+<file path=ppt/slides/slide22.xml><?xml version="1.0" encoding="utf-8"?>
+<p:sld xmlns:a="http://schemas.openxmlformats.org/drawingml/2006/main" xmlns:r="http://schemas.openxmlformats.org/officeDocument/2006/relationships" xmlns:p="http://schemas.openxmlformats.org/presentationml/2006/main">
+  <p:cSld>
+    <p:spTree>
+      <p:nvGrpSpPr>
+        <p:cNvPr id="1" name=""/>
+        <p:cNvGrpSpPr/>
+        <p:nvPr/>
+      </p:nvGrpSpPr>
+      <p:grpSpPr>
+        <a:xfrm>
+          <a:off x="0" y="0"/>
+          <a:ext cx="0" cy="0"/>
+          <a:chOff x="0" y="0"/>
+          <a:chExt cx="0" cy="0"/>
+        </a:xfrm>
+      </p:grpSpPr>
+      <p:sp>
+        <p:nvSpPr>
+          <p:cNvPr id="2" name="Title 1">
+            <a:extLst>
+              <a:ext uri="{FF2B5EF4-FFF2-40B4-BE49-F238E27FC236}">
+                <a16:creationId xmlns:a16="http://schemas.microsoft.com/office/drawing/2014/main" id="{4860DCAE-14DB-2B48-8B3D-B6DAA1827465}"/>
+              </a:ext>
+            </a:extLst>
+          </p:cNvPr>
+          <p:cNvSpPr>
+            <a:spLocks noGrp="1"/>
+          </p:cNvSpPr>
+          <p:nvPr>
+            <p:ph type="title"/>
+          </p:nvPr>
+        </p:nvSpPr>
+        <p:spPr/>
+        <p:txBody>
+          <a:bodyPr/>
+          <a:lstStyle/>
+          <a:p>
+            <a:r>
+              <a:rPr lang="en-US" dirty="0"/>
+              <a:t>MOX Designs</a:t>
+            </a:r>
+          </a:p>
+        </p:txBody>
+      </p:sp>
+      <p:sp>
+        <p:nvSpPr>
+          <p:cNvPr id="3" name="Content Placeholder 2">
+            <a:extLst>
+              <a:ext uri="{FF2B5EF4-FFF2-40B4-BE49-F238E27FC236}">
+                <a16:creationId xmlns:a16="http://schemas.microsoft.com/office/drawing/2014/main" id="{AD192575-0962-C845-8F0E-046BA845867F}"/>
+              </a:ext>
+            </a:extLst>
+          </p:cNvPr>
+          <p:cNvSpPr>
+            <a:spLocks noGrp="1"/>
+          </p:cNvSpPr>
+          <p:nvPr>
+            <p:ph idx="1"/>
+          </p:nvPr>
+        </p:nvSpPr>
+        <p:spPr/>
+        <p:txBody>
+          <a:bodyPr/>
+          <a:lstStyle/>
+          <a:p>
+            <a:r>
+              <a:rPr lang="en-US" sz="2000" dirty="0"/>
+              <a:t>The fuel pin is a long cylinder (2–3m long, 5–10mm diameter), clad in a steel tube (0.4–0.6mm thick) closed in both ends by welded plugs, preventing direct contact between the radioactive material and the sodium coolant (or water coolant, in LWR concepts)</a:t>
+            </a:r>
+          </a:p>
+          <a:p>
+            <a:r>
+              <a:rPr lang="en-US" sz="2000" dirty="0"/>
+              <a:t>The oxide fissile column (~1 m long) consists of a stack of conventionally pressed and sintered pellets with an outer diameter slightly smaller than the inner diameter of the clad, providing a gap ~100 micron gap</a:t>
+            </a:r>
+          </a:p>
+          <a:p>
+            <a:r>
+              <a:rPr lang="en-US" sz="2000" dirty="0"/>
+              <a:t>Both full pellets and annular pellets have been used</a:t>
+            </a:r>
+          </a:p>
+          <a:p>
+            <a:r>
+              <a:rPr lang="en-US" sz="2000" dirty="0"/>
+              <a:t>A He gap with a pressure ~1 atm is used</a:t>
+            </a:r>
+          </a:p>
+          <a:p>
+            <a:r>
+              <a:rPr lang="en-US" sz="2000" dirty="0"/>
+              <a:t>Fuel pins of fast reactors are designed to operate at a high linear heat generation rate: between 400 and 500 W/cm, about 2x-3x higher than standard linear power in light water reactors (LWRs)</a:t>
+            </a:r>
+          </a:p>
+          <a:p>
+            <a:endParaRPr lang="en-US" sz="2000" dirty="0"/>
+          </a:p>
+          <a:p>
+            <a:endParaRPr lang="en-US" sz="2000" dirty="0"/>
+          </a:p>
+        </p:txBody>
+      </p:sp>
+      <p:sp>
+        <p:nvSpPr>
+          <p:cNvPr id="4" name="Slide Number Placeholder 3">
+            <a:extLst>
+              <a:ext uri="{FF2B5EF4-FFF2-40B4-BE49-F238E27FC236}">
+                <a16:creationId xmlns:a16="http://schemas.microsoft.com/office/drawing/2014/main" id="{D8C73ED7-9750-7F47-8188-F1A42F8CE67D}"/>
+              </a:ext>
+            </a:extLst>
+          </p:cNvPr>
+          <p:cNvSpPr>
+            <a:spLocks noGrp="1"/>
+          </p:cNvSpPr>
+          <p:nvPr>
+            <p:ph type="sldNum" sz="quarter" idx="12"/>
+          </p:nvPr>
+        </p:nvSpPr>
+        <p:spPr/>
+        <p:txBody>
+          <a:bodyPr/>
+          <a:lstStyle/>
+          <a:p>
+            <a:pPr>
+              <a:defRPr/>
+            </a:pPr>
+            <a:fld id="{3FF2C605-4958-CF43-AA48-80339EFDB0AF}" type="slidenum">
+              <a:rPr lang="en-US" smtClean="0"/>
+              <a:pPr>
+                <a:defRPr/>
+              </a:pPr>
+              <a:t>22</a:t>
+            </a:fld>
+            <a:endParaRPr lang="en-US"/>
+          </a:p>
+        </p:txBody>
+      </p:sp>
+    </p:spTree>
+    <p:extLst>
+      <p:ext uri="{BB962C8B-B14F-4D97-AF65-F5344CB8AC3E}">
+        <p14:creationId xmlns:p14="http://schemas.microsoft.com/office/powerpoint/2010/main" val="635135991"/>
+      </p:ext>
+    </p:extLst>
+  </p:cSld>
+  <p:clrMapOvr>
+    <a:masterClrMapping/>
+  </p:clrMapOvr>
+</p:sld>
+</file>
+
+<file path=ppt/slides/slide23.xml><?xml version="1.0" encoding="utf-8"?>
+<p:sld xmlns:a="http://schemas.openxmlformats.org/drawingml/2006/main" xmlns:r="http://schemas.openxmlformats.org/officeDocument/2006/relationships" xmlns:p="http://schemas.openxmlformats.org/presentationml/2006/main">
+  <p:cSld>
+    <p:spTree>
+      <p:nvGrpSpPr>
+        <p:cNvPr id="1" name=""/>
+        <p:cNvGrpSpPr/>
+        <p:nvPr/>
+      </p:nvGrpSpPr>
+      <p:grpSpPr>
+        <a:xfrm>
+          <a:off x="0" y="0"/>
+          <a:ext cx="0" cy="0"/>
+          <a:chOff x="0" y="0"/>
+          <a:chExt cx="0" cy="0"/>
+        </a:xfrm>
+      </p:grpSpPr>
+      <p:sp>
+        <p:nvSpPr>
+          <p:cNvPr id="2" name="Title 1">
+            <a:extLst>
+              <a:ext uri="{FF2B5EF4-FFF2-40B4-BE49-F238E27FC236}">
+                <a16:creationId xmlns:a16="http://schemas.microsoft.com/office/drawing/2014/main" id="{DF6805FF-1059-7A43-99FA-56CBBBC7480C}"/>
+              </a:ext>
+            </a:extLst>
+          </p:cNvPr>
+          <p:cNvSpPr>
+            <a:spLocks noGrp="1"/>
+          </p:cNvSpPr>
+          <p:nvPr>
+            <p:ph type="title"/>
+          </p:nvPr>
+        </p:nvSpPr>
+        <p:spPr/>
+        <p:txBody>
+          <a:bodyPr/>
+          <a:lstStyle/>
+          <a:p>
+            <a:r>
+              <a:rPr lang="en-US" dirty="0"/>
+              <a:t>MOX Fuel</a:t>
+            </a:r>
+          </a:p>
+        </p:txBody>
+      </p:sp>
+      <p:sp>
+        <p:nvSpPr>
+          <p:cNvPr id="3" name="Content Placeholder 2">
+            <a:extLst>
+              <a:ext uri="{FF2B5EF4-FFF2-40B4-BE49-F238E27FC236}">
+                <a16:creationId xmlns:a16="http://schemas.microsoft.com/office/drawing/2014/main" id="{F758C20A-4B5A-0C4C-88BE-DC90DFD9FB0E}"/>
+              </a:ext>
+            </a:extLst>
+          </p:cNvPr>
+          <p:cNvSpPr>
+            <a:spLocks noGrp="1"/>
+          </p:cNvSpPr>
+          <p:nvPr>
+            <p:ph idx="1"/>
+          </p:nvPr>
+        </p:nvSpPr>
+        <p:spPr/>
+        <p:txBody>
+          <a:bodyPr/>
+          <a:lstStyle/>
+          <a:p>
+            <a:r>
+              <a:rPr lang="en-US" sz="2000" dirty="0"/>
+              <a:t>As the fast reactor fuel pin diameters are generally smaller than classical rod diameters of LWRs, the power density and heat fluxes are much higher in SFRs than in LWRs</a:t>
+            </a:r>
+          </a:p>
+          <a:p>
+            <a:r>
+              <a:rPr lang="en-US" sz="2000" dirty="0"/>
+              <a:t>For example, in a Phenix fuel pin at 450 W/cm, the power density in the pellet reaches almost 2000 W/cc</a:t>
+            </a:r>
+          </a:p>
+          <a:p>
+            <a:r>
+              <a:rPr lang="en-US" sz="2000" dirty="0"/>
+              <a:t>Sodium enters the bottom part of the core at about 400 C and the average coolant temperature above the core is typically about 550 C</a:t>
+            </a:r>
+          </a:p>
+          <a:p>
+            <a:r>
+              <a:rPr lang="en-US" sz="2000" dirty="0"/>
+              <a:t>The neutron flux is very intense (~7x10</a:t>
+            </a:r>
+            <a:r>
+              <a:rPr lang="en-US" sz="2000" baseline="30000" dirty="0"/>
+              <a:t>15</a:t>
+            </a:r>
+            <a:r>
+              <a:rPr lang="en-US" sz="2000" dirty="0"/>
+              <a:t> n/cm</a:t>
+            </a:r>
+            <a:r>
+              <a:rPr lang="en-US" sz="2000" baseline="30000" dirty="0"/>
+              <a:t>2</a:t>
+            </a:r>
+            <a:r>
+              <a:rPr lang="en-US" sz="2000" dirty="0"/>
+              <a:t>/s in the core center) and the assembly materials suffer high damage, more than 100 dpa, at high burnup</a:t>
+            </a:r>
+          </a:p>
+          <a:p>
+            <a:r>
+              <a:rPr lang="en-US" sz="2000" dirty="0"/>
+              <a:t>Qualifying metallic materials able to withstand such high damage while keeping their shape and mechanical properties was/is one of the key challenges for fast reactors</a:t>
+            </a:r>
+          </a:p>
+          <a:p>
+            <a:r>
+              <a:rPr lang="en-US" sz="2000" dirty="0"/>
+              <a:t>In order to reduce fuel cycle costs, the main objective of oxide fuels R&amp;D for fast reactors has been to reach high burnup, typically around 150 </a:t>
+            </a:r>
+            <a:r>
+              <a:rPr lang="en-US" sz="2000" dirty="0" err="1"/>
+              <a:t>GWd</a:t>
+            </a:r>
+            <a:r>
+              <a:rPr lang="en-US" sz="2000" dirty="0"/>
+              <a:t>/ton, about twice the burnup achieved in LWRs</a:t>
+            </a:r>
+          </a:p>
+          <a:p>
+            <a:endParaRPr lang="en-US" sz="2000" dirty="0"/>
+          </a:p>
+          <a:p>
+            <a:endParaRPr lang="en-US" sz="2000" dirty="0"/>
+          </a:p>
+          <a:p>
+            <a:endParaRPr lang="en-US" sz="2000" dirty="0"/>
+          </a:p>
+          <a:p>
+            <a:endParaRPr lang="en-US" sz="2000" dirty="0"/>
+          </a:p>
+          <a:p>
+            <a:endParaRPr lang="en-US" sz="2000" dirty="0"/>
+          </a:p>
+          <a:p>
+            <a:endParaRPr lang="en-US" sz="2000" dirty="0"/>
+          </a:p>
+        </p:txBody>
+      </p:sp>
+      <p:sp>
+        <p:nvSpPr>
+          <p:cNvPr id="4" name="Slide Number Placeholder 3">
+            <a:extLst>
+              <a:ext uri="{FF2B5EF4-FFF2-40B4-BE49-F238E27FC236}">
+                <a16:creationId xmlns:a16="http://schemas.microsoft.com/office/drawing/2014/main" id="{9EE9D9E6-514C-B44D-A33C-6991E66219A8}"/>
+              </a:ext>
+            </a:extLst>
+          </p:cNvPr>
+          <p:cNvSpPr>
+            <a:spLocks noGrp="1"/>
+          </p:cNvSpPr>
+          <p:nvPr>
+            <p:ph type="sldNum" sz="quarter" idx="12"/>
+          </p:nvPr>
+        </p:nvSpPr>
+        <p:spPr/>
+        <p:txBody>
+          <a:bodyPr/>
+          <a:lstStyle/>
+          <a:p>
+            <a:pPr>
+              <a:defRPr/>
+            </a:pPr>
+            <a:fld id="{3FF2C605-4958-CF43-AA48-80339EFDB0AF}" type="slidenum">
+              <a:rPr lang="en-US" smtClean="0"/>
+              <a:pPr>
+                <a:defRPr/>
+              </a:pPr>
+              <a:t>23</a:t>
+            </a:fld>
+            <a:endParaRPr lang="en-US"/>
+          </a:p>
+        </p:txBody>
+      </p:sp>
+    </p:spTree>
+    <p:extLst>
+      <p:ext uri="{BB962C8B-B14F-4D97-AF65-F5344CB8AC3E}">
+        <p14:creationId xmlns:p14="http://schemas.microsoft.com/office/powerpoint/2010/main" val="3599119294"/>
+      </p:ext>
+    </p:extLst>
+  </p:cSld>
+  <p:clrMapOvr>
+    <a:masterClrMapping/>
+  </p:clrMapOvr>
+</p:sld>
+</file>
+
+<file path=ppt/slides/slide24.xml><?xml version="1.0" encoding="utf-8"?>
+<p:sld xmlns:a="http://schemas.openxmlformats.org/drawingml/2006/main" xmlns:r="http://schemas.openxmlformats.org/officeDocument/2006/relationships" xmlns:p="http://schemas.openxmlformats.org/presentationml/2006/main">
+  <p:cSld>
+    <p:spTree>
+      <p:nvGrpSpPr>
+        <p:cNvPr id="1" name=""/>
+        <p:cNvGrpSpPr/>
+        <p:nvPr/>
+      </p:nvGrpSpPr>
+      <p:grpSpPr>
+        <a:xfrm>
+          <a:off x="0" y="0"/>
+          <a:ext cx="0" cy="0"/>
+          <a:chOff x="0" y="0"/>
+          <a:chExt cx="0" cy="0"/>
+        </a:xfrm>
+      </p:grpSpPr>
+      <p:sp>
+        <p:nvSpPr>
+          <p:cNvPr id="2" name="Title 1">
+            <a:extLst>
+              <a:ext uri="{FF2B5EF4-FFF2-40B4-BE49-F238E27FC236}">
+                <a16:creationId xmlns:a16="http://schemas.microsoft.com/office/drawing/2014/main" id="{68F46F75-1C11-77FF-5DBD-5B1D4E59B2E9}"/>
+              </a:ext>
+            </a:extLst>
+          </p:cNvPr>
+          <p:cNvSpPr>
+            <a:spLocks noGrp="1"/>
+          </p:cNvSpPr>
+          <p:nvPr>
+            <p:ph type="title"/>
+          </p:nvPr>
+        </p:nvSpPr>
+        <p:spPr/>
+        <p:txBody>
+          <a:bodyPr/>
+          <a:lstStyle/>
+          <a:p>
+            <a:r>
+              <a:rPr lang="en-US" dirty="0"/>
+              <a:t>UO2 to MOX Design Differences</a:t>
+            </a:r>
+          </a:p>
+        </p:txBody>
+      </p:sp>
+      <p:sp>
+        <p:nvSpPr>
+          <p:cNvPr id="3" name="Content Placeholder 2">
+            <a:extLst>
+              <a:ext uri="{FF2B5EF4-FFF2-40B4-BE49-F238E27FC236}">
+                <a16:creationId xmlns:a16="http://schemas.microsoft.com/office/drawing/2014/main" id="{854859AB-DA71-551A-DCDA-0B929A35CD4D}"/>
+              </a:ext>
+            </a:extLst>
+          </p:cNvPr>
+          <p:cNvSpPr>
+            <a:spLocks noGrp="1"/>
+          </p:cNvSpPr>
+          <p:nvPr>
+            <p:ph idx="1"/>
+          </p:nvPr>
+        </p:nvSpPr>
+        <p:spPr/>
+        <p:txBody>
+          <a:bodyPr/>
+          <a:lstStyle/>
+          <a:p>
+            <a:r>
+              <a:rPr lang="en-US" dirty="0"/>
+              <a:t>Shorter fuel column/rod in MOX</a:t>
+            </a:r>
+          </a:p>
+          <a:p>
+            <a:r>
+              <a:rPr lang="en-US" dirty="0"/>
+              <a:t>Smaller fuel diameter in MOX</a:t>
+            </a:r>
+          </a:p>
+          <a:p>
+            <a:r>
+              <a:rPr lang="en-US" dirty="0"/>
+              <a:t>Steel cladding vs. zircaloy cladding</a:t>
+            </a:r>
+          </a:p>
+          <a:p>
+            <a:r>
+              <a:rPr lang="en-US" dirty="0"/>
+              <a:t>Much higher heating rates in MOX</a:t>
+            </a:r>
+          </a:p>
+          <a:p>
+            <a:r>
+              <a:rPr lang="en-US" dirty="0"/>
+              <a:t>Larger gas plenum</a:t>
+            </a:r>
+          </a:p>
+          <a:p>
+            <a:r>
+              <a:rPr lang="en-US" dirty="0"/>
+              <a:t>Sodium coolant in SFRs</a:t>
+            </a:r>
+          </a:p>
+          <a:p>
+            <a:r>
+              <a:rPr lang="en-US" dirty="0"/>
+              <a:t>Extended burnup for MOX</a:t>
+            </a:r>
+          </a:p>
+          <a:p>
+            <a:r>
+              <a:rPr lang="en-US" dirty="0"/>
+              <a:t>Hexagonal packing of fuel pins</a:t>
+            </a:r>
+          </a:p>
+          <a:p>
+            <a:endParaRPr lang="en-US" dirty="0"/>
+          </a:p>
+        </p:txBody>
+      </p:sp>
+      <p:sp>
+        <p:nvSpPr>
+          <p:cNvPr id="4" name="Slide Number Placeholder 3">
+            <a:extLst>
+              <a:ext uri="{FF2B5EF4-FFF2-40B4-BE49-F238E27FC236}">
+                <a16:creationId xmlns:a16="http://schemas.microsoft.com/office/drawing/2014/main" id="{8C07EF39-A4E7-AF65-987B-1F687A945F36}"/>
+              </a:ext>
+            </a:extLst>
+          </p:cNvPr>
+          <p:cNvSpPr>
+            <a:spLocks noGrp="1"/>
+          </p:cNvSpPr>
+          <p:nvPr>
+            <p:ph type="sldNum" sz="quarter" idx="12"/>
+          </p:nvPr>
+        </p:nvSpPr>
+        <p:spPr/>
+        <p:txBody>
+          <a:bodyPr/>
+          <a:lstStyle/>
+          <a:p>
+            <a:pPr>
+              <a:defRPr/>
+            </a:pPr>
+            <a:fld id="{3FF2C605-4958-CF43-AA48-80339EFDB0AF}" type="slidenum">
+              <a:rPr lang="en-US" smtClean="0"/>
+              <a:pPr>
+                <a:defRPr/>
+              </a:pPr>
+              <a:t>24</a:t>
+            </a:fld>
+            <a:endParaRPr lang="en-US"/>
+          </a:p>
+        </p:txBody>
+      </p:sp>
+      <p:pic>
+        <p:nvPicPr>
+          <p:cNvPr id="1026" name="Picture 2" descr="Horizontal and vertical views of an FFTF fuel assembly. | Download  Scientific Diagram">
+            <a:extLst>
+              <a:ext uri="{FF2B5EF4-FFF2-40B4-BE49-F238E27FC236}">
+                <a16:creationId xmlns:a16="http://schemas.microsoft.com/office/drawing/2014/main" id="{63B194F1-8131-9A91-414A-0B1480050379}"/>
+              </a:ext>
+            </a:extLst>
+          </p:cNvPr>
+          <p:cNvPicPr>
+            <a:picLocks noChangeAspect="1" noChangeArrowheads="1"/>
+          </p:cNvPicPr>
+          <p:nvPr/>
+        </p:nvPicPr>
+        <p:blipFill>
+          <a:blip r:embed="rId2">
+            <a:extLst>
+              <a:ext uri="{28A0092B-C50C-407E-A947-70E740481C1C}">
+                <a14:useLocalDpi xmlns:a14="http://schemas.microsoft.com/office/drawing/2010/main" val="0"/>
+              </a:ext>
+            </a:extLst>
+          </a:blip>
+          <a:srcRect/>
+          <a:stretch>
+            <a:fillRect/>
+          </a:stretch>
+        </p:blipFill>
+        <p:spPr bwMode="auto">
+          <a:xfrm>
+            <a:off x="6987740" y="2198687"/>
+            <a:ext cx="4139004" cy="2639884"/>
+          </a:xfrm>
+          <a:prstGeom prst="rect">
+            <a:avLst/>
+          </a:prstGeom>
+          <a:noFill/>
+          <a:extLst>
+            <a:ext uri="{909E8E84-426E-40DD-AFC4-6F175D3DCCD1}">
+              <a14:hiddenFill xmlns:a14="http://schemas.microsoft.com/office/drawing/2010/main">
+                <a:solidFill>
+                  <a:srgbClr val="FFFFFF"/>
+                </a:solidFill>
+              </a14:hiddenFill>
+            </a:ext>
+          </a:extLst>
+        </p:spPr>
+      </p:pic>
+      <p:sp>
+        <p:nvSpPr>
+          <p:cNvPr id="5" name="TextBox 4">
+            <a:extLst>
+              <a:ext uri="{FF2B5EF4-FFF2-40B4-BE49-F238E27FC236}">
+                <a16:creationId xmlns:a16="http://schemas.microsoft.com/office/drawing/2014/main" id="{918ACDEE-AB77-ED44-16C0-147B569AD3D6}"/>
+              </a:ext>
+            </a:extLst>
+          </p:cNvPr>
+          <p:cNvSpPr txBox="1"/>
+          <p:nvPr/>
+        </p:nvSpPr>
+        <p:spPr>
+          <a:xfrm>
+            <a:off x="7920681" y="5140411"/>
+            <a:ext cx="2239319" cy="383059"/>
+          </a:xfrm>
+          <a:prstGeom prst="rect">
+            <a:avLst/>
+          </a:prstGeom>
+          <a:noFill/>
+        </p:spPr>
+        <p:txBody>
+          <a:bodyPr wrap="square" rtlCol="0">
+            <a:spAutoFit/>
+          </a:bodyPr>
+          <a:lstStyle/>
+          <a:p>
+            <a:pPr algn="ctr"/>
+            <a:r>
+              <a:rPr lang="en-US" dirty="0"/>
+              <a:t>FFTF Assembly</a:t>
+            </a:r>
+          </a:p>
+        </p:txBody>
+      </p:sp>
+    </p:spTree>
+    <p:extLst>
+      <p:ext uri="{BB962C8B-B14F-4D97-AF65-F5344CB8AC3E}">
+        <p14:creationId xmlns:p14="http://schemas.microsoft.com/office/powerpoint/2010/main" val="3464337406"/>
+      </p:ext>
+    </p:extLst>
+  </p:cSld>
+  <p:clrMapOvr>
+    <a:masterClrMapping/>
+  </p:clrMapOvr>
+</p:sld>
+</file>
+
+<file path=ppt/slides/slide25.xml><?xml version="1.0" encoding="utf-8"?>
+<p:sld xmlns:a="http://schemas.openxmlformats.org/drawingml/2006/main" xmlns:r="http://schemas.openxmlformats.org/officeDocument/2006/relationships" xmlns:p="http://schemas.openxmlformats.org/presentationml/2006/main">
+  <p:cSld>
+    <p:spTree>
+      <p:nvGrpSpPr>
+        <p:cNvPr id="1" name=""/>
+        <p:cNvGrpSpPr/>
+        <p:nvPr/>
+      </p:nvGrpSpPr>
+      <p:grpSpPr>
+        <a:xfrm>
+          <a:off x="0" y="0"/>
+          <a:ext cx="0" cy="0"/>
+          <a:chOff x="0" y="0"/>
+          <a:chExt cx="0" cy="0"/>
+        </a:xfrm>
+      </p:grpSpPr>
+      <p:sp>
+        <p:nvSpPr>
+          <p:cNvPr id="2" name="Title 1">
+            <a:extLst>
+              <a:ext uri="{FF2B5EF4-FFF2-40B4-BE49-F238E27FC236}">
+                <a16:creationId xmlns:a16="http://schemas.microsoft.com/office/drawing/2014/main" id="{DC4D3B70-35DC-544B-9F51-A27245C5B4AC}"/>
+              </a:ext>
+            </a:extLst>
+          </p:cNvPr>
+          <p:cNvSpPr>
+            <a:spLocks noGrp="1"/>
+          </p:cNvSpPr>
+          <p:nvPr>
+            <p:ph type="title"/>
+          </p:nvPr>
+        </p:nvSpPr>
+        <p:spPr/>
+        <p:txBody>
+          <a:bodyPr/>
+          <a:lstStyle/>
+          <a:p>
+            <a:r>
+              <a:rPr lang="en-US" dirty="0"/>
+              <a:t>MOX Fuel</a:t>
+            </a:r>
+          </a:p>
+        </p:txBody>
+      </p:sp>
+      <p:sp>
+        <p:nvSpPr>
+          <p:cNvPr id="3" name="Content Placeholder 2">
+            <a:extLst>
+              <a:ext uri="{FF2B5EF4-FFF2-40B4-BE49-F238E27FC236}">
+                <a16:creationId xmlns:a16="http://schemas.microsoft.com/office/drawing/2014/main" id="{E41A27E7-F2F0-D147-BB03-265E116408EB}"/>
+              </a:ext>
+            </a:extLst>
+          </p:cNvPr>
+          <p:cNvSpPr>
+            <a:spLocks noGrp="1"/>
+          </p:cNvSpPr>
+          <p:nvPr>
+            <p:ph idx="1"/>
+          </p:nvPr>
+        </p:nvSpPr>
+        <p:spPr/>
+        <p:txBody>
+          <a:bodyPr/>
+          <a:lstStyle/>
+          <a:p>
+            <a:r>
+              <a:rPr lang="en-US" sz="2000" dirty="0"/>
+              <a:t>The main requirements and design criteria are the following:</a:t>
+            </a:r>
+          </a:p>
+          <a:p>
+            <a:pPr lvl="1"/>
+            <a:r>
+              <a:rPr lang="en-US" sz="2000" dirty="0"/>
+              <a:t>Guaranteeing the absence of fuel melting, both in nominal conditions and during off-normal events</a:t>
+            </a:r>
+          </a:p>
+          <a:p>
+            <a:pPr lvl="1"/>
+            <a:r>
+              <a:rPr lang="en-US" sz="2000" dirty="0"/>
+              <a:t>Keeping cladding integrity and fuel pin tightness</a:t>
+            </a:r>
+          </a:p>
+          <a:p>
+            <a:pPr lvl="1"/>
+            <a:r>
+              <a:rPr lang="en-US" sz="2000" dirty="0"/>
+              <a:t>Cooling of the fuel pin bundle must be ensured up to high burnup in all operating conditions</a:t>
+            </a:r>
+          </a:p>
+          <a:p>
+            <a:pPr lvl="1"/>
+            <a:r>
+              <a:rPr lang="en-US" sz="2000" dirty="0"/>
+              <a:t>Loading and unloading of subassemblies have to be guaranteed, which induces a limitation on the deformation of the hexagonal wrapper tubes</a:t>
+            </a:r>
+          </a:p>
+          <a:p>
+            <a:endParaRPr lang="en-US" sz="2000" dirty="0"/>
+          </a:p>
+          <a:p>
+            <a:endParaRPr lang="en-US" sz="2000" dirty="0"/>
+          </a:p>
+          <a:p>
+            <a:endParaRPr lang="en-US" sz="2000" dirty="0"/>
+          </a:p>
+          <a:p>
+            <a:endParaRPr lang="en-US" sz="2000" dirty="0"/>
+          </a:p>
+          <a:p>
+            <a:endParaRPr lang="en-US" sz="2000" dirty="0"/>
+          </a:p>
+        </p:txBody>
+      </p:sp>
+      <p:sp>
+        <p:nvSpPr>
+          <p:cNvPr id="4" name="Slide Number Placeholder 3">
+            <a:extLst>
+              <a:ext uri="{FF2B5EF4-FFF2-40B4-BE49-F238E27FC236}">
+                <a16:creationId xmlns:a16="http://schemas.microsoft.com/office/drawing/2014/main" id="{EC10D385-6F7F-9042-93AC-80FA1AE70165}"/>
+              </a:ext>
+            </a:extLst>
+          </p:cNvPr>
+          <p:cNvSpPr>
+            <a:spLocks noGrp="1"/>
+          </p:cNvSpPr>
+          <p:nvPr>
+            <p:ph type="sldNum" sz="quarter" idx="12"/>
+          </p:nvPr>
+        </p:nvSpPr>
+        <p:spPr/>
+        <p:txBody>
+          <a:bodyPr/>
+          <a:lstStyle/>
+          <a:p>
+            <a:pPr>
+              <a:defRPr/>
+            </a:pPr>
+            <a:fld id="{3FF2C605-4958-CF43-AA48-80339EFDB0AF}" type="slidenum">
+              <a:rPr lang="en-US" smtClean="0"/>
+              <a:pPr>
+                <a:defRPr/>
+              </a:pPr>
+              <a:t>25</a:t>
+            </a:fld>
+            <a:endParaRPr lang="en-US"/>
+          </a:p>
+        </p:txBody>
+      </p:sp>
+    </p:spTree>
+    <p:extLst>
+      <p:ext uri="{BB962C8B-B14F-4D97-AF65-F5344CB8AC3E}">
+        <p14:creationId xmlns:p14="http://schemas.microsoft.com/office/powerpoint/2010/main" val="66068493"/>
+      </p:ext>
+    </p:extLst>
+  </p:cSld>
+  <p:clrMapOvr>
+    <a:masterClrMapping/>
+  </p:clrMapOvr>
+</p:sld>
+</file>
+
+<file path=ppt/slides/slide26.xml><?xml version="1.0" encoding="utf-8"?>
+<p:sld xmlns:a="http://schemas.openxmlformats.org/drawingml/2006/main" xmlns:r="http://schemas.openxmlformats.org/officeDocument/2006/relationships" xmlns:p="http://schemas.openxmlformats.org/presentationml/2006/main">
+  <p:cSld>
+    <p:spTree>
+      <p:nvGrpSpPr>
+        <p:cNvPr id="1" name=""/>
+        <p:cNvGrpSpPr/>
+        <p:nvPr/>
+      </p:nvGrpSpPr>
+      <p:grpSpPr>
+        <a:xfrm>
+          <a:off x="0" y="0"/>
+          <a:ext cx="0" cy="0"/>
+          <a:chOff x="0" y="0"/>
+          <a:chExt cx="0" cy="0"/>
+        </a:xfrm>
+      </p:grpSpPr>
+      <p:sp>
+        <p:nvSpPr>
+          <p:cNvPr id="2" name="Title 1">
+            <a:extLst>
+              <a:ext uri="{FF2B5EF4-FFF2-40B4-BE49-F238E27FC236}">
+                <a16:creationId xmlns:a16="http://schemas.microsoft.com/office/drawing/2014/main" id="{D979D8F0-6373-E345-8C4D-00903DBA0CE7}"/>
+              </a:ext>
+            </a:extLst>
+          </p:cNvPr>
+          <p:cNvSpPr>
+            <a:spLocks noGrp="1"/>
+          </p:cNvSpPr>
+          <p:nvPr>
+            <p:ph type="title"/>
+          </p:nvPr>
+        </p:nvSpPr>
+        <p:spPr/>
+        <p:txBody>
+          <a:bodyPr/>
+          <a:lstStyle/>
+          <a:p>
+            <a:r>
+              <a:rPr lang="en-US" dirty="0"/>
+              <a:t>MOX Fuels</a:t>
+            </a:r>
+          </a:p>
+        </p:txBody>
+      </p:sp>
+      <p:sp>
+        <p:nvSpPr>
+          <p:cNvPr id="3" name="Content Placeholder 2">
+            <a:extLst>
+              <a:ext uri="{FF2B5EF4-FFF2-40B4-BE49-F238E27FC236}">
+                <a16:creationId xmlns:a16="http://schemas.microsoft.com/office/drawing/2014/main" id="{AEF6B378-35F8-3242-BD7F-AA5805B45888}"/>
+              </a:ext>
+            </a:extLst>
+          </p:cNvPr>
+          <p:cNvSpPr>
+            <a:spLocks noGrp="1"/>
+          </p:cNvSpPr>
+          <p:nvPr>
+            <p:ph idx="1"/>
+          </p:nvPr>
+        </p:nvSpPr>
+        <p:spPr>
+          <a:xfrm>
+            <a:off x="609600" y="1870841"/>
+            <a:ext cx="7082274" cy="4255323"/>
+          </a:xfrm>
+        </p:spPr>
+        <p:txBody>
+          <a:bodyPr>
+            <a:noAutofit/>
+          </a:bodyPr>
+          <a:lstStyle/>
+          <a:p>
+            <a:r>
+              <a:rPr lang="en-US" sz="2000" dirty="0"/>
+              <a:t>Most phenomena occurring inside oxide fuel pellets are thermally activated, and a good knowledge of the thermal field inside the fuel stack is key</a:t>
+            </a:r>
+          </a:p>
+          <a:p>
+            <a:r>
+              <a:rPr lang="en-US" sz="2000" dirty="0"/>
+              <a:t>Centerline temperatures can reach above 2000C, significantly higher than thermal LWRs</a:t>
+            </a:r>
+          </a:p>
+          <a:p>
+            <a:r>
+              <a:rPr lang="en-US" sz="2000" dirty="0"/>
+              <a:t>Thermal conductivity is low and degrades with irradiation</a:t>
+            </a:r>
+          </a:p>
+          <a:p>
+            <a:r>
+              <a:rPr lang="en-US" sz="2000" dirty="0"/>
+              <a:t>Due to the steep thermal gradient, thermal stress cracks form </a:t>
+            </a:r>
+          </a:p>
+          <a:p>
+            <a:r>
+              <a:rPr lang="en-US" sz="2000" dirty="0"/>
+              <a:t>Restructuring takes place due to the high temperatures, leading to distinct regions in the fuel</a:t>
+            </a:r>
+          </a:p>
+          <a:p>
+            <a:endParaRPr lang="en-US" sz="2000" dirty="0"/>
+          </a:p>
+        </p:txBody>
+      </p:sp>
+      <p:sp>
+        <p:nvSpPr>
+          <p:cNvPr id="5" name="Slide Number Placeholder 4">
+            <a:extLst>
+              <a:ext uri="{FF2B5EF4-FFF2-40B4-BE49-F238E27FC236}">
+                <a16:creationId xmlns:a16="http://schemas.microsoft.com/office/drawing/2014/main" id="{D33C6E57-90AD-1244-B19C-60B5F752F204}"/>
+              </a:ext>
+            </a:extLst>
+          </p:cNvPr>
+          <p:cNvSpPr>
+            <a:spLocks noGrp="1"/>
+          </p:cNvSpPr>
+          <p:nvPr>
+            <p:ph type="sldNum" sz="quarter" idx="12"/>
+          </p:nvPr>
+        </p:nvSpPr>
+        <p:spPr/>
+        <p:txBody>
+          <a:bodyPr/>
+          <a:lstStyle/>
+          <a:p>
+            <a:pPr>
+              <a:defRPr/>
+            </a:pPr>
+            <a:fld id="{3FF2C605-4958-CF43-AA48-80339EFDB0AF}" type="slidenum">
+              <a:rPr lang="en-US" smtClean="0"/>
+              <a:pPr>
+                <a:defRPr/>
+              </a:pPr>
+              <a:t>26</a:t>
+            </a:fld>
+            <a:endParaRPr lang="en-US"/>
+          </a:p>
+        </p:txBody>
+      </p:sp>
+      <p:pic>
+        <p:nvPicPr>
+          <p:cNvPr id="7" name="Picture 6">
+            <a:extLst>
+              <a:ext uri="{FF2B5EF4-FFF2-40B4-BE49-F238E27FC236}">
+                <a16:creationId xmlns:a16="http://schemas.microsoft.com/office/drawing/2014/main" id="{A1AC2DEA-7714-0B45-8BC1-8D4FD34F3E51}"/>
+              </a:ext>
+            </a:extLst>
+          </p:cNvPr>
+          <p:cNvPicPr>
+            <a:picLocks noChangeAspect="1"/>
+          </p:cNvPicPr>
+          <p:nvPr/>
+        </p:nvPicPr>
+        <p:blipFill>
+          <a:blip r:embed="rId2"/>
+          <a:stretch>
+            <a:fillRect/>
+          </a:stretch>
+        </p:blipFill>
+        <p:spPr>
+          <a:xfrm>
+            <a:off x="8209998" y="1405493"/>
+            <a:ext cx="2844800" cy="2387191"/>
+          </a:xfrm>
+          <a:prstGeom prst="rect">
+            <a:avLst/>
+          </a:prstGeom>
+        </p:spPr>
+      </p:pic>
+      <p:pic>
+        <p:nvPicPr>
+          <p:cNvPr id="8" name="Picture 7">
+            <a:extLst>
+              <a:ext uri="{FF2B5EF4-FFF2-40B4-BE49-F238E27FC236}">
+                <a16:creationId xmlns:a16="http://schemas.microsoft.com/office/drawing/2014/main" id="{6377BF14-4331-0444-A21A-5DE2FD89FAA0}"/>
+              </a:ext>
+            </a:extLst>
+          </p:cNvPr>
+          <p:cNvPicPr>
+            <a:picLocks noChangeAspect="1"/>
+          </p:cNvPicPr>
+          <p:nvPr/>
+        </p:nvPicPr>
+        <p:blipFill>
+          <a:blip r:embed="rId3"/>
+          <a:stretch>
+            <a:fillRect/>
+          </a:stretch>
+        </p:blipFill>
+        <p:spPr>
+          <a:xfrm>
+            <a:off x="8140976" y="4004853"/>
+            <a:ext cx="3384824" cy="2387191"/>
+          </a:xfrm>
+          <a:prstGeom prst="rect">
+            <a:avLst/>
+          </a:prstGeom>
+        </p:spPr>
+      </p:pic>
+    </p:spTree>
+    <p:extLst>
+      <p:ext uri="{BB962C8B-B14F-4D97-AF65-F5344CB8AC3E}">
+        <p14:creationId xmlns:p14="http://schemas.microsoft.com/office/powerpoint/2010/main" val="2736021547"/>
+      </p:ext>
+    </p:extLst>
+  </p:cSld>
+  <p:clrMapOvr>
+    <a:masterClrMapping/>
+  </p:clrMapOvr>
+</p:sld>
+</file>
+
+<file path=ppt/slides/slide27.xml><?xml version="1.0" encoding="utf-8"?>
+<p:sld xmlns:a="http://schemas.openxmlformats.org/drawingml/2006/main" xmlns:r="http://schemas.openxmlformats.org/officeDocument/2006/relationships" xmlns:p="http://schemas.openxmlformats.org/presentationml/2006/main">
+  <p:cSld>
+    <p:spTree>
+      <p:nvGrpSpPr>
+        <p:cNvPr id="1" name=""/>
+        <p:cNvGrpSpPr/>
+        <p:nvPr/>
+      </p:nvGrpSpPr>
+      <p:grpSpPr>
+        <a:xfrm>
+          <a:off x="0" y="0"/>
+          <a:ext cx="0" cy="0"/>
+          <a:chOff x="0" y="0"/>
+          <a:chExt cx="0" cy="0"/>
+        </a:xfrm>
+      </p:grpSpPr>
+      <p:sp>
+        <p:nvSpPr>
+          <p:cNvPr id="2" name="Title 1">
+            <a:extLst>
+              <a:ext uri="{FF2B5EF4-FFF2-40B4-BE49-F238E27FC236}">
+                <a16:creationId xmlns:a16="http://schemas.microsoft.com/office/drawing/2014/main" id="{E84251A8-BC3E-754A-B33C-F5252F2440B6}"/>
+              </a:ext>
+            </a:extLst>
+          </p:cNvPr>
+          <p:cNvSpPr>
+            <a:spLocks noGrp="1"/>
+          </p:cNvSpPr>
+          <p:nvPr>
+            <p:ph type="title"/>
+          </p:nvPr>
+        </p:nvSpPr>
+        <p:spPr/>
+        <p:txBody>
+          <a:bodyPr/>
+          <a:lstStyle/>
+          <a:p>
+            <a:r>
+              <a:rPr lang="en-US" dirty="0"/>
+              <a:t>MOX Restructuring</a:t>
+            </a:r>
+          </a:p>
+        </p:txBody>
+      </p:sp>
+      <p:sp>
+        <p:nvSpPr>
+          <p:cNvPr id="3" name="Content Placeholder 2">
+            <a:extLst>
+              <a:ext uri="{FF2B5EF4-FFF2-40B4-BE49-F238E27FC236}">
+                <a16:creationId xmlns:a16="http://schemas.microsoft.com/office/drawing/2014/main" id="{5C4ABDE3-8DD9-544F-A3F2-B54E2F4CA12A}"/>
+              </a:ext>
+            </a:extLst>
+          </p:cNvPr>
+          <p:cNvSpPr>
+            <a:spLocks noGrp="1"/>
+          </p:cNvSpPr>
+          <p:nvPr>
+            <p:ph idx="1"/>
+          </p:nvPr>
+        </p:nvSpPr>
+        <p:spPr>
+          <a:xfrm>
+            <a:off x="609600" y="1731279"/>
+            <a:ext cx="7470913" cy="4449027"/>
+          </a:xfrm>
+        </p:spPr>
+        <p:txBody>
+          <a:bodyPr/>
+          <a:lstStyle/>
+          <a:p>
+            <a:r>
+              <a:rPr lang="en-US" sz="2000" dirty="0"/>
+              <a:t>Pu bearing fast reactor oxide fuels display four defining regions of a restructured pellet:</a:t>
+            </a:r>
+          </a:p>
+          <a:p>
+            <a:pPr lvl="1"/>
+            <a:r>
+              <a:rPr lang="en-US" sz="2000" dirty="0"/>
+              <a:t>the central void, the columnar grain growth region, the equiaxed grain growth region, and the as-sintered region</a:t>
+            </a:r>
+          </a:p>
+          <a:p>
+            <a:endParaRPr lang="en-US" sz="2000" dirty="0"/>
+          </a:p>
+          <a:p>
+            <a:endParaRPr lang="en-US" sz="2000" dirty="0"/>
+          </a:p>
+        </p:txBody>
+      </p:sp>
+      <p:sp>
+        <p:nvSpPr>
+          <p:cNvPr id="4" name="Slide Number Placeholder 3">
+            <a:extLst>
+              <a:ext uri="{FF2B5EF4-FFF2-40B4-BE49-F238E27FC236}">
+                <a16:creationId xmlns:a16="http://schemas.microsoft.com/office/drawing/2014/main" id="{94770477-52D8-0A4A-9AA5-684FADF01FB4}"/>
+              </a:ext>
+            </a:extLst>
+          </p:cNvPr>
+          <p:cNvSpPr>
+            <a:spLocks noGrp="1"/>
+          </p:cNvSpPr>
+          <p:nvPr>
+            <p:ph type="sldNum" sz="quarter" idx="12"/>
+          </p:nvPr>
+        </p:nvSpPr>
+        <p:spPr/>
+        <p:txBody>
+          <a:bodyPr/>
+          <a:lstStyle/>
+          <a:p>
+            <a:pPr>
+              <a:defRPr/>
+            </a:pPr>
+            <a:fld id="{3FF2C605-4958-CF43-AA48-80339EFDB0AF}" type="slidenum">
+              <a:rPr lang="en-US" smtClean="0"/>
+              <a:pPr>
+                <a:defRPr/>
+              </a:pPr>
+              <a:t>27</a:t>
+            </a:fld>
+            <a:endParaRPr lang="en-US"/>
+          </a:p>
+        </p:txBody>
+      </p:sp>
+      <p:pic>
+        <p:nvPicPr>
+          <p:cNvPr id="5" name="Picture 4">
+            <a:extLst>
+              <a:ext uri="{FF2B5EF4-FFF2-40B4-BE49-F238E27FC236}">
+                <a16:creationId xmlns:a16="http://schemas.microsoft.com/office/drawing/2014/main" id="{6921BB5A-21DE-9744-978F-A4F9A10AE321}"/>
+              </a:ext>
+            </a:extLst>
+          </p:cNvPr>
+          <p:cNvPicPr>
+            <a:picLocks noChangeAspect="1"/>
+          </p:cNvPicPr>
+          <p:nvPr/>
+        </p:nvPicPr>
+        <p:blipFill>
+          <a:blip r:embed="rId2" cstate="email">
+            <a:extLst>
+              <a:ext uri="{28A0092B-C50C-407E-A947-70E740481C1C}">
+                <a14:useLocalDpi xmlns:a14="http://schemas.microsoft.com/office/drawing/2010/main"/>
+              </a:ext>
+            </a:extLst>
+          </a:blip>
+          <a:stretch>
+            <a:fillRect/>
+          </a:stretch>
+        </p:blipFill>
+        <p:spPr>
+          <a:xfrm>
+            <a:off x="7864232" y="2601646"/>
+            <a:ext cx="3536119" cy="3529679"/>
+          </a:xfrm>
+          <a:prstGeom prst="rect">
+            <a:avLst/>
+          </a:prstGeom>
+        </p:spPr>
+      </p:pic>
+      <p:pic>
+        <p:nvPicPr>
+          <p:cNvPr id="6" name="Content Placeholder 5">
+            <a:extLst>
+              <a:ext uri="{FF2B5EF4-FFF2-40B4-BE49-F238E27FC236}">
+                <a16:creationId xmlns:a16="http://schemas.microsoft.com/office/drawing/2014/main" id="{AF3B7627-7C5D-9E46-86D4-BFB79D96273F}"/>
+              </a:ext>
+            </a:extLst>
+          </p:cNvPr>
+          <p:cNvPicPr>
+            <a:picLocks noChangeAspect="1"/>
+          </p:cNvPicPr>
+          <p:nvPr/>
+        </p:nvPicPr>
+        <p:blipFill>
+          <a:blip r:embed="rId3"/>
+          <a:stretch>
+            <a:fillRect/>
+          </a:stretch>
+        </p:blipFill>
+        <p:spPr>
+          <a:xfrm>
+            <a:off x="2073262" y="3294936"/>
+            <a:ext cx="4129326" cy="3243977"/>
+          </a:xfrm>
+          <a:prstGeom prst="rect">
+            <a:avLst/>
+          </a:prstGeom>
+        </p:spPr>
+      </p:pic>
+    </p:spTree>
+    <p:extLst>
+      <p:ext uri="{BB962C8B-B14F-4D97-AF65-F5344CB8AC3E}">
+        <p14:creationId xmlns:p14="http://schemas.microsoft.com/office/powerpoint/2010/main" val="293312973"/>
+      </p:ext>
+    </p:extLst>
+  </p:cSld>
+  <p:clrMapOvr>
+    <a:masterClrMapping/>
+  </p:clrMapOvr>
+</p:sld>
+</file>
+
+<file path=ppt/slides/slide3.xml><?xml version="1.0" encoding="utf-8"?>
+<p:sld xmlns:a="http://schemas.openxmlformats.org/drawingml/2006/main" xmlns:r="http://schemas.openxmlformats.org/officeDocument/2006/relationships" xmlns:p="http://schemas.openxmlformats.org/presentationml/2006/main">
+  <p:cSld>
+    <p:spTree>
+      <p:nvGrpSpPr>
+        <p:cNvPr id="1" name=""/>
+        <p:cNvGrpSpPr/>
+        <p:nvPr/>
+      </p:nvGrpSpPr>
+      <p:grpSpPr>
+        <a:xfrm>
+          <a:off x="0" y="0"/>
+          <a:ext cx="0" cy="0"/>
+          <a:chOff x="0" y="0"/>
+          <a:chExt cx="0" cy="0"/>
+        </a:xfrm>
+      </p:grpSpPr>
+      <p:sp>
+        <p:nvSpPr>
+          <p:cNvPr id="2" name="Title 1">
+            <a:extLst>
+              <a:ext uri="{FF2B5EF4-FFF2-40B4-BE49-F238E27FC236}">
+                <a16:creationId xmlns:a16="http://schemas.microsoft.com/office/drawing/2014/main" id="{98D58655-7C4C-EA26-5D9F-DCBD2E336A4F}"/>
+              </a:ext>
+            </a:extLst>
+          </p:cNvPr>
+          <p:cNvSpPr>
+            <a:spLocks noGrp="1"/>
+          </p:cNvSpPr>
+          <p:nvPr>
+            <p:ph type="title"/>
+          </p:nvPr>
+        </p:nvSpPr>
+        <p:spPr/>
+        <p:txBody>
+          <a:bodyPr/>
+          <a:lstStyle/>
+          <a:p>
+            <a:r>
+              <a:rPr lang="en-US" dirty="0"/>
+              <a:t>Last Time</a:t>
+            </a:r>
+          </a:p>
+        </p:txBody>
+      </p:sp>
+      <p:sp>
+        <p:nvSpPr>
+          <p:cNvPr id="3" name="Content Placeholder 2">
+            <a:extLst>
+              <a:ext uri="{FF2B5EF4-FFF2-40B4-BE49-F238E27FC236}">
+                <a16:creationId xmlns:a16="http://schemas.microsoft.com/office/drawing/2014/main" id="{6EB4D738-92B5-4FF0-6ED4-0C0E774ACB5D}"/>
+              </a:ext>
+            </a:extLst>
+          </p:cNvPr>
+          <p:cNvSpPr>
+            <a:spLocks noGrp="1"/>
+          </p:cNvSpPr>
+          <p:nvPr>
+            <p:ph idx="1"/>
+          </p:nvPr>
+        </p:nvSpPr>
+        <p:spPr>
+          <a:xfrm>
+            <a:off x="609600" y="1397876"/>
+            <a:ext cx="10972800" cy="4728289"/>
+          </a:xfrm>
+        </p:spPr>
+        <p:txBody>
+          <a:bodyPr/>
+          <a:lstStyle/>
+          <a:p>
+            <a:r>
+              <a:rPr lang="en-US" sz="2100" dirty="0"/>
+              <a:t>Steam kinetics</a:t>
+            </a:r>
+          </a:p>
+          <a:p>
+            <a:pPr lvl="1"/>
+            <a:r>
+              <a:rPr lang="en-US" sz="2100" dirty="0"/>
+              <a:t>Beyond 800 C oxidation is too rapid, above 1200 C, entire cladding gets consumed</a:t>
+            </a:r>
+          </a:p>
+          <a:p>
+            <a:pPr lvl="1"/>
+            <a:r>
+              <a:rPr lang="en-US" sz="2100" dirty="0"/>
+              <a:t>Zr phase transformation at 863 C, leads to beta and O-stabilized alpha (which is more brittle)</a:t>
+            </a:r>
+          </a:p>
+          <a:p>
+            <a:r>
+              <a:rPr lang="en-US" sz="2100" dirty="0"/>
+              <a:t>ATF</a:t>
+            </a:r>
+          </a:p>
+          <a:p>
+            <a:pPr lvl="1"/>
+            <a:r>
+              <a:rPr lang="en-US" sz="2100" dirty="0"/>
+              <a:t>improved cladding properties, improved steam corrosion, improved fuel properties, improved fission product retention</a:t>
+            </a:r>
+          </a:p>
+          <a:p>
+            <a:pPr lvl="1"/>
+            <a:r>
+              <a:rPr lang="en-US" sz="2100" dirty="0"/>
+              <a:t>Near term improvements: coatings, fuel additives</a:t>
+            </a:r>
+          </a:p>
+          <a:p>
+            <a:pPr lvl="1"/>
+            <a:r>
+              <a:rPr lang="en-US" sz="2100" dirty="0"/>
+              <a:t>Novel fuel/cladding: U3Si2/UN fuels, </a:t>
+            </a:r>
+            <a:r>
+              <a:rPr lang="en-US" sz="2100" dirty="0" err="1"/>
+              <a:t>FeCrAl</a:t>
+            </a:r>
+            <a:r>
+              <a:rPr lang="en-US" sz="2100" dirty="0"/>
+              <a:t> cladding</a:t>
+            </a:r>
+          </a:p>
+          <a:p>
+            <a:pPr lvl="1"/>
+            <a:r>
+              <a:rPr lang="en-US" sz="2100" dirty="0"/>
+              <a:t>Transformative fuel/cladding: FCM, </a:t>
+            </a:r>
+            <a:r>
+              <a:rPr lang="en-US" sz="2100" dirty="0" err="1"/>
+              <a:t>SiC</a:t>
+            </a:r>
+            <a:r>
+              <a:rPr lang="en-US" sz="2100" dirty="0"/>
+              <a:t>/</a:t>
+            </a:r>
+            <a:r>
+              <a:rPr lang="en-US" sz="2100" dirty="0" err="1"/>
+              <a:t>SiC</a:t>
+            </a:r>
+            <a:r>
+              <a:rPr lang="en-US" sz="2100" dirty="0"/>
+              <a:t>, etc.</a:t>
+            </a:r>
+          </a:p>
+          <a:p>
+            <a:r>
+              <a:rPr lang="en-US" sz="2100" dirty="0"/>
+              <a:t>Limiting phenomena: Pellet-clad mechanical interaction; Cladding elongation and assembly bow; Cladding oxidation and hydrogen pickup; Cladding wear; Power to melt; Fuel rod internal pressure; Departure from nucleate boiling; Normal operation limits</a:t>
+            </a:r>
+          </a:p>
+          <a:p>
+            <a:endParaRPr lang="en-US" sz="2100" dirty="0"/>
+          </a:p>
+          <a:p>
+            <a:endParaRPr lang="en-US" sz="2100" dirty="0"/>
+          </a:p>
+        </p:txBody>
+      </p:sp>
+      <p:sp>
+        <p:nvSpPr>
+          <p:cNvPr id="4" name="Slide Number Placeholder 3">
+            <a:extLst>
+              <a:ext uri="{FF2B5EF4-FFF2-40B4-BE49-F238E27FC236}">
+                <a16:creationId xmlns:a16="http://schemas.microsoft.com/office/drawing/2014/main" id="{4934AA36-BFA5-D05C-3A17-FEEF310E3CF2}"/>
+              </a:ext>
+            </a:extLst>
+          </p:cNvPr>
+          <p:cNvSpPr>
+            <a:spLocks noGrp="1"/>
+          </p:cNvSpPr>
+          <p:nvPr>
+            <p:ph type="sldNum" sz="quarter" idx="12"/>
+          </p:nvPr>
+        </p:nvSpPr>
+        <p:spPr/>
+        <p:txBody>
+          <a:bodyPr/>
+          <a:lstStyle/>
+          <a:p>
+            <a:pPr>
+              <a:defRPr/>
+            </a:pPr>
+            <a:fld id="{3FF2C605-4958-CF43-AA48-80339EFDB0AF}" type="slidenum">
+              <a:rPr lang="en-US" smtClean="0"/>
+              <a:pPr>
+                <a:defRPr/>
+              </a:pPr>
+              <a:t>3</a:t>
+            </a:fld>
+            <a:endParaRPr lang="en-US"/>
+          </a:p>
+        </p:txBody>
+      </p:sp>
+    </p:spTree>
+    <p:extLst>
+      <p:ext uri="{BB962C8B-B14F-4D97-AF65-F5344CB8AC3E}">
+        <p14:creationId xmlns:p14="http://schemas.microsoft.com/office/powerpoint/2010/main" val="1645684244"/>
+      </p:ext>
+    </p:extLst>
+  </p:cSld>
+  <p:clrMapOvr>
+    <a:masterClrMapping/>
+  </p:clrMapOvr>
+</p:sld>
+</file>
+
+<file path=ppt/slides/slide4.xml><?xml version="1.0" encoding="utf-8"?>
+<p:sld xmlns:a="http://schemas.openxmlformats.org/drawingml/2006/main" xmlns:r="http://schemas.openxmlformats.org/officeDocument/2006/relationships" xmlns:p="http://schemas.openxmlformats.org/presentationml/2006/main">
+  <p:cSld>
+    <p:spTree>
+      <p:nvGrpSpPr>
+        <p:cNvPr id="1" name=""/>
+        <p:cNvGrpSpPr/>
+        <p:nvPr/>
+      </p:nvGrpSpPr>
+      <p:grpSpPr>
+        <a:xfrm>
+          <a:off x="0" y="0"/>
+          <a:ext cx="0" cy="0"/>
+          <a:chOff x="0" y="0"/>
+          <a:chExt cx="0" cy="0"/>
+        </a:xfrm>
+      </p:grpSpPr>
+      <p:sp>
+        <p:nvSpPr>
+          <p:cNvPr id="2" name="Title 1">
+            <a:extLst>
+              <a:ext uri="{FF2B5EF4-FFF2-40B4-BE49-F238E27FC236}">
+                <a16:creationId xmlns:a16="http://schemas.microsoft.com/office/drawing/2014/main" id="{96329CC1-34E4-A34F-8621-801D8886CE7C}"/>
+              </a:ext>
+            </a:extLst>
+          </p:cNvPr>
+          <p:cNvSpPr>
+            <a:spLocks noGrp="1"/>
+          </p:cNvSpPr>
+          <p:nvPr>
+            <p:ph type="title"/>
+          </p:nvPr>
+        </p:nvSpPr>
+        <p:spPr>
+          <a:xfrm>
+            <a:off x="963084" y="1234721"/>
+            <a:ext cx="10363200" cy="1362075"/>
+          </a:xfrm>
+        </p:spPr>
+        <p:txBody>
+          <a:bodyPr/>
+          <a:lstStyle/>
+          <a:p>
+            <a:r>
+              <a:rPr lang="en-US" dirty="0"/>
+              <a:t>water chemistry</a:t>
+            </a:r>
+          </a:p>
+        </p:txBody>
+      </p:sp>
+      <p:sp>
+        <p:nvSpPr>
+          <p:cNvPr id="4" name="Slide Number Placeholder 3">
+            <a:extLst>
+              <a:ext uri="{FF2B5EF4-FFF2-40B4-BE49-F238E27FC236}">
+                <a16:creationId xmlns:a16="http://schemas.microsoft.com/office/drawing/2014/main" id="{2BFF06B0-02C9-F34D-82A4-D2D5BBAF6842}"/>
+              </a:ext>
+            </a:extLst>
+          </p:cNvPr>
+          <p:cNvSpPr>
+            <a:spLocks noGrp="1"/>
+          </p:cNvSpPr>
+          <p:nvPr>
+            <p:ph type="sldNum" sz="quarter" idx="12"/>
+          </p:nvPr>
+        </p:nvSpPr>
+        <p:spPr/>
+        <p:txBody>
+          <a:bodyPr/>
+          <a:lstStyle/>
+          <a:p>
+            <a:pPr>
+              <a:defRPr/>
+            </a:pPr>
+            <a:fld id="{0DA6BD0F-ABBC-C14D-BC96-77BE126A748B}" type="slidenum">
+              <a:rPr lang="en-US" smtClean="0"/>
+              <a:pPr>
+                <a:defRPr/>
+              </a:pPr>
+              <a:t>4</a:t>
+            </a:fld>
+            <a:endParaRPr lang="en-US"/>
+          </a:p>
+        </p:txBody>
+      </p:sp>
+    </p:spTree>
+    <p:extLst>
+      <p:ext uri="{BB962C8B-B14F-4D97-AF65-F5344CB8AC3E}">
+        <p14:creationId xmlns:p14="http://schemas.microsoft.com/office/powerpoint/2010/main" val="631912674"/>
+      </p:ext>
+    </p:extLst>
+  </p:cSld>
+  <p:clrMapOvr>
+    <a:masterClrMapping/>
+  </p:clrMapOvr>
+</p:sld>
+</file>
+
+<file path=ppt/slides/slide5.xml><?xml version="1.0" encoding="utf-8"?>
+<p:sld xmlns:a="http://schemas.openxmlformats.org/drawingml/2006/main" xmlns:r="http://schemas.openxmlformats.org/officeDocument/2006/relationships" xmlns:p="http://schemas.openxmlformats.org/presentationml/2006/main">
+  <p:cSld>
+    <p:spTree>
+      <p:nvGrpSpPr>
+        <p:cNvPr id="1" name=""/>
+        <p:cNvGrpSpPr/>
+        <p:nvPr/>
+      </p:nvGrpSpPr>
+      <p:grpSpPr>
+        <a:xfrm>
+          <a:off x="0" y="0"/>
+          <a:ext cx="0" cy="0"/>
+          <a:chOff x="0" y="0"/>
+          <a:chExt cx="0" cy="0"/>
+        </a:xfrm>
+      </p:grpSpPr>
+      <p:sp>
+        <p:nvSpPr>
+          <p:cNvPr id="2" name="Title 1">
+            <a:extLst>
+              <a:ext uri="{FF2B5EF4-FFF2-40B4-BE49-F238E27FC236}">
+                <a16:creationId xmlns:a16="http://schemas.microsoft.com/office/drawing/2014/main" id="{9AF52E77-31AB-F546-9341-5E688A3FEC64}"/>
+              </a:ext>
+            </a:extLst>
+          </p:cNvPr>
+          <p:cNvSpPr>
+            <a:spLocks noGrp="1"/>
+          </p:cNvSpPr>
+          <p:nvPr>
+            <p:ph type="title"/>
+          </p:nvPr>
+        </p:nvSpPr>
+        <p:spPr/>
+        <p:txBody>
+          <a:bodyPr/>
+          <a:lstStyle/>
+          <a:p>
+            <a:r>
+              <a:rPr lang="en-US" dirty="0"/>
+              <a:t>Water Chemistry</a:t>
+            </a:r>
+          </a:p>
+        </p:txBody>
+      </p:sp>
+      <p:sp>
+        <p:nvSpPr>
+          <p:cNvPr id="3" name="Content Placeholder 2">
+            <a:extLst>
+              <a:ext uri="{FF2B5EF4-FFF2-40B4-BE49-F238E27FC236}">
+                <a16:creationId xmlns:a16="http://schemas.microsoft.com/office/drawing/2014/main" id="{7C7F56AD-1ED8-C841-913F-284D136CDA16}"/>
+              </a:ext>
+            </a:extLst>
+          </p:cNvPr>
+          <p:cNvSpPr>
+            <a:spLocks noGrp="1"/>
+          </p:cNvSpPr>
+          <p:nvPr>
+            <p:ph idx="1"/>
+          </p:nvPr>
+        </p:nvSpPr>
+        <p:spPr/>
+        <p:txBody>
+          <a:bodyPr/>
+          <a:lstStyle/>
+          <a:p>
+            <a:r>
+              <a:rPr lang="en-US" dirty="0"/>
+              <a:t>Excellent water quality is essential if material degradation is to be controlled</a:t>
+            </a:r>
+          </a:p>
+          <a:p>
+            <a:r>
+              <a:rPr lang="en-US" dirty="0"/>
+              <a:t>Primary system water chemistry affects fuel performance through the deposition of corrosion products on fuel pin surfaces</a:t>
+            </a:r>
+          </a:p>
+          <a:p>
+            <a:r>
+              <a:rPr lang="en-US" dirty="0"/>
+              <a:t>In the early days of nuclear power plant operation, impurities in the coolant water were a major factor in causing excessive corrosion</a:t>
+            </a:r>
+          </a:p>
+          <a:p>
+            <a:r>
+              <a:rPr lang="en-US" dirty="0"/>
+              <a:t>Chlorides and sulfates are particularly aggressive in increasing intergranular stress corrosion cracking (IGSCC) and other corrosion processes</a:t>
+            </a:r>
+          </a:p>
+          <a:p>
+            <a:r>
+              <a:rPr lang="en-US" dirty="0"/>
+              <a:t>Initial efforts to improve water quality brought about a slow but steady reduction in impurities through improved design and operation of purification systems</a:t>
+            </a:r>
+          </a:p>
+          <a:p>
+            <a:endParaRPr lang="en-US" dirty="0"/>
+          </a:p>
+        </p:txBody>
+      </p:sp>
+      <p:sp>
+        <p:nvSpPr>
+          <p:cNvPr id="4" name="Slide Number Placeholder 3">
+            <a:extLst>
+              <a:ext uri="{FF2B5EF4-FFF2-40B4-BE49-F238E27FC236}">
+                <a16:creationId xmlns:a16="http://schemas.microsoft.com/office/drawing/2014/main" id="{99AC9B1E-E8C9-7143-98CB-9210C6D04189}"/>
+              </a:ext>
+            </a:extLst>
+          </p:cNvPr>
+          <p:cNvSpPr>
+            <a:spLocks noGrp="1"/>
+          </p:cNvSpPr>
+          <p:nvPr>
+            <p:ph type="sldNum" sz="quarter" idx="12"/>
+          </p:nvPr>
+        </p:nvSpPr>
+        <p:spPr/>
+        <p:txBody>
+          <a:bodyPr/>
+          <a:lstStyle/>
+          <a:p>
+            <a:pPr>
+              <a:defRPr/>
+            </a:pPr>
+            <a:fld id="{3FF2C605-4958-CF43-AA48-80339EFDB0AF}" type="slidenum">
+              <a:rPr lang="en-US" smtClean="0"/>
+              <a:pPr>
+                <a:defRPr/>
+              </a:pPr>
+              <a:t>5</a:t>
+            </a:fld>
+            <a:endParaRPr lang="en-US"/>
+          </a:p>
+        </p:txBody>
+      </p:sp>
+    </p:spTree>
+    <p:extLst>
+      <p:ext uri="{BB962C8B-B14F-4D97-AF65-F5344CB8AC3E}">
+        <p14:creationId xmlns:p14="http://schemas.microsoft.com/office/powerpoint/2010/main" val="2001452338"/>
+      </p:ext>
+    </p:extLst>
+  </p:cSld>
+  <p:clrMapOvr>
+    <a:masterClrMapping/>
+  </p:clrMapOvr>
+</p:sld>
+</file>
+
+<file path=ppt/slides/slide6.xml><?xml version="1.0" encoding="utf-8"?>
+<p:sld xmlns:a="http://schemas.openxmlformats.org/drawingml/2006/main" xmlns:r="http://schemas.openxmlformats.org/officeDocument/2006/relationships" xmlns:p="http://schemas.openxmlformats.org/presentationml/2006/main">
+  <p:cSld>
+    <p:spTree>
+      <p:nvGrpSpPr>
+        <p:cNvPr id="1" name=""/>
+        <p:cNvGrpSpPr/>
+        <p:nvPr/>
+      </p:nvGrpSpPr>
+      <p:grpSpPr>
+        <a:xfrm>
+          <a:off x="0" y="0"/>
+          <a:ext cx="0" cy="0"/>
+          <a:chOff x="0" y="0"/>
+          <a:chExt cx="0" cy="0"/>
+        </a:xfrm>
+      </p:grpSpPr>
+      <p:sp>
+        <p:nvSpPr>
+          <p:cNvPr id="2" name="Title 1">
+            <a:extLst>
+              <a:ext uri="{FF2B5EF4-FFF2-40B4-BE49-F238E27FC236}">
+                <a16:creationId xmlns:a16="http://schemas.microsoft.com/office/drawing/2014/main" id="{ED8C7DB5-8C9F-9272-DF93-739A40E25745}"/>
+              </a:ext>
+            </a:extLst>
+          </p:cNvPr>
+          <p:cNvSpPr>
+            <a:spLocks noGrp="1"/>
+          </p:cNvSpPr>
+          <p:nvPr>
+            <p:ph type="title"/>
+          </p:nvPr>
+        </p:nvSpPr>
+        <p:spPr/>
+        <p:txBody>
+          <a:bodyPr/>
+          <a:lstStyle/>
+          <a:p>
+            <a:r>
+              <a:rPr lang="en-US" dirty="0"/>
+              <a:t>Water Chemistry</a:t>
+            </a:r>
+          </a:p>
+        </p:txBody>
+      </p:sp>
+      <p:sp>
+        <p:nvSpPr>
+          <p:cNvPr id="3" name="Content Placeholder 2">
+            <a:extLst>
+              <a:ext uri="{FF2B5EF4-FFF2-40B4-BE49-F238E27FC236}">
+                <a16:creationId xmlns:a16="http://schemas.microsoft.com/office/drawing/2014/main" id="{329644BD-EDB8-9CB0-DEBB-F80F7AF8E06B}"/>
+              </a:ext>
+            </a:extLst>
+          </p:cNvPr>
+          <p:cNvSpPr>
+            <a:spLocks noGrp="1"/>
+          </p:cNvSpPr>
+          <p:nvPr>
+            <p:ph idx="1"/>
+          </p:nvPr>
+        </p:nvSpPr>
+        <p:spPr/>
+        <p:txBody>
+          <a:bodyPr/>
+          <a:lstStyle/>
+          <a:p>
+            <a:r>
+              <a:rPr lang="en-US" sz="2400" dirty="0"/>
+              <a:t>Excellent water chemistry alone is not sufficient to control corrosion, thus programs to modify water chemistry, including minimizing oxygen to reduce the electrochemical corrosion potential (ECP) in BWRs, and oxygen and pH control in PWRs, have been implemented </a:t>
+            </a:r>
+          </a:p>
+          <a:p>
+            <a:r>
+              <a:rPr lang="en-US" sz="2400" dirty="0"/>
+              <a:t>Additives to further inhibit the corrosion process have been developed and are now in widespread use</a:t>
+            </a:r>
+          </a:p>
+          <a:p>
+            <a:r>
+              <a:rPr lang="en-US" sz="2400" dirty="0"/>
+              <a:t>Water chemistry advances are now an important part of the overall operating strategy to control material degradation</a:t>
+            </a:r>
+          </a:p>
+          <a:p>
+            <a:endParaRPr lang="en-US" dirty="0"/>
+          </a:p>
+        </p:txBody>
+      </p:sp>
+      <p:sp>
+        <p:nvSpPr>
+          <p:cNvPr id="4" name="Slide Number Placeholder 3">
+            <a:extLst>
+              <a:ext uri="{FF2B5EF4-FFF2-40B4-BE49-F238E27FC236}">
+                <a16:creationId xmlns:a16="http://schemas.microsoft.com/office/drawing/2014/main" id="{2BBBF92D-7B6E-5B6B-CFEF-769C07D52DFD}"/>
+              </a:ext>
+            </a:extLst>
+          </p:cNvPr>
+          <p:cNvSpPr>
+            <a:spLocks noGrp="1"/>
+          </p:cNvSpPr>
+          <p:nvPr>
+            <p:ph type="sldNum" sz="quarter" idx="12"/>
+          </p:nvPr>
+        </p:nvSpPr>
+        <p:spPr/>
+        <p:txBody>
+          <a:bodyPr/>
+          <a:lstStyle/>
+          <a:p>
+            <a:pPr>
+              <a:defRPr/>
+            </a:pPr>
+            <a:fld id="{3FF2C605-4958-CF43-AA48-80339EFDB0AF}" type="slidenum">
+              <a:rPr lang="en-US" smtClean="0"/>
+              <a:pPr>
+                <a:defRPr/>
+              </a:pPr>
+              <a:t>6</a:t>
+            </a:fld>
+            <a:endParaRPr lang="en-US"/>
+          </a:p>
+        </p:txBody>
+      </p:sp>
+    </p:spTree>
+    <p:extLst>
+      <p:ext uri="{BB962C8B-B14F-4D97-AF65-F5344CB8AC3E}">
+        <p14:creationId xmlns:p14="http://schemas.microsoft.com/office/powerpoint/2010/main" val="2579169111"/>
+      </p:ext>
+    </p:extLst>
+  </p:cSld>
+  <p:clrMapOvr>
+    <a:masterClrMapping/>
+  </p:clrMapOvr>
+</p:sld>
+</file>
+
+<file path=ppt/slides/slide7.xml><?xml version="1.0" encoding="utf-8"?>
+<p:sld xmlns:a="http://schemas.openxmlformats.org/drawingml/2006/main" xmlns:r="http://schemas.openxmlformats.org/officeDocument/2006/relationships" xmlns:p="http://schemas.openxmlformats.org/presentationml/2006/main">
+  <p:cSld>
+    <p:spTree>
+      <p:nvGrpSpPr>
+        <p:cNvPr id="1" name=""/>
+        <p:cNvGrpSpPr/>
+        <p:nvPr/>
+      </p:nvGrpSpPr>
+      <p:grpSpPr>
+        <a:xfrm>
+          <a:off x="0" y="0"/>
+          <a:ext cx="0" cy="0"/>
+          <a:chOff x="0" y="0"/>
+          <a:chExt cx="0" cy="0"/>
+        </a:xfrm>
+      </p:grpSpPr>
+      <p:sp>
+        <p:nvSpPr>
+          <p:cNvPr id="2" name="Title 1">
+            <a:extLst>
+              <a:ext uri="{FF2B5EF4-FFF2-40B4-BE49-F238E27FC236}">
+                <a16:creationId xmlns:a16="http://schemas.microsoft.com/office/drawing/2014/main" id="{D6B63320-2ECA-1E43-BDFF-1C32856B8FEE}"/>
+              </a:ext>
+            </a:extLst>
+          </p:cNvPr>
+          <p:cNvSpPr>
+            <a:spLocks noGrp="1"/>
+          </p:cNvSpPr>
+          <p:nvPr>
+            <p:ph type="title"/>
+          </p:nvPr>
+        </p:nvSpPr>
+        <p:spPr/>
+        <p:txBody>
+          <a:bodyPr/>
+          <a:lstStyle/>
+          <a:p>
+            <a:r>
+              <a:rPr lang="en-US" dirty="0"/>
+              <a:t>PWR Water Chemistry</a:t>
+            </a:r>
+          </a:p>
+        </p:txBody>
+      </p:sp>
+      <p:sp>
+        <p:nvSpPr>
+          <p:cNvPr id="3" name="Content Placeholder 2">
+            <a:extLst>
+              <a:ext uri="{FF2B5EF4-FFF2-40B4-BE49-F238E27FC236}">
+                <a16:creationId xmlns:a16="http://schemas.microsoft.com/office/drawing/2014/main" id="{4CC80E29-EDF9-0543-8546-62EDFAF23A66}"/>
+              </a:ext>
+            </a:extLst>
+          </p:cNvPr>
+          <p:cNvSpPr>
+            <a:spLocks noGrp="1"/>
+          </p:cNvSpPr>
+          <p:nvPr>
+            <p:ph idx="1"/>
+          </p:nvPr>
+        </p:nvSpPr>
+        <p:spPr>
+          <a:xfrm>
+            <a:off x="609600" y="2160495"/>
+            <a:ext cx="5486400" cy="3965670"/>
+          </a:xfrm>
+        </p:spPr>
+        <p:txBody>
+          <a:bodyPr/>
+          <a:lstStyle/>
+          <a:p>
+            <a:r>
+              <a:rPr lang="en-US" sz="2000" dirty="0"/>
+              <a:t>In the very early days of PWR operation, heavy crud buildup on fuel cladding surfaces was caused by the transport of corrosion products from the steam generators into the reactor core</a:t>
+            </a:r>
+          </a:p>
+          <a:p>
+            <a:r>
+              <a:rPr lang="en-US" sz="2000" dirty="0"/>
+              <a:t>Activated corrosion products caused high-radiation fields on out-of-core surfaces</a:t>
+            </a:r>
+          </a:p>
+          <a:p>
+            <a:r>
+              <a:rPr lang="en-US" sz="2000" dirty="0"/>
+              <a:t>Fuel performance was compromised, and even coolant flow issues were observed</a:t>
+            </a:r>
+          </a:p>
+          <a:p>
+            <a:endParaRPr lang="en-US" sz="2000" dirty="0"/>
+          </a:p>
+          <a:p>
+            <a:endParaRPr lang="en-US" sz="2000" dirty="0"/>
+          </a:p>
+          <a:p>
+            <a:endParaRPr lang="en-US" sz="2000" dirty="0"/>
+          </a:p>
+          <a:p>
+            <a:endParaRPr lang="en-US" sz="2000" dirty="0"/>
+          </a:p>
+        </p:txBody>
+      </p:sp>
+      <p:sp>
+        <p:nvSpPr>
+          <p:cNvPr id="4" name="Slide Number Placeholder 3">
+            <a:extLst>
+              <a:ext uri="{FF2B5EF4-FFF2-40B4-BE49-F238E27FC236}">
+                <a16:creationId xmlns:a16="http://schemas.microsoft.com/office/drawing/2014/main" id="{220672EE-E4FF-464D-87CA-23D31AAFB0E2}"/>
+              </a:ext>
+            </a:extLst>
+          </p:cNvPr>
+          <p:cNvSpPr>
+            <a:spLocks noGrp="1"/>
+          </p:cNvSpPr>
+          <p:nvPr>
+            <p:ph type="sldNum" sz="quarter" idx="12"/>
+          </p:nvPr>
+        </p:nvSpPr>
+        <p:spPr/>
+        <p:txBody>
+          <a:bodyPr/>
+          <a:lstStyle/>
+          <a:p>
+            <a:pPr>
+              <a:defRPr/>
+            </a:pPr>
+            <a:fld id="{3FF2C605-4958-CF43-AA48-80339EFDB0AF}" type="slidenum">
+              <a:rPr lang="en-US" smtClean="0"/>
+              <a:pPr>
+                <a:defRPr/>
+              </a:pPr>
+              <a:t>7</a:t>
             </a:fld>
             <a:endParaRPr lang="en-US"/>
           </a:p>
@@ -5322,7 +8351,7 @@
 </p:sld>
 </file>
 
-<file path=ppt/slides/slide18.xml><?xml version="1.0" encoding="utf-8"?>
+<file path=ppt/slides/slide8.xml><?xml version="1.0" encoding="utf-8"?>
 <p:sld xmlns:a="http://schemas.openxmlformats.org/drawingml/2006/main" xmlns:r="http://schemas.openxmlformats.org/officeDocument/2006/relationships" xmlns:p="http://schemas.openxmlformats.org/presentationml/2006/main">
   <p:cSld>
     <p:spTree>
@@ -5385,8 +8414,8 @@
         </p:nvSpPr>
         <p:spPr>
           <a:xfrm>
-            <a:off x="609600" y="1968501"/>
-            <a:ext cx="7895771" cy="4157664"/>
+            <a:off x="609601" y="1702676"/>
+            <a:ext cx="7693572" cy="4423489"/>
           </a:xfrm>
         </p:spPr>
         <p:txBody>
@@ -5401,25 +8430,19 @@
           <a:p>
             <a:r>
               <a:rPr lang="en-US" sz="2000" dirty="0"/>
-              <a:t>CRUD is an accumulation of materials and corrosion products that is composed of either dissolved ions or solid particles such as Ni, Fe, and Co on fuel rod cladding surfaces in NPPs</a:t>
+              <a:t>CRUD is an accumulation of materials and corrosion products that is composed of either dissolved ions or solid particles such as Ni, Fe, and Co on fuel rod cladding surfaces </a:t>
             </a:r>
           </a:p>
           <a:p>
             <a:r>
               <a:rPr lang="en-US" sz="2000" dirty="0"/>
-              <a:t>CRUD degrades heat production by nuclear fuel because it is slowly eroded by the circulation of the hot pressurized water and later deposited on the cladding or outer housing of fuel rods</a:t>
+              <a:t>CRUD degrades heat production by nuclear fuel because the constituents are slowly eroded by the circulation of the hot pressurized water and later deposited on the cladding</a:t>
             </a:r>
           </a:p>
           <a:p>
             <a:r>
               <a:rPr lang="en-US" sz="2000" dirty="0"/>
               <a:t>The chemical composition of CRUD varies depending on the types of refueling cycles and the constituents of the basic metal material</a:t>
-            </a:r>
-          </a:p>
-          <a:p>
-            <a:r>
-              <a:rPr lang="en-US" sz="2000" dirty="0"/>
-              <a:t>Irradiation can produce radionuclides in the CRUD, such as 60Co and 63Ni</a:t>
             </a:r>
           </a:p>
         </p:txBody>
@@ -5453,7 +8476,7 @@
               <a:pPr>
                 <a:defRPr/>
               </a:pPr>
-              <a:t>18</a:t>
+              <a:t>8</a:t>
             </a:fld>
             <a:endParaRPr lang="en-US" dirty="0"/>
           </a:p>
@@ -5519,2329 +8542,6 @@
 </p:sld>
 </file>
 
-<file path=ppt/slides/slide19.xml><?xml version="1.0" encoding="utf-8"?>
-<p:sld xmlns:a="http://schemas.openxmlformats.org/drawingml/2006/main" xmlns:r="http://schemas.openxmlformats.org/officeDocument/2006/relationships" xmlns:p="http://schemas.openxmlformats.org/presentationml/2006/main">
-  <p:cSld>
-    <p:spTree>
-      <p:nvGrpSpPr>
-        <p:cNvPr id="1" name=""/>
-        <p:cNvGrpSpPr/>
-        <p:nvPr/>
-      </p:nvGrpSpPr>
-      <p:grpSpPr>
-        <a:xfrm>
-          <a:off x="0" y="0"/>
-          <a:ext cx="0" cy="0"/>
-          <a:chOff x="0" y="0"/>
-          <a:chExt cx="0" cy="0"/>
-        </a:xfrm>
-      </p:grpSpPr>
-      <p:sp>
-        <p:nvSpPr>
-          <p:cNvPr id="2" name="Title 1">
-            <a:extLst>
-              <a:ext uri="{FF2B5EF4-FFF2-40B4-BE49-F238E27FC236}">
-                <a16:creationId xmlns:a16="http://schemas.microsoft.com/office/drawing/2014/main" id="{223748FC-36C3-5C4F-941A-D87FB9DED5C1}"/>
-              </a:ext>
-            </a:extLst>
-          </p:cNvPr>
-          <p:cNvSpPr>
-            <a:spLocks noGrp="1"/>
-          </p:cNvSpPr>
-          <p:nvPr>
-            <p:ph type="title"/>
-          </p:nvPr>
-        </p:nvSpPr>
-        <p:spPr/>
-        <p:txBody>
-          <a:bodyPr/>
-          <a:lstStyle/>
-          <a:p>
-            <a:r>
-              <a:rPr lang="en-US" dirty="0"/>
-              <a:t>PWR Water Chemistry</a:t>
-            </a:r>
-          </a:p>
-        </p:txBody>
-      </p:sp>
-      <p:sp>
-        <p:nvSpPr>
-          <p:cNvPr id="3" name="Content Placeholder 2">
-            <a:extLst>
-              <a:ext uri="{FF2B5EF4-FFF2-40B4-BE49-F238E27FC236}">
-                <a16:creationId xmlns:a16="http://schemas.microsoft.com/office/drawing/2014/main" id="{28D3FEC1-F7DC-0244-B126-8B006EC8A4BF}"/>
-              </a:ext>
-            </a:extLst>
-          </p:cNvPr>
-          <p:cNvSpPr>
-            <a:spLocks noGrp="1"/>
-          </p:cNvSpPr>
-          <p:nvPr>
-            <p:ph idx="1"/>
-          </p:nvPr>
-        </p:nvSpPr>
-        <p:spPr/>
-        <p:txBody>
-          <a:bodyPr/>
-          <a:lstStyle/>
-          <a:p>
-            <a:r>
-              <a:rPr lang="en-US" sz="2000" dirty="0"/>
-              <a:t>PWR problems were initially mitigated by imposing a hydrogen overpressure on the primary system, reducing the corrosion potential, and raising the primary chemistry pH</a:t>
-            </a:r>
-          </a:p>
-          <a:p>
-            <a:r>
-              <a:rPr lang="en-US" sz="2000" dirty="0"/>
-              <a:t>Commercial PWR power plants use a steadily decreasing concentration of boric acid as a chemical shim for reactivity control throughout the fuel cycle, which results in the use of lithium hydroxide to control pH</a:t>
-            </a:r>
-          </a:p>
-          <a:p>
-            <a:r>
-              <a:rPr lang="en-US" sz="2000" dirty="0"/>
-              <a:t>The concept of ‘coordinated boron and lithium’ was developed, whereby the concentration of </a:t>
-            </a:r>
-            <a:r>
-              <a:rPr lang="en-US" sz="2000" dirty="0" err="1"/>
-              <a:t>LiOH</a:t>
-            </a:r>
-            <a:r>
-              <a:rPr lang="en-US" sz="2000" dirty="0"/>
-              <a:t> was gradually reduced in line with the boric acid reduction to maintain a constant pH</a:t>
-            </a:r>
-          </a:p>
-          <a:p>
-            <a:r>
-              <a:rPr lang="en-US" sz="2000" dirty="0"/>
-              <a:t>It was determined that heavy fuel crud buildup was avoided if a constant pH of &gt; 6.9 was maintained, as the solubility of Ni and Fe is dependent on pH</a:t>
-            </a:r>
-          </a:p>
-          <a:p>
-            <a:r>
-              <a:rPr lang="en-US" sz="2000" dirty="0"/>
-              <a:t>Zinc injection is utilized to reduce radiation fields, and also inhibits SCC</a:t>
-            </a:r>
-          </a:p>
-          <a:p>
-            <a:endParaRPr lang="en-US" sz="2000" dirty="0"/>
-          </a:p>
-          <a:p>
-            <a:endParaRPr lang="en-US" sz="2000" dirty="0"/>
-          </a:p>
-        </p:txBody>
-      </p:sp>
-      <p:sp>
-        <p:nvSpPr>
-          <p:cNvPr id="4" name="Slide Number Placeholder 3">
-            <a:extLst>
-              <a:ext uri="{FF2B5EF4-FFF2-40B4-BE49-F238E27FC236}">
-                <a16:creationId xmlns:a16="http://schemas.microsoft.com/office/drawing/2014/main" id="{19113E70-3461-2748-91F6-6B737FEEDF89}"/>
-              </a:ext>
-            </a:extLst>
-          </p:cNvPr>
-          <p:cNvSpPr>
-            <a:spLocks noGrp="1"/>
-          </p:cNvSpPr>
-          <p:nvPr>
-            <p:ph type="sldNum" sz="quarter" idx="12"/>
-          </p:nvPr>
-        </p:nvSpPr>
-        <p:spPr/>
-        <p:txBody>
-          <a:bodyPr/>
-          <a:lstStyle/>
-          <a:p>
-            <a:pPr>
-              <a:defRPr/>
-            </a:pPr>
-            <a:fld id="{3FF2C605-4958-CF43-AA48-80339EFDB0AF}" type="slidenum">
-              <a:rPr lang="en-US" smtClean="0"/>
-              <a:pPr>
-                <a:defRPr/>
-              </a:pPr>
-              <a:t>19</a:t>
-            </a:fld>
-            <a:endParaRPr lang="en-US"/>
-          </a:p>
-        </p:txBody>
-      </p:sp>
-    </p:spTree>
-    <p:extLst>
-      <p:ext uri="{BB962C8B-B14F-4D97-AF65-F5344CB8AC3E}">
-        <p14:creationId xmlns:p14="http://schemas.microsoft.com/office/powerpoint/2010/main" val="3241420031"/>
-      </p:ext>
-    </p:extLst>
-  </p:cSld>
-  <p:clrMapOvr>
-    <a:masterClrMapping/>
-  </p:clrMapOvr>
-</p:sld>
-</file>
-
-<file path=ppt/slides/slide2.xml><?xml version="1.0" encoding="utf-8"?>
-<p:sld xmlns:a="http://schemas.openxmlformats.org/drawingml/2006/main" xmlns:r="http://schemas.openxmlformats.org/officeDocument/2006/relationships" xmlns:p="http://schemas.openxmlformats.org/presentationml/2006/main">
-  <p:cSld>
-    <p:spTree>
-      <p:nvGrpSpPr>
-        <p:cNvPr id="1" name=""/>
-        <p:cNvGrpSpPr/>
-        <p:nvPr/>
-      </p:nvGrpSpPr>
-      <p:grpSpPr>
-        <a:xfrm>
-          <a:off x="0" y="0"/>
-          <a:ext cx="0" cy="0"/>
-          <a:chOff x="0" y="0"/>
-          <a:chExt cx="0" cy="0"/>
-        </a:xfrm>
-      </p:grpSpPr>
-      <p:sp>
-        <p:nvSpPr>
-          <p:cNvPr id="2" name="Title 1">
-            <a:extLst>
-              <a:ext uri="{FF2B5EF4-FFF2-40B4-BE49-F238E27FC236}">
-                <a16:creationId xmlns:a16="http://schemas.microsoft.com/office/drawing/2014/main" id="{98D58655-7C4C-EA26-5D9F-DCBD2E336A4F}"/>
-              </a:ext>
-            </a:extLst>
-          </p:cNvPr>
-          <p:cNvSpPr>
-            <a:spLocks noGrp="1"/>
-          </p:cNvSpPr>
-          <p:nvPr>
-            <p:ph type="title"/>
-          </p:nvPr>
-        </p:nvSpPr>
-        <p:spPr/>
-        <p:txBody>
-          <a:bodyPr/>
-          <a:lstStyle/>
-          <a:p>
-            <a:r>
-              <a:rPr lang="en-US" dirty="0"/>
-              <a:t>Last Time</a:t>
-            </a:r>
-          </a:p>
-        </p:txBody>
-      </p:sp>
-      <p:sp>
-        <p:nvSpPr>
-          <p:cNvPr id="3" name="Content Placeholder 2">
-            <a:extLst>
-              <a:ext uri="{FF2B5EF4-FFF2-40B4-BE49-F238E27FC236}">
-                <a16:creationId xmlns:a16="http://schemas.microsoft.com/office/drawing/2014/main" id="{6EB4D738-92B5-4FF0-6ED4-0C0E774ACB5D}"/>
-              </a:ext>
-            </a:extLst>
-          </p:cNvPr>
-          <p:cNvSpPr>
-            <a:spLocks noGrp="1"/>
-          </p:cNvSpPr>
-          <p:nvPr>
-            <p:ph idx="1"/>
-          </p:nvPr>
-        </p:nvSpPr>
-        <p:spPr/>
-        <p:txBody>
-          <a:bodyPr/>
-          <a:lstStyle/>
-          <a:p>
-            <a:r>
-              <a:rPr lang="en-US" sz="2200" dirty="0"/>
-              <a:t>Finished RIA</a:t>
-            </a:r>
-          </a:p>
-          <a:p>
-            <a:r>
-              <a:rPr lang="en-US" sz="2200" dirty="0"/>
-              <a:t>LOCA</a:t>
-            </a:r>
-          </a:p>
-          <a:p>
-            <a:pPr lvl="1"/>
-            <a:r>
-              <a:rPr lang="en-US" sz="2200" dirty="0"/>
-              <a:t>high T, high corrosion rates, occurs over minutes</a:t>
-            </a:r>
-          </a:p>
-          <a:p>
-            <a:r>
-              <a:rPr lang="en-US" sz="2200" dirty="0"/>
-              <a:t>Burnup impacts failure probabilities, more oxidation, more </a:t>
-            </a:r>
-            <a:r>
-              <a:rPr lang="en-US" sz="2200" dirty="0" err="1"/>
-              <a:t>hydriding</a:t>
-            </a:r>
-            <a:r>
-              <a:rPr lang="en-US" sz="2200" dirty="0"/>
-              <a:t>, radiation hardening-&gt; reduced cladding ductility</a:t>
-            </a:r>
-          </a:p>
-          <a:p>
-            <a:r>
-              <a:rPr lang="en-US" sz="2200" dirty="0"/>
-              <a:t>ATF</a:t>
-            </a:r>
-          </a:p>
-          <a:p>
-            <a:pPr lvl="1"/>
-            <a:r>
-              <a:rPr lang="en-US" sz="2200" dirty="0"/>
-              <a:t>improved cladding properties, improved steam corrosion, improved fuel properties, improved fission product retention</a:t>
-            </a:r>
-          </a:p>
-          <a:p>
-            <a:pPr lvl="1"/>
-            <a:r>
-              <a:rPr lang="en-US" sz="2200" dirty="0"/>
-              <a:t>Near term improvements: coatings, fuel additives</a:t>
-            </a:r>
-          </a:p>
-          <a:p>
-            <a:pPr lvl="1"/>
-            <a:r>
-              <a:rPr lang="en-US" sz="2200" dirty="0"/>
-              <a:t>Novel fuel/cladding: U3Si2/UN fuels, </a:t>
-            </a:r>
-            <a:r>
-              <a:rPr lang="en-US" sz="2200" dirty="0" err="1"/>
-              <a:t>FeCrAl</a:t>
-            </a:r>
-            <a:r>
-              <a:rPr lang="en-US" sz="2200" dirty="0"/>
-              <a:t> cladding</a:t>
-            </a:r>
-          </a:p>
-          <a:p>
-            <a:pPr lvl="1"/>
-            <a:r>
-              <a:rPr lang="en-US" sz="2200" dirty="0"/>
-              <a:t>Transformative fuel/cladding: FCM, </a:t>
-            </a:r>
-            <a:r>
-              <a:rPr lang="en-US" sz="2200" dirty="0" err="1"/>
-              <a:t>SiC</a:t>
-            </a:r>
-            <a:r>
-              <a:rPr lang="en-US" sz="2200" dirty="0"/>
-              <a:t>/</a:t>
-            </a:r>
-            <a:r>
-              <a:rPr lang="en-US" sz="2200" dirty="0" err="1"/>
-              <a:t>SiC</a:t>
-            </a:r>
-            <a:r>
-              <a:rPr lang="en-US" sz="2200" dirty="0"/>
-              <a:t>, etc.</a:t>
-            </a:r>
-          </a:p>
-          <a:p>
-            <a:r>
-              <a:rPr lang="en-US" sz="2200" dirty="0"/>
-              <a:t>Accident safety limits: started on steam oxidation</a:t>
-            </a:r>
-          </a:p>
-        </p:txBody>
-      </p:sp>
-      <p:sp>
-        <p:nvSpPr>
-          <p:cNvPr id="4" name="Slide Number Placeholder 3">
-            <a:extLst>
-              <a:ext uri="{FF2B5EF4-FFF2-40B4-BE49-F238E27FC236}">
-                <a16:creationId xmlns:a16="http://schemas.microsoft.com/office/drawing/2014/main" id="{4934AA36-BFA5-D05C-3A17-FEEF310E3CF2}"/>
-              </a:ext>
-            </a:extLst>
-          </p:cNvPr>
-          <p:cNvSpPr>
-            <a:spLocks noGrp="1"/>
-          </p:cNvSpPr>
-          <p:nvPr>
-            <p:ph type="sldNum" sz="quarter" idx="12"/>
-          </p:nvPr>
-        </p:nvSpPr>
-        <p:spPr/>
-        <p:txBody>
-          <a:bodyPr/>
-          <a:lstStyle/>
-          <a:p>
-            <a:pPr>
-              <a:defRPr/>
-            </a:pPr>
-            <a:fld id="{3FF2C605-4958-CF43-AA48-80339EFDB0AF}" type="slidenum">
-              <a:rPr lang="en-US" smtClean="0"/>
-              <a:pPr>
-                <a:defRPr/>
-              </a:pPr>
-              <a:t>2</a:t>
-            </a:fld>
-            <a:endParaRPr lang="en-US"/>
-          </a:p>
-        </p:txBody>
-      </p:sp>
-    </p:spTree>
-    <p:extLst>
-      <p:ext uri="{BB962C8B-B14F-4D97-AF65-F5344CB8AC3E}">
-        <p14:creationId xmlns:p14="http://schemas.microsoft.com/office/powerpoint/2010/main" val="1645684244"/>
-      </p:ext>
-    </p:extLst>
-  </p:cSld>
-  <p:clrMapOvr>
-    <a:masterClrMapping/>
-  </p:clrMapOvr>
-</p:sld>
-</file>
-
-<file path=ppt/slides/slide20.xml><?xml version="1.0" encoding="utf-8"?>
-<p:sld xmlns:a="http://schemas.openxmlformats.org/drawingml/2006/main" xmlns:r="http://schemas.openxmlformats.org/officeDocument/2006/relationships" xmlns:p="http://schemas.openxmlformats.org/presentationml/2006/main">
-  <p:cSld>
-    <p:spTree>
-      <p:nvGrpSpPr>
-        <p:cNvPr id="1" name=""/>
-        <p:cNvGrpSpPr/>
-        <p:nvPr/>
-      </p:nvGrpSpPr>
-      <p:grpSpPr>
-        <a:xfrm>
-          <a:off x="0" y="0"/>
-          <a:ext cx="0" cy="0"/>
-          <a:chOff x="0" y="0"/>
-          <a:chExt cx="0" cy="0"/>
-        </a:xfrm>
-      </p:grpSpPr>
-      <p:sp>
-        <p:nvSpPr>
-          <p:cNvPr id="2" name="Title 1">
-            <a:extLst>
-              <a:ext uri="{FF2B5EF4-FFF2-40B4-BE49-F238E27FC236}">
-                <a16:creationId xmlns:a16="http://schemas.microsoft.com/office/drawing/2014/main" id="{CBDD9220-1256-004D-A46A-860F4CCF4AD8}"/>
-              </a:ext>
-            </a:extLst>
-          </p:cNvPr>
-          <p:cNvSpPr>
-            <a:spLocks noGrp="1"/>
-          </p:cNvSpPr>
-          <p:nvPr>
-            <p:ph type="title"/>
-          </p:nvPr>
-        </p:nvSpPr>
-        <p:spPr/>
-        <p:txBody>
-          <a:bodyPr/>
-          <a:lstStyle/>
-          <a:p>
-            <a:r>
-              <a:rPr lang="en-US" dirty="0"/>
-              <a:t>Radiation Control</a:t>
-            </a:r>
-          </a:p>
-        </p:txBody>
-      </p:sp>
-      <p:sp>
-        <p:nvSpPr>
-          <p:cNvPr id="3" name="Content Placeholder 2">
-            <a:extLst>
-              <a:ext uri="{FF2B5EF4-FFF2-40B4-BE49-F238E27FC236}">
-                <a16:creationId xmlns:a16="http://schemas.microsoft.com/office/drawing/2014/main" id="{E92720F9-E029-CA4F-905B-409E6DEB0733}"/>
-              </a:ext>
-            </a:extLst>
-          </p:cNvPr>
-          <p:cNvSpPr>
-            <a:spLocks noGrp="1"/>
-          </p:cNvSpPr>
-          <p:nvPr>
-            <p:ph idx="1"/>
-          </p:nvPr>
-        </p:nvSpPr>
-        <p:spPr/>
-        <p:txBody>
-          <a:bodyPr/>
-          <a:lstStyle/>
-          <a:p>
-            <a:r>
-              <a:rPr lang="en-US" sz="2000" dirty="0"/>
-              <a:t>Corrosion products deposited on the fuel become activated, are released back into the coolant, and may be deposited on out-of-core surfaces</a:t>
-            </a:r>
-          </a:p>
-          <a:p>
-            <a:r>
-              <a:rPr lang="en-US" sz="2000" dirty="0"/>
-              <a:t>During shutdowns, the major radiation source for personnel exposure is activated corrosion products, deposited on primary system surfaces</a:t>
-            </a:r>
-          </a:p>
-          <a:p>
-            <a:r>
-              <a:rPr lang="en-US" sz="2000" dirty="0"/>
-              <a:t>The mechanism of the zinc ion effect is complex, as release of </a:t>
-            </a:r>
-            <a:r>
-              <a:rPr lang="en-US" sz="2000" baseline="30000" dirty="0"/>
-              <a:t>60</a:t>
-            </a:r>
-            <a:r>
-              <a:rPr lang="en-US" sz="2000" dirty="0"/>
-              <a:t>Co from fuel crud is reduced, and deposition out-core is also reduced</a:t>
-            </a:r>
-          </a:p>
-          <a:p>
-            <a:r>
-              <a:rPr lang="en-US" sz="2000" dirty="0"/>
-              <a:t>Aqueous zinc ion promotes the formation of a more protective spinel-structured corrosion film on stainless steel, especially when reducing conditions are present</a:t>
-            </a:r>
-          </a:p>
-          <a:p>
-            <a:r>
-              <a:rPr lang="en-US" sz="2000" dirty="0"/>
-              <a:t>Both cobalt and zinc favor tetrahedral sites in the spinel structure, but the site preference energy favors zinc incorporation</a:t>
-            </a:r>
-          </a:p>
-          <a:p>
-            <a:r>
-              <a:rPr lang="en-US" sz="2000" dirty="0"/>
-              <a:t>The </a:t>
-            </a:r>
-            <a:r>
-              <a:rPr lang="en-US" sz="2000" baseline="30000" dirty="0"/>
-              <a:t>60</a:t>
-            </a:r>
-            <a:r>
-              <a:rPr lang="en-US" sz="2000" dirty="0"/>
-              <a:t>Co remains longer in the water and is eventually removed by the cleanup system</a:t>
-            </a:r>
-          </a:p>
-          <a:p>
-            <a:endParaRPr lang="en-US" sz="2000" dirty="0"/>
-          </a:p>
-        </p:txBody>
-      </p:sp>
-      <p:sp>
-        <p:nvSpPr>
-          <p:cNvPr id="4" name="Slide Number Placeholder 3">
-            <a:extLst>
-              <a:ext uri="{FF2B5EF4-FFF2-40B4-BE49-F238E27FC236}">
-                <a16:creationId xmlns:a16="http://schemas.microsoft.com/office/drawing/2014/main" id="{B161F9CF-48AB-2543-8AD6-EE3D9FF6F362}"/>
-              </a:ext>
-            </a:extLst>
-          </p:cNvPr>
-          <p:cNvSpPr>
-            <a:spLocks noGrp="1"/>
-          </p:cNvSpPr>
-          <p:nvPr>
-            <p:ph type="sldNum" sz="quarter" idx="12"/>
-          </p:nvPr>
-        </p:nvSpPr>
-        <p:spPr/>
-        <p:txBody>
-          <a:bodyPr/>
-          <a:lstStyle/>
-          <a:p>
-            <a:pPr>
-              <a:defRPr/>
-            </a:pPr>
-            <a:fld id="{3FF2C605-4958-CF43-AA48-80339EFDB0AF}" type="slidenum">
-              <a:rPr lang="en-US" smtClean="0"/>
-              <a:pPr>
-                <a:defRPr/>
-              </a:pPr>
-              <a:t>20</a:t>
-            </a:fld>
-            <a:endParaRPr lang="en-US"/>
-          </a:p>
-        </p:txBody>
-      </p:sp>
-    </p:spTree>
-    <p:extLst>
-      <p:ext uri="{BB962C8B-B14F-4D97-AF65-F5344CB8AC3E}">
-        <p14:creationId xmlns:p14="http://schemas.microsoft.com/office/powerpoint/2010/main" val="3509847149"/>
-      </p:ext>
-    </p:extLst>
-  </p:cSld>
-  <p:clrMapOvr>
-    <a:masterClrMapping/>
-  </p:clrMapOvr>
-</p:sld>
-</file>
-
-<file path=ppt/slides/slide21.xml><?xml version="1.0" encoding="utf-8"?>
-<p:sld xmlns:a="http://schemas.openxmlformats.org/drawingml/2006/main" xmlns:r="http://schemas.openxmlformats.org/officeDocument/2006/relationships" xmlns:p="http://schemas.openxmlformats.org/presentationml/2006/main">
-  <p:cSld>
-    <p:spTree>
-      <p:nvGrpSpPr>
-        <p:cNvPr id="1" name=""/>
-        <p:cNvGrpSpPr/>
-        <p:nvPr/>
-      </p:nvGrpSpPr>
-      <p:grpSpPr>
-        <a:xfrm>
-          <a:off x="0" y="0"/>
-          <a:ext cx="0" cy="0"/>
-          <a:chOff x="0" y="0"/>
-          <a:chExt cx="0" cy="0"/>
-        </a:xfrm>
-      </p:grpSpPr>
-      <p:sp>
-        <p:nvSpPr>
-          <p:cNvPr id="2" name="Title 1">
-            <a:extLst>
-              <a:ext uri="{FF2B5EF4-FFF2-40B4-BE49-F238E27FC236}">
-                <a16:creationId xmlns:a16="http://schemas.microsoft.com/office/drawing/2014/main" id="{1F3C3F2F-49AA-C446-870B-C96ED33952B4}"/>
-              </a:ext>
-            </a:extLst>
-          </p:cNvPr>
-          <p:cNvSpPr>
-            <a:spLocks noGrp="1"/>
-          </p:cNvSpPr>
-          <p:nvPr>
-            <p:ph type="title"/>
-          </p:nvPr>
-        </p:nvSpPr>
-        <p:spPr/>
-        <p:txBody>
-          <a:bodyPr/>
-          <a:lstStyle/>
-          <a:p>
-            <a:r>
-              <a:rPr lang="en-US" dirty="0"/>
-              <a:t>PWR Water Chemistry</a:t>
-            </a:r>
-          </a:p>
-        </p:txBody>
-      </p:sp>
-      <p:sp>
-        <p:nvSpPr>
-          <p:cNvPr id="4" name="Slide Number Placeholder 3">
-            <a:extLst>
-              <a:ext uri="{FF2B5EF4-FFF2-40B4-BE49-F238E27FC236}">
-                <a16:creationId xmlns:a16="http://schemas.microsoft.com/office/drawing/2014/main" id="{A46367C6-E053-0442-B281-D57772FF1362}"/>
-              </a:ext>
-            </a:extLst>
-          </p:cNvPr>
-          <p:cNvSpPr>
-            <a:spLocks noGrp="1"/>
-          </p:cNvSpPr>
-          <p:nvPr>
-            <p:ph type="sldNum" sz="quarter" idx="12"/>
-          </p:nvPr>
-        </p:nvSpPr>
-        <p:spPr/>
-        <p:txBody>
-          <a:bodyPr/>
-          <a:lstStyle/>
-          <a:p>
-            <a:pPr>
-              <a:defRPr/>
-            </a:pPr>
-            <a:fld id="{3FF2C605-4958-CF43-AA48-80339EFDB0AF}" type="slidenum">
-              <a:rPr lang="en-US" smtClean="0"/>
-              <a:pPr>
-                <a:defRPr/>
-              </a:pPr>
-              <a:t>21</a:t>
-            </a:fld>
-            <a:endParaRPr lang="en-US"/>
-          </a:p>
-        </p:txBody>
-      </p:sp>
-      <p:pic>
-        <p:nvPicPr>
-          <p:cNvPr id="5" name="Picture 4">
-            <a:extLst>
-              <a:ext uri="{FF2B5EF4-FFF2-40B4-BE49-F238E27FC236}">
-                <a16:creationId xmlns:a16="http://schemas.microsoft.com/office/drawing/2014/main" id="{F2E66B19-9605-A24C-A925-111391E636CA}"/>
-              </a:ext>
-            </a:extLst>
-          </p:cNvPr>
-          <p:cNvPicPr>
-            <a:picLocks noChangeAspect="1"/>
-          </p:cNvPicPr>
-          <p:nvPr/>
-        </p:nvPicPr>
-        <p:blipFill>
-          <a:blip r:embed="rId2"/>
-          <a:stretch>
-            <a:fillRect/>
-          </a:stretch>
-        </p:blipFill>
-        <p:spPr>
-          <a:xfrm>
-            <a:off x="4940489" y="2198687"/>
-            <a:ext cx="7057409" cy="4220140"/>
-          </a:xfrm>
-          <a:prstGeom prst="rect">
-            <a:avLst/>
-          </a:prstGeom>
-        </p:spPr>
-      </p:pic>
-      <p:pic>
-        <p:nvPicPr>
-          <p:cNvPr id="6" name="Picture 5">
-            <a:extLst>
-              <a:ext uri="{FF2B5EF4-FFF2-40B4-BE49-F238E27FC236}">
-                <a16:creationId xmlns:a16="http://schemas.microsoft.com/office/drawing/2014/main" id="{0C721905-C656-AE49-800D-0371F73CE6DD}"/>
-              </a:ext>
-            </a:extLst>
-          </p:cNvPr>
-          <p:cNvPicPr>
-            <a:picLocks noChangeAspect="1"/>
-          </p:cNvPicPr>
-          <p:nvPr/>
-        </p:nvPicPr>
-        <p:blipFill>
-          <a:blip r:embed="rId3"/>
-          <a:stretch>
-            <a:fillRect/>
-          </a:stretch>
-        </p:blipFill>
-        <p:spPr>
-          <a:xfrm>
-            <a:off x="382801" y="2579686"/>
-            <a:ext cx="4711700" cy="3378200"/>
-          </a:xfrm>
-          <a:prstGeom prst="rect">
-            <a:avLst/>
-          </a:prstGeom>
-        </p:spPr>
-      </p:pic>
-    </p:spTree>
-    <p:extLst>
-      <p:ext uri="{BB962C8B-B14F-4D97-AF65-F5344CB8AC3E}">
-        <p14:creationId xmlns:p14="http://schemas.microsoft.com/office/powerpoint/2010/main" val="3092764370"/>
-      </p:ext>
-    </p:extLst>
-  </p:cSld>
-  <p:clrMapOvr>
-    <a:masterClrMapping/>
-  </p:clrMapOvr>
-</p:sld>
-</file>
-
-<file path=ppt/slides/slide22.xml><?xml version="1.0" encoding="utf-8"?>
-<p:sld xmlns:a="http://schemas.openxmlformats.org/drawingml/2006/main" xmlns:r="http://schemas.openxmlformats.org/officeDocument/2006/relationships" xmlns:p="http://schemas.openxmlformats.org/presentationml/2006/main">
-  <p:cSld>
-    <p:spTree>
-      <p:nvGrpSpPr>
-        <p:cNvPr id="1" name=""/>
-        <p:cNvGrpSpPr/>
-        <p:nvPr/>
-      </p:nvGrpSpPr>
-      <p:grpSpPr>
-        <a:xfrm>
-          <a:off x="0" y="0"/>
-          <a:ext cx="0" cy="0"/>
-          <a:chOff x="0" y="0"/>
-          <a:chExt cx="0" cy="0"/>
-        </a:xfrm>
-      </p:grpSpPr>
-      <p:sp>
-        <p:nvSpPr>
-          <p:cNvPr id="2" name="Title 1">
-            <a:extLst>
-              <a:ext uri="{FF2B5EF4-FFF2-40B4-BE49-F238E27FC236}">
-                <a16:creationId xmlns:a16="http://schemas.microsoft.com/office/drawing/2014/main" id="{EB85FC24-2EBA-A09B-C24A-74219BD03C53}"/>
-              </a:ext>
-            </a:extLst>
-          </p:cNvPr>
-          <p:cNvSpPr>
-            <a:spLocks noGrp="1"/>
-          </p:cNvSpPr>
-          <p:nvPr>
-            <p:ph type="title"/>
-          </p:nvPr>
-        </p:nvSpPr>
-        <p:spPr/>
-        <p:txBody>
-          <a:bodyPr/>
-          <a:lstStyle/>
-          <a:p>
-            <a:r>
-              <a:rPr lang="en-US" dirty="0"/>
-              <a:t>BWR Water Chemistry</a:t>
-            </a:r>
-          </a:p>
-        </p:txBody>
-      </p:sp>
-      <p:sp>
-        <p:nvSpPr>
-          <p:cNvPr id="3" name="Content Placeholder 2">
-            <a:extLst>
-              <a:ext uri="{FF2B5EF4-FFF2-40B4-BE49-F238E27FC236}">
-                <a16:creationId xmlns:a16="http://schemas.microsoft.com/office/drawing/2014/main" id="{8FE8D090-DEFE-6C39-DF07-955626F08728}"/>
-              </a:ext>
-            </a:extLst>
-          </p:cNvPr>
-          <p:cNvSpPr>
-            <a:spLocks noGrp="1"/>
-          </p:cNvSpPr>
-          <p:nvPr>
-            <p:ph idx="1"/>
-          </p:nvPr>
-        </p:nvSpPr>
-        <p:spPr>
-          <a:xfrm>
-            <a:off x="609600" y="2160495"/>
-            <a:ext cx="5486400" cy="3965670"/>
-          </a:xfrm>
-        </p:spPr>
-        <p:txBody>
-          <a:bodyPr/>
-          <a:lstStyle/>
-          <a:p>
-            <a:r>
-              <a:rPr lang="en-US" dirty="0"/>
-              <a:t>Similarly, BWR water chemistry has to be optimized to meet requirements on material degradation, fuel performance, and control of radiation fields</a:t>
-            </a:r>
-          </a:p>
-          <a:p>
-            <a:r>
-              <a:rPr lang="en-US" dirty="0"/>
-              <a:t>BWR chemistry strategies have changed over time, focusing on purity, limiting SCC, and control of radiation fields</a:t>
-            </a:r>
-          </a:p>
-        </p:txBody>
-      </p:sp>
-      <p:sp>
-        <p:nvSpPr>
-          <p:cNvPr id="4" name="Slide Number Placeholder 3">
-            <a:extLst>
-              <a:ext uri="{FF2B5EF4-FFF2-40B4-BE49-F238E27FC236}">
-                <a16:creationId xmlns:a16="http://schemas.microsoft.com/office/drawing/2014/main" id="{F17178F3-F12D-C831-FCB6-59A1A0A534D5}"/>
-              </a:ext>
-            </a:extLst>
-          </p:cNvPr>
-          <p:cNvSpPr>
-            <a:spLocks noGrp="1"/>
-          </p:cNvSpPr>
-          <p:nvPr>
-            <p:ph type="sldNum" sz="quarter" idx="12"/>
-          </p:nvPr>
-        </p:nvSpPr>
-        <p:spPr/>
-        <p:txBody>
-          <a:bodyPr/>
-          <a:lstStyle/>
-          <a:p>
-            <a:pPr>
-              <a:defRPr/>
-            </a:pPr>
-            <a:fld id="{3FF2C605-4958-CF43-AA48-80339EFDB0AF}" type="slidenum">
-              <a:rPr lang="en-US" smtClean="0"/>
-              <a:pPr>
-                <a:defRPr/>
-              </a:pPr>
-              <a:t>22</a:t>
-            </a:fld>
-            <a:endParaRPr lang="en-US"/>
-          </a:p>
-        </p:txBody>
-      </p:sp>
-      <p:pic>
-        <p:nvPicPr>
-          <p:cNvPr id="5" name="Picture 4">
-            <a:extLst>
-              <a:ext uri="{FF2B5EF4-FFF2-40B4-BE49-F238E27FC236}">
-                <a16:creationId xmlns:a16="http://schemas.microsoft.com/office/drawing/2014/main" id="{2D592F25-5B3B-84CF-4F64-47206818B7DF}"/>
-              </a:ext>
-            </a:extLst>
-          </p:cNvPr>
-          <p:cNvPicPr>
-            <a:picLocks noChangeAspect="1"/>
-          </p:cNvPicPr>
-          <p:nvPr/>
-        </p:nvPicPr>
-        <p:blipFill>
-          <a:blip r:embed="rId2"/>
-          <a:stretch>
-            <a:fillRect/>
-          </a:stretch>
-        </p:blipFill>
-        <p:spPr>
-          <a:xfrm>
-            <a:off x="5889876" y="1460641"/>
-            <a:ext cx="6196521" cy="2799052"/>
-          </a:xfrm>
-          <a:prstGeom prst="rect">
-            <a:avLst/>
-          </a:prstGeom>
-        </p:spPr>
-      </p:pic>
-      <p:pic>
-        <p:nvPicPr>
-          <p:cNvPr id="6" name="Picture 5">
-            <a:extLst>
-              <a:ext uri="{FF2B5EF4-FFF2-40B4-BE49-F238E27FC236}">
-                <a16:creationId xmlns:a16="http://schemas.microsoft.com/office/drawing/2014/main" id="{009DD2BD-A69A-E017-DC13-7B27DC080E54}"/>
-              </a:ext>
-            </a:extLst>
-          </p:cNvPr>
-          <p:cNvPicPr>
-            <a:picLocks noChangeAspect="1"/>
-          </p:cNvPicPr>
-          <p:nvPr/>
-        </p:nvPicPr>
-        <p:blipFill>
-          <a:blip r:embed="rId3"/>
-          <a:stretch>
-            <a:fillRect/>
-          </a:stretch>
-        </p:blipFill>
-        <p:spPr>
-          <a:xfrm>
-            <a:off x="7373257" y="4385975"/>
-            <a:ext cx="3417207" cy="2335501"/>
-          </a:xfrm>
-          <a:prstGeom prst="rect">
-            <a:avLst/>
-          </a:prstGeom>
-        </p:spPr>
-      </p:pic>
-    </p:spTree>
-    <p:extLst>
-      <p:ext uri="{BB962C8B-B14F-4D97-AF65-F5344CB8AC3E}">
-        <p14:creationId xmlns:p14="http://schemas.microsoft.com/office/powerpoint/2010/main" val="2103440818"/>
-      </p:ext>
-    </p:extLst>
-  </p:cSld>
-  <p:clrMapOvr>
-    <a:masterClrMapping/>
-  </p:clrMapOvr>
-</p:sld>
-</file>
-
-<file path=ppt/slides/slide23.xml><?xml version="1.0" encoding="utf-8"?>
-<p:sld xmlns:a="http://schemas.openxmlformats.org/drawingml/2006/main" xmlns:r="http://schemas.openxmlformats.org/officeDocument/2006/relationships" xmlns:p="http://schemas.openxmlformats.org/presentationml/2006/main">
-  <p:cSld>
-    <p:spTree>
-      <p:nvGrpSpPr>
-        <p:cNvPr id="1" name=""/>
-        <p:cNvGrpSpPr/>
-        <p:nvPr/>
-      </p:nvGrpSpPr>
-      <p:grpSpPr>
-        <a:xfrm>
-          <a:off x="0" y="0"/>
-          <a:ext cx="0" cy="0"/>
-          <a:chOff x="0" y="0"/>
-          <a:chExt cx="0" cy="0"/>
-        </a:xfrm>
-      </p:grpSpPr>
-      <p:sp>
-        <p:nvSpPr>
-          <p:cNvPr id="2" name="Title 1">
-            <a:extLst>
-              <a:ext uri="{FF2B5EF4-FFF2-40B4-BE49-F238E27FC236}">
-                <a16:creationId xmlns:a16="http://schemas.microsoft.com/office/drawing/2014/main" id="{74BDDA82-5869-7FBE-87D9-EAD25B16D2D8}"/>
-              </a:ext>
-            </a:extLst>
-          </p:cNvPr>
-          <p:cNvSpPr>
-            <a:spLocks noGrp="1"/>
-          </p:cNvSpPr>
-          <p:nvPr>
-            <p:ph type="title"/>
-          </p:nvPr>
-        </p:nvSpPr>
-        <p:spPr/>
-        <p:txBody>
-          <a:bodyPr/>
-          <a:lstStyle/>
-          <a:p>
-            <a:r>
-              <a:rPr lang="en-US" dirty="0"/>
-              <a:t>IGSCC Mitigation</a:t>
-            </a:r>
-          </a:p>
-        </p:txBody>
-      </p:sp>
-      <p:sp>
-        <p:nvSpPr>
-          <p:cNvPr id="3" name="Content Placeholder 2">
-            <a:extLst>
-              <a:ext uri="{FF2B5EF4-FFF2-40B4-BE49-F238E27FC236}">
-                <a16:creationId xmlns:a16="http://schemas.microsoft.com/office/drawing/2014/main" id="{F21C536B-EEF7-C80A-B3F4-F689DDBB32F3}"/>
-              </a:ext>
-            </a:extLst>
-          </p:cNvPr>
-          <p:cNvSpPr>
-            <a:spLocks noGrp="1"/>
-          </p:cNvSpPr>
-          <p:nvPr>
-            <p:ph idx="1"/>
-          </p:nvPr>
-        </p:nvSpPr>
-        <p:spPr/>
-        <p:txBody>
-          <a:bodyPr/>
-          <a:lstStyle/>
-          <a:p>
-            <a:r>
-              <a:rPr lang="en-US" dirty="0"/>
-              <a:t>Intergranular SCC (IGSCC) of 304 stainless steel core internals (and other materials) is one of the key chemistry control issues in BWRs</a:t>
-            </a:r>
-          </a:p>
-          <a:p>
-            <a:r>
-              <a:rPr lang="en-US" dirty="0"/>
-              <a:t>The control of the electrochemical potential (Redox potential) by hydrogen injection was effective at reducing IGSCC</a:t>
-            </a:r>
-          </a:p>
-          <a:p>
-            <a:r>
-              <a:rPr lang="en-US" dirty="0"/>
-              <a:t>Move from normal water chemistry (NWC) to hydrogen water chemistry (HWC) limits crack growth</a:t>
-            </a:r>
-          </a:p>
-          <a:p>
-            <a:r>
-              <a:rPr lang="en-US" dirty="0"/>
-              <a:t>Added noble metals (such as Pt) as coating on surfaces, or injection into water to increase efficiency of HWC</a:t>
-            </a:r>
-          </a:p>
-          <a:p>
-            <a:endParaRPr lang="en-US" dirty="0"/>
-          </a:p>
-        </p:txBody>
-      </p:sp>
-      <p:sp>
-        <p:nvSpPr>
-          <p:cNvPr id="4" name="Slide Number Placeholder 3">
-            <a:extLst>
-              <a:ext uri="{FF2B5EF4-FFF2-40B4-BE49-F238E27FC236}">
-                <a16:creationId xmlns:a16="http://schemas.microsoft.com/office/drawing/2014/main" id="{A1FB336E-AFB3-8CFE-6666-317CC409A1A6}"/>
-              </a:ext>
-            </a:extLst>
-          </p:cNvPr>
-          <p:cNvSpPr>
-            <a:spLocks noGrp="1"/>
-          </p:cNvSpPr>
-          <p:nvPr>
-            <p:ph type="sldNum" sz="quarter" idx="12"/>
-          </p:nvPr>
-        </p:nvSpPr>
-        <p:spPr/>
-        <p:txBody>
-          <a:bodyPr/>
-          <a:lstStyle/>
-          <a:p>
-            <a:pPr>
-              <a:defRPr/>
-            </a:pPr>
-            <a:fld id="{3FF2C605-4958-CF43-AA48-80339EFDB0AF}" type="slidenum">
-              <a:rPr lang="en-US" smtClean="0"/>
-              <a:pPr>
-                <a:defRPr/>
-              </a:pPr>
-              <a:t>23</a:t>
-            </a:fld>
-            <a:endParaRPr lang="en-US"/>
-          </a:p>
-        </p:txBody>
-      </p:sp>
-    </p:spTree>
-    <p:extLst>
-      <p:ext uri="{BB962C8B-B14F-4D97-AF65-F5344CB8AC3E}">
-        <p14:creationId xmlns:p14="http://schemas.microsoft.com/office/powerpoint/2010/main" val="1582631921"/>
-      </p:ext>
-    </p:extLst>
-  </p:cSld>
-  <p:clrMapOvr>
-    <a:masterClrMapping/>
-  </p:clrMapOvr>
-</p:sld>
-</file>
-
-<file path=ppt/slides/slide24.xml><?xml version="1.0" encoding="utf-8"?>
-<p:sld xmlns:a="http://schemas.openxmlformats.org/drawingml/2006/main" xmlns:r="http://schemas.openxmlformats.org/officeDocument/2006/relationships" xmlns:p="http://schemas.openxmlformats.org/presentationml/2006/main">
-  <p:cSld>
-    <p:spTree>
-      <p:nvGrpSpPr>
-        <p:cNvPr id="1" name=""/>
-        <p:cNvGrpSpPr/>
-        <p:nvPr/>
-      </p:nvGrpSpPr>
-      <p:grpSpPr>
-        <a:xfrm>
-          <a:off x="0" y="0"/>
-          <a:ext cx="0" cy="0"/>
-          <a:chOff x="0" y="0"/>
-          <a:chExt cx="0" cy="0"/>
-        </a:xfrm>
-      </p:grpSpPr>
-      <p:sp>
-        <p:nvSpPr>
-          <p:cNvPr id="2" name="Title 1">
-            <a:extLst>
-              <a:ext uri="{FF2B5EF4-FFF2-40B4-BE49-F238E27FC236}">
-                <a16:creationId xmlns:a16="http://schemas.microsoft.com/office/drawing/2014/main" id="{8067AE1E-3F09-3329-B656-855C48A08C64}"/>
-              </a:ext>
-            </a:extLst>
-          </p:cNvPr>
-          <p:cNvSpPr>
-            <a:spLocks noGrp="1"/>
-          </p:cNvSpPr>
-          <p:nvPr>
-            <p:ph type="title"/>
-          </p:nvPr>
-        </p:nvSpPr>
-        <p:spPr/>
-        <p:txBody>
-          <a:bodyPr/>
-          <a:lstStyle/>
-          <a:p>
-            <a:r>
-              <a:rPr lang="en-US" dirty="0"/>
-              <a:t>IGSCC Mitigation</a:t>
-            </a:r>
-          </a:p>
-        </p:txBody>
-      </p:sp>
-      <p:sp>
-        <p:nvSpPr>
-          <p:cNvPr id="3" name="Content Placeholder 2">
-            <a:extLst>
-              <a:ext uri="{FF2B5EF4-FFF2-40B4-BE49-F238E27FC236}">
-                <a16:creationId xmlns:a16="http://schemas.microsoft.com/office/drawing/2014/main" id="{5CCF6747-E57A-1ACD-5808-FA6030AFC528}"/>
-              </a:ext>
-            </a:extLst>
-          </p:cNvPr>
-          <p:cNvSpPr>
-            <a:spLocks noGrp="1"/>
-          </p:cNvSpPr>
-          <p:nvPr>
-            <p:ph idx="1"/>
-          </p:nvPr>
-        </p:nvSpPr>
-        <p:spPr/>
-        <p:txBody>
-          <a:bodyPr/>
-          <a:lstStyle/>
-          <a:p>
-            <a:r>
-              <a:rPr lang="en-US" dirty="0"/>
-              <a:t>Noble metal addition had previously only been conducted during outages, but changed to online addition to prevent ‘crack flanking’</a:t>
-            </a:r>
-          </a:p>
-          <a:p>
-            <a:r>
-              <a:rPr lang="en-US" dirty="0"/>
-              <a:t>Areas in the core are protected by different mitigation strategies, based on temperatures and two-phase flow</a:t>
-            </a:r>
-          </a:p>
-          <a:p>
-            <a:endParaRPr lang="en-US" dirty="0"/>
-          </a:p>
-          <a:p>
-            <a:r>
-              <a:rPr lang="en-US" dirty="0"/>
-              <a:t>Radiation control: Zn injection also used in BWRs</a:t>
-            </a:r>
-          </a:p>
-          <a:p>
-            <a:endParaRPr lang="en-US" dirty="0"/>
-          </a:p>
-        </p:txBody>
-      </p:sp>
-      <p:sp>
-        <p:nvSpPr>
-          <p:cNvPr id="4" name="Slide Number Placeholder 3">
-            <a:extLst>
-              <a:ext uri="{FF2B5EF4-FFF2-40B4-BE49-F238E27FC236}">
-                <a16:creationId xmlns:a16="http://schemas.microsoft.com/office/drawing/2014/main" id="{E24BDF3A-1A97-5400-29FC-0AEE56472885}"/>
-              </a:ext>
-            </a:extLst>
-          </p:cNvPr>
-          <p:cNvSpPr>
-            <a:spLocks noGrp="1"/>
-          </p:cNvSpPr>
-          <p:nvPr>
-            <p:ph type="sldNum" sz="quarter" idx="12"/>
-          </p:nvPr>
-        </p:nvSpPr>
-        <p:spPr/>
-        <p:txBody>
-          <a:bodyPr/>
-          <a:lstStyle/>
-          <a:p>
-            <a:pPr>
-              <a:defRPr/>
-            </a:pPr>
-            <a:fld id="{3FF2C605-4958-CF43-AA48-80339EFDB0AF}" type="slidenum">
-              <a:rPr lang="en-US" smtClean="0"/>
-              <a:pPr>
-                <a:defRPr/>
-              </a:pPr>
-              <a:t>24</a:t>
-            </a:fld>
-            <a:endParaRPr lang="en-US"/>
-          </a:p>
-        </p:txBody>
-      </p:sp>
-    </p:spTree>
-    <p:extLst>
-      <p:ext uri="{BB962C8B-B14F-4D97-AF65-F5344CB8AC3E}">
-        <p14:creationId xmlns:p14="http://schemas.microsoft.com/office/powerpoint/2010/main" val="1690572744"/>
-      </p:ext>
-    </p:extLst>
-  </p:cSld>
-  <p:clrMapOvr>
-    <a:masterClrMapping/>
-  </p:clrMapOvr>
-</p:sld>
-</file>
-
-<file path=ppt/slides/slide25.xml><?xml version="1.0" encoding="utf-8"?>
-<p:sld xmlns:a="http://schemas.openxmlformats.org/drawingml/2006/main" xmlns:r="http://schemas.openxmlformats.org/officeDocument/2006/relationships" xmlns:p="http://schemas.openxmlformats.org/presentationml/2006/main">
-  <p:cSld>
-    <p:spTree>
-      <p:nvGrpSpPr>
-        <p:cNvPr id="1" name=""/>
-        <p:cNvGrpSpPr/>
-        <p:nvPr/>
-      </p:nvGrpSpPr>
-      <p:grpSpPr>
-        <a:xfrm>
-          <a:off x="0" y="0"/>
-          <a:ext cx="0" cy="0"/>
-          <a:chOff x="0" y="0"/>
-          <a:chExt cx="0" cy="0"/>
-        </a:xfrm>
-      </p:grpSpPr>
-      <p:sp>
-        <p:nvSpPr>
-          <p:cNvPr id="2" name="Title 1">
-            <a:extLst>
-              <a:ext uri="{FF2B5EF4-FFF2-40B4-BE49-F238E27FC236}">
-                <a16:creationId xmlns:a16="http://schemas.microsoft.com/office/drawing/2014/main" id="{47E9658B-33B9-E822-6E99-661B220ED172}"/>
-              </a:ext>
-            </a:extLst>
-          </p:cNvPr>
-          <p:cNvSpPr>
-            <a:spLocks noGrp="1"/>
-          </p:cNvSpPr>
-          <p:nvPr>
-            <p:ph type="title"/>
-          </p:nvPr>
-        </p:nvSpPr>
-        <p:spPr/>
-        <p:txBody>
-          <a:bodyPr/>
-          <a:lstStyle/>
-          <a:p>
-            <a:r>
-              <a:rPr lang="en-US" dirty="0"/>
-              <a:t>Fuel Performance Concerns</a:t>
-            </a:r>
-          </a:p>
-        </p:txBody>
-      </p:sp>
-      <p:sp>
-        <p:nvSpPr>
-          <p:cNvPr id="3" name="Content Placeholder 2">
-            <a:extLst>
-              <a:ext uri="{FF2B5EF4-FFF2-40B4-BE49-F238E27FC236}">
-                <a16:creationId xmlns:a16="http://schemas.microsoft.com/office/drawing/2014/main" id="{A555A769-8950-755F-FC45-CF5CE864CC75}"/>
-              </a:ext>
-            </a:extLst>
-          </p:cNvPr>
-          <p:cNvSpPr>
-            <a:spLocks noGrp="1"/>
-          </p:cNvSpPr>
-          <p:nvPr>
-            <p:ph idx="1"/>
-          </p:nvPr>
-        </p:nvSpPr>
-        <p:spPr>
-          <a:xfrm>
-            <a:off x="609600" y="1968501"/>
-            <a:ext cx="10972800" cy="4157664"/>
-          </a:xfrm>
-        </p:spPr>
-        <p:txBody>
-          <a:bodyPr/>
-          <a:lstStyle/>
-          <a:p>
-            <a:r>
-              <a:rPr lang="en-US" sz="2200" dirty="0"/>
-              <a:t>CRUD deposition on the cladding surface can reduce heat transfer, increasing fuel temperatures, which also increases oxidation rates</a:t>
-            </a:r>
-          </a:p>
-          <a:p>
-            <a:r>
-              <a:rPr lang="en-US" sz="2200" dirty="0"/>
-              <a:t>Addition of Zn and noble metals can increase the adherence of CRUD deposits on the cladding</a:t>
-            </a:r>
-          </a:p>
-          <a:p>
-            <a:r>
-              <a:rPr lang="en-US" sz="2200" dirty="0"/>
-              <a:t>Zn/noble metals also can cause a failure/cracking of the oxide layer, promoting further corrosion</a:t>
-            </a:r>
-          </a:p>
-          <a:p>
-            <a:r>
-              <a:rPr lang="en-US" sz="2200" dirty="0"/>
-              <a:t>There are concentration limits on Zn and noble metals to limit CRUD formation</a:t>
-            </a:r>
-          </a:p>
-          <a:p>
-            <a:r>
-              <a:rPr lang="en-US" sz="2200" dirty="0"/>
-              <a:t>In PWRs, CRUD-induced power shifts (CRIPs) can occur by trapping boron in the CRUD, changing the power distribution</a:t>
-            </a:r>
-          </a:p>
-          <a:p>
-            <a:r>
-              <a:rPr lang="en-US" sz="2200" dirty="0"/>
-              <a:t>CRUD-related failures have been eliminated since about 2005</a:t>
-            </a:r>
-          </a:p>
-        </p:txBody>
-      </p:sp>
-      <p:sp>
-        <p:nvSpPr>
-          <p:cNvPr id="4" name="Slide Number Placeholder 3">
-            <a:extLst>
-              <a:ext uri="{FF2B5EF4-FFF2-40B4-BE49-F238E27FC236}">
-                <a16:creationId xmlns:a16="http://schemas.microsoft.com/office/drawing/2014/main" id="{DEE5DD47-C1C0-3C20-896F-35F39A343017}"/>
-              </a:ext>
-            </a:extLst>
-          </p:cNvPr>
-          <p:cNvSpPr>
-            <a:spLocks noGrp="1"/>
-          </p:cNvSpPr>
-          <p:nvPr>
-            <p:ph type="sldNum" sz="quarter" idx="12"/>
-          </p:nvPr>
-        </p:nvSpPr>
-        <p:spPr/>
-        <p:txBody>
-          <a:bodyPr/>
-          <a:lstStyle/>
-          <a:p>
-            <a:pPr>
-              <a:defRPr/>
-            </a:pPr>
-            <a:fld id="{3FF2C605-4958-CF43-AA48-80339EFDB0AF}" type="slidenum">
-              <a:rPr lang="en-US" smtClean="0"/>
-              <a:pPr>
-                <a:defRPr/>
-              </a:pPr>
-              <a:t>25</a:t>
-            </a:fld>
-            <a:endParaRPr lang="en-US"/>
-          </a:p>
-        </p:txBody>
-      </p:sp>
-    </p:spTree>
-    <p:extLst>
-      <p:ext uri="{BB962C8B-B14F-4D97-AF65-F5344CB8AC3E}">
-        <p14:creationId xmlns:p14="http://schemas.microsoft.com/office/powerpoint/2010/main" val="947350209"/>
-      </p:ext>
-    </p:extLst>
-  </p:cSld>
-  <p:clrMapOvr>
-    <a:masterClrMapping/>
-  </p:clrMapOvr>
-</p:sld>
-</file>
-
-<file path=ppt/slides/slide26.xml><?xml version="1.0" encoding="utf-8"?>
-<p:sld xmlns:a="http://schemas.openxmlformats.org/drawingml/2006/main" xmlns:r="http://schemas.openxmlformats.org/officeDocument/2006/relationships" xmlns:p="http://schemas.openxmlformats.org/presentationml/2006/main">
-  <p:cSld>
-    <p:spTree>
-      <p:nvGrpSpPr>
-        <p:cNvPr id="1" name=""/>
-        <p:cNvGrpSpPr/>
-        <p:nvPr/>
-      </p:nvGrpSpPr>
-      <p:grpSpPr>
-        <a:xfrm>
-          <a:off x="0" y="0"/>
-          <a:ext cx="0" cy="0"/>
-          <a:chOff x="0" y="0"/>
-          <a:chExt cx="0" cy="0"/>
-        </a:xfrm>
-      </p:grpSpPr>
-      <p:sp>
-        <p:nvSpPr>
-          <p:cNvPr id="2" name="Title 1">
-            <a:extLst>
-              <a:ext uri="{FF2B5EF4-FFF2-40B4-BE49-F238E27FC236}">
-                <a16:creationId xmlns:a16="http://schemas.microsoft.com/office/drawing/2014/main" id="{B494E803-125B-E348-B0C9-85977B7214E8}"/>
-              </a:ext>
-            </a:extLst>
-          </p:cNvPr>
-          <p:cNvSpPr>
-            <a:spLocks noGrp="1"/>
-          </p:cNvSpPr>
-          <p:nvPr>
-            <p:ph type="title"/>
-          </p:nvPr>
-        </p:nvSpPr>
-        <p:spPr/>
-        <p:txBody>
-          <a:bodyPr/>
-          <a:lstStyle/>
-          <a:p>
-            <a:r>
-              <a:rPr lang="en-US" dirty="0"/>
-              <a:t>Summary</a:t>
-            </a:r>
-          </a:p>
-        </p:txBody>
-      </p:sp>
-      <p:sp>
-        <p:nvSpPr>
-          <p:cNvPr id="3" name="Content Placeholder 2">
-            <a:extLst>
-              <a:ext uri="{FF2B5EF4-FFF2-40B4-BE49-F238E27FC236}">
-                <a16:creationId xmlns:a16="http://schemas.microsoft.com/office/drawing/2014/main" id="{DF19A972-2863-5A46-B96A-18CA22718CD8}"/>
-              </a:ext>
-            </a:extLst>
-          </p:cNvPr>
-          <p:cNvSpPr>
-            <a:spLocks noGrp="1"/>
-          </p:cNvSpPr>
-          <p:nvPr>
-            <p:ph idx="1"/>
-          </p:nvPr>
-        </p:nvSpPr>
-        <p:spPr/>
-        <p:txBody>
-          <a:bodyPr/>
-          <a:lstStyle/>
-          <a:p>
-            <a:r>
-              <a:rPr lang="en-US" dirty="0"/>
-              <a:t>Brief overview of water chemistry concerns</a:t>
-            </a:r>
-          </a:p>
-          <a:p>
-            <a:r>
-              <a:rPr lang="en-US" dirty="0"/>
-              <a:t>Primary system water chemistry affects fuel performance through the deposition of corrosion products on fuel pin surfaces</a:t>
-            </a:r>
-          </a:p>
-          <a:p>
-            <a:r>
-              <a:rPr lang="en-US" dirty="0"/>
-              <a:t>Control measures such as dissolved H2 and balancing </a:t>
-            </a:r>
-            <a:r>
-              <a:rPr lang="en-US" dirty="0" err="1"/>
-              <a:t>LiOH</a:t>
-            </a:r>
-            <a:r>
-              <a:rPr lang="en-US" dirty="0"/>
-              <a:t> to boron content are utilized to control the pH</a:t>
-            </a:r>
-          </a:p>
-          <a:p>
-            <a:r>
-              <a:rPr lang="en-US" dirty="0"/>
-              <a:t>Zinc injection is utilized to control radiation fields</a:t>
-            </a:r>
-          </a:p>
-          <a:p>
-            <a:r>
-              <a:rPr lang="en-US" dirty="0"/>
-              <a:t>CRUD can cause failures or CRIPs, affecting the performance of the fuel</a:t>
-            </a:r>
-          </a:p>
-          <a:p>
-            <a:r>
-              <a:rPr lang="en-US" dirty="0"/>
-              <a:t>Water chemistry is an evolving balancing act between corrosion of the core internals, radiation fields, CRUD development, pH, and reactivity</a:t>
-            </a:r>
-          </a:p>
-        </p:txBody>
-      </p:sp>
-      <p:sp>
-        <p:nvSpPr>
-          <p:cNvPr id="4" name="Slide Number Placeholder 3">
-            <a:extLst>
-              <a:ext uri="{FF2B5EF4-FFF2-40B4-BE49-F238E27FC236}">
-                <a16:creationId xmlns:a16="http://schemas.microsoft.com/office/drawing/2014/main" id="{55CA28B6-0FE4-1743-B12F-A0D6C68DB76F}"/>
-              </a:ext>
-            </a:extLst>
-          </p:cNvPr>
-          <p:cNvSpPr>
-            <a:spLocks noGrp="1"/>
-          </p:cNvSpPr>
-          <p:nvPr>
-            <p:ph type="sldNum" sz="quarter" idx="12"/>
-          </p:nvPr>
-        </p:nvSpPr>
-        <p:spPr/>
-        <p:txBody>
-          <a:bodyPr/>
-          <a:lstStyle/>
-          <a:p>
-            <a:pPr>
-              <a:defRPr/>
-            </a:pPr>
-            <a:fld id="{3FF2C605-4958-CF43-AA48-80339EFDB0AF}" type="slidenum">
-              <a:rPr lang="en-US" smtClean="0"/>
-              <a:pPr>
-                <a:defRPr/>
-              </a:pPr>
-              <a:t>26</a:t>
-            </a:fld>
-            <a:endParaRPr lang="en-US"/>
-          </a:p>
-        </p:txBody>
-      </p:sp>
-    </p:spTree>
-    <p:extLst>
-      <p:ext uri="{BB962C8B-B14F-4D97-AF65-F5344CB8AC3E}">
-        <p14:creationId xmlns:p14="http://schemas.microsoft.com/office/powerpoint/2010/main" val="338508001"/>
-      </p:ext>
-    </p:extLst>
-  </p:cSld>
-  <p:clrMapOvr>
-    <a:masterClrMapping/>
-  </p:clrMapOvr>
-</p:sld>
-</file>
-
-<file path=ppt/slides/slide3.xml><?xml version="1.0" encoding="utf-8"?>
-<p:sld xmlns:a="http://schemas.openxmlformats.org/drawingml/2006/main" xmlns:r="http://schemas.openxmlformats.org/officeDocument/2006/relationships" xmlns:p="http://schemas.openxmlformats.org/presentationml/2006/main">
-  <p:cSld>
-    <p:spTree>
-      <p:nvGrpSpPr>
-        <p:cNvPr id="1" name=""/>
-        <p:cNvGrpSpPr/>
-        <p:nvPr/>
-      </p:nvGrpSpPr>
-      <p:grpSpPr>
-        <a:xfrm>
-          <a:off x="0" y="0"/>
-          <a:ext cx="0" cy="0"/>
-          <a:chOff x="0" y="0"/>
-          <a:chExt cx="0" cy="0"/>
-        </a:xfrm>
-      </p:grpSpPr>
-      <p:sp>
-        <p:nvSpPr>
-          <p:cNvPr id="2" name="Title 1">
-            <a:extLst>
-              <a:ext uri="{FF2B5EF4-FFF2-40B4-BE49-F238E27FC236}">
-                <a16:creationId xmlns:a16="http://schemas.microsoft.com/office/drawing/2014/main" id="{96329CC1-34E4-A34F-8621-801D8886CE7C}"/>
-              </a:ext>
-            </a:extLst>
-          </p:cNvPr>
-          <p:cNvSpPr>
-            <a:spLocks noGrp="1"/>
-          </p:cNvSpPr>
-          <p:nvPr>
-            <p:ph type="title"/>
-          </p:nvPr>
-        </p:nvSpPr>
-        <p:spPr>
-          <a:xfrm>
-            <a:off x="963084" y="1234721"/>
-            <a:ext cx="10363200" cy="1362075"/>
-          </a:xfrm>
-        </p:spPr>
-        <p:txBody>
-          <a:bodyPr/>
-          <a:lstStyle/>
-          <a:p>
-            <a:r>
-              <a:rPr lang="en-US" dirty="0"/>
-              <a:t>Limiting phenomena</a:t>
-            </a:r>
-          </a:p>
-        </p:txBody>
-      </p:sp>
-      <p:sp>
-        <p:nvSpPr>
-          <p:cNvPr id="4" name="Slide Number Placeholder 3">
-            <a:extLst>
-              <a:ext uri="{FF2B5EF4-FFF2-40B4-BE49-F238E27FC236}">
-                <a16:creationId xmlns:a16="http://schemas.microsoft.com/office/drawing/2014/main" id="{2BFF06B0-02C9-F34D-82A4-D2D5BBAF6842}"/>
-              </a:ext>
-            </a:extLst>
-          </p:cNvPr>
-          <p:cNvSpPr>
-            <a:spLocks noGrp="1"/>
-          </p:cNvSpPr>
-          <p:nvPr>
-            <p:ph type="sldNum" sz="quarter" idx="12"/>
-          </p:nvPr>
-        </p:nvSpPr>
-        <p:spPr/>
-        <p:txBody>
-          <a:bodyPr/>
-          <a:lstStyle/>
-          <a:p>
-            <a:pPr>
-              <a:defRPr/>
-            </a:pPr>
-            <a:fld id="{0DA6BD0F-ABBC-C14D-BC96-77BE126A748B}" type="slidenum">
-              <a:rPr lang="en-US" smtClean="0"/>
-              <a:pPr>
-                <a:defRPr/>
-              </a:pPr>
-              <a:t>3</a:t>
-            </a:fld>
-            <a:endParaRPr lang="en-US"/>
-          </a:p>
-        </p:txBody>
-      </p:sp>
-    </p:spTree>
-    <p:extLst>
-      <p:ext uri="{BB962C8B-B14F-4D97-AF65-F5344CB8AC3E}">
-        <p14:creationId xmlns:p14="http://schemas.microsoft.com/office/powerpoint/2010/main" val="3070132974"/>
-      </p:ext>
-    </p:extLst>
-  </p:cSld>
-  <p:clrMapOvr>
-    <a:masterClrMapping/>
-  </p:clrMapOvr>
-</p:sld>
-</file>
-
-<file path=ppt/slides/slide4.xml><?xml version="1.0" encoding="utf-8"?>
-<p:sld xmlns:a="http://schemas.openxmlformats.org/drawingml/2006/main" xmlns:r="http://schemas.openxmlformats.org/officeDocument/2006/relationships" xmlns:p="http://schemas.openxmlformats.org/presentationml/2006/main">
-  <p:cSld>
-    <p:spTree>
-      <p:nvGrpSpPr>
-        <p:cNvPr id="1" name=""/>
-        <p:cNvGrpSpPr/>
-        <p:nvPr/>
-      </p:nvGrpSpPr>
-      <p:grpSpPr>
-        <a:xfrm>
-          <a:off x="0" y="0"/>
-          <a:ext cx="0" cy="0"/>
-          <a:chOff x="0" y="0"/>
-          <a:chExt cx="0" cy="0"/>
-        </a:xfrm>
-      </p:grpSpPr>
-      <p:sp>
-        <p:nvSpPr>
-          <p:cNvPr id="2" name="Title 1">
-            <a:extLst>
-              <a:ext uri="{FF2B5EF4-FFF2-40B4-BE49-F238E27FC236}">
-                <a16:creationId xmlns:a16="http://schemas.microsoft.com/office/drawing/2014/main" id="{BD6D4F59-8EC9-F24B-B686-893A7A33EFAA}"/>
-              </a:ext>
-            </a:extLst>
-          </p:cNvPr>
-          <p:cNvSpPr>
-            <a:spLocks noGrp="1"/>
-          </p:cNvSpPr>
-          <p:nvPr>
-            <p:ph type="title"/>
-          </p:nvPr>
-        </p:nvSpPr>
-        <p:spPr/>
-        <p:txBody>
-          <a:bodyPr/>
-          <a:lstStyle/>
-          <a:p>
-            <a:r>
-              <a:rPr lang="en-US" dirty="0"/>
-              <a:t>Limiting Phenomena</a:t>
-            </a:r>
-          </a:p>
-        </p:txBody>
-      </p:sp>
-      <p:sp>
-        <p:nvSpPr>
-          <p:cNvPr id="3" name="Content Placeholder 2">
-            <a:extLst>
-              <a:ext uri="{FF2B5EF4-FFF2-40B4-BE49-F238E27FC236}">
-                <a16:creationId xmlns:a16="http://schemas.microsoft.com/office/drawing/2014/main" id="{1BBBC707-027A-324A-9260-1EA31A3222BA}"/>
-              </a:ext>
-            </a:extLst>
-          </p:cNvPr>
-          <p:cNvSpPr>
-            <a:spLocks noGrp="1"/>
-          </p:cNvSpPr>
-          <p:nvPr>
-            <p:ph idx="1"/>
-          </p:nvPr>
-        </p:nvSpPr>
-        <p:spPr/>
-        <p:txBody>
-          <a:bodyPr/>
-          <a:lstStyle/>
-          <a:p>
-            <a:r>
-              <a:rPr lang="en-US" sz="2000" dirty="0"/>
-              <a:t>Concerning limiting phenomena, some criteria have been established for the UO2 and MOX fuel designs</a:t>
-            </a:r>
-          </a:p>
-          <a:p>
-            <a:r>
-              <a:rPr lang="en-US" sz="2000" dirty="0"/>
-              <a:t>Engineering must demonstrate that all relevant parameters fulfill those criteria at any time from the loading of the fuel to reprocessing, or during long-term storage</a:t>
-            </a:r>
-          </a:p>
-          <a:p>
-            <a:r>
-              <a:rPr lang="en-US" sz="2000" dirty="0"/>
-              <a:t>The key performance limiting phenomena are Pellet-clad mechanical interaction; Cladding elongation and assembly bow; Cladding oxidation and hydrogen pickup; Cladding wear; Power to melt; Fuel rod internal pressure; Departure from nucleate boiling; Normal operation limits</a:t>
-            </a:r>
-          </a:p>
-          <a:p>
-            <a:endParaRPr lang="en-US" sz="2000" dirty="0"/>
-          </a:p>
-        </p:txBody>
-      </p:sp>
-      <p:sp>
-        <p:nvSpPr>
-          <p:cNvPr id="4" name="Slide Number Placeholder 3">
-            <a:extLst>
-              <a:ext uri="{FF2B5EF4-FFF2-40B4-BE49-F238E27FC236}">
-                <a16:creationId xmlns:a16="http://schemas.microsoft.com/office/drawing/2014/main" id="{33FFED72-2010-164D-BDF9-2E2B57CD8882}"/>
-              </a:ext>
-            </a:extLst>
-          </p:cNvPr>
-          <p:cNvSpPr>
-            <a:spLocks noGrp="1"/>
-          </p:cNvSpPr>
-          <p:nvPr>
-            <p:ph type="sldNum" sz="quarter" idx="12"/>
-          </p:nvPr>
-        </p:nvSpPr>
-        <p:spPr/>
-        <p:txBody>
-          <a:bodyPr/>
-          <a:lstStyle/>
-          <a:p>
-            <a:pPr>
-              <a:defRPr/>
-            </a:pPr>
-            <a:fld id="{3FF2C605-4958-CF43-AA48-80339EFDB0AF}" type="slidenum">
-              <a:rPr lang="en-US" smtClean="0"/>
-              <a:pPr>
-                <a:defRPr/>
-              </a:pPr>
-              <a:t>4</a:t>
-            </a:fld>
-            <a:endParaRPr lang="en-US"/>
-          </a:p>
-        </p:txBody>
-      </p:sp>
-    </p:spTree>
-    <p:extLst>
-      <p:ext uri="{BB962C8B-B14F-4D97-AF65-F5344CB8AC3E}">
-        <p14:creationId xmlns:p14="http://schemas.microsoft.com/office/powerpoint/2010/main" val="1625269861"/>
-      </p:ext>
-    </p:extLst>
-  </p:cSld>
-  <p:clrMapOvr>
-    <a:masterClrMapping/>
-  </p:clrMapOvr>
-</p:sld>
-</file>
-
-<file path=ppt/slides/slide5.xml><?xml version="1.0" encoding="utf-8"?>
-<p:sld xmlns:a="http://schemas.openxmlformats.org/drawingml/2006/main" xmlns:r="http://schemas.openxmlformats.org/officeDocument/2006/relationships" xmlns:p="http://schemas.openxmlformats.org/presentationml/2006/main">
-  <p:cSld>
-    <p:spTree>
-      <p:nvGrpSpPr>
-        <p:cNvPr id="1" name=""/>
-        <p:cNvGrpSpPr/>
-        <p:nvPr/>
-      </p:nvGrpSpPr>
-      <p:grpSpPr>
-        <a:xfrm>
-          <a:off x="0" y="0"/>
-          <a:ext cx="0" cy="0"/>
-          <a:chOff x="0" y="0"/>
-          <a:chExt cx="0" cy="0"/>
-        </a:xfrm>
-      </p:grpSpPr>
-      <p:sp>
-        <p:nvSpPr>
-          <p:cNvPr id="2" name="Title 1">
-            <a:extLst>
-              <a:ext uri="{FF2B5EF4-FFF2-40B4-BE49-F238E27FC236}">
-                <a16:creationId xmlns:a16="http://schemas.microsoft.com/office/drawing/2014/main" id="{93ABDF0D-DB2F-514A-B72B-B38EF3C2C194}"/>
-              </a:ext>
-            </a:extLst>
-          </p:cNvPr>
-          <p:cNvSpPr>
-            <a:spLocks noGrp="1"/>
-          </p:cNvSpPr>
-          <p:nvPr>
-            <p:ph type="title"/>
-          </p:nvPr>
-        </p:nvSpPr>
-        <p:spPr/>
-        <p:txBody>
-          <a:bodyPr/>
-          <a:lstStyle/>
-          <a:p>
-            <a:r>
-              <a:rPr lang="en-US" dirty="0"/>
-              <a:t>Limiting Phenomena</a:t>
-            </a:r>
-          </a:p>
-        </p:txBody>
-      </p:sp>
-      <p:sp>
-        <p:nvSpPr>
-          <p:cNvPr id="3" name="Content Placeholder 2">
-            <a:extLst>
-              <a:ext uri="{FF2B5EF4-FFF2-40B4-BE49-F238E27FC236}">
-                <a16:creationId xmlns:a16="http://schemas.microsoft.com/office/drawing/2014/main" id="{B4DEE915-B4F7-1845-86C3-7A16CFD6DEF0}"/>
-              </a:ext>
-            </a:extLst>
-          </p:cNvPr>
-          <p:cNvSpPr>
-            <a:spLocks noGrp="1"/>
-          </p:cNvSpPr>
-          <p:nvPr>
-            <p:ph idx="1"/>
-          </p:nvPr>
-        </p:nvSpPr>
-        <p:spPr/>
-        <p:txBody>
-          <a:bodyPr/>
-          <a:lstStyle/>
-          <a:p>
-            <a:r>
-              <a:rPr lang="en-US" sz="2000" dirty="0"/>
-              <a:t>PCMI</a:t>
-            </a:r>
-          </a:p>
-          <a:p>
-            <a:r>
-              <a:rPr lang="en-US" sz="2000" dirty="0"/>
-              <a:t>PCMI is a complex process with a maximum risk for failure when the fuel pellet to cladding gap closes firmly and the reactivity of the fuel is still high</a:t>
-            </a:r>
-          </a:p>
-          <a:p>
-            <a:r>
-              <a:rPr lang="en-US" sz="2000" dirty="0"/>
-              <a:t>The risk is enhanced by pellet fragments inducing a local shear strain on the cladding, and by the chemical interaction kinetics at the interface</a:t>
-            </a:r>
-          </a:p>
-          <a:p>
-            <a:r>
-              <a:rPr lang="en-US" sz="2000" dirty="0"/>
-              <a:t>In order to prevent SCC, the cladding hoop stress calculated for normal operation and transients is limited</a:t>
-            </a:r>
-          </a:p>
-          <a:p>
-            <a:r>
-              <a:rPr lang="en-US" sz="2000" dirty="0"/>
-              <a:t>The extent of the total permanent hoop strain is limited during the whole lifetime of the fuel rods, typically to 1%</a:t>
-            </a:r>
-          </a:p>
-          <a:p>
-            <a:pPr lvl="1"/>
-            <a:endParaRPr lang="en-US" sz="2000" dirty="0"/>
-          </a:p>
-          <a:p>
-            <a:pPr lvl="1"/>
-            <a:endParaRPr lang="en-US" sz="2000" dirty="0"/>
-          </a:p>
-        </p:txBody>
-      </p:sp>
-      <p:sp>
-        <p:nvSpPr>
-          <p:cNvPr id="4" name="Slide Number Placeholder 3">
-            <a:extLst>
-              <a:ext uri="{FF2B5EF4-FFF2-40B4-BE49-F238E27FC236}">
-                <a16:creationId xmlns:a16="http://schemas.microsoft.com/office/drawing/2014/main" id="{2444743E-315B-9341-978C-27CF805608F9}"/>
-              </a:ext>
-            </a:extLst>
-          </p:cNvPr>
-          <p:cNvSpPr>
-            <a:spLocks noGrp="1"/>
-          </p:cNvSpPr>
-          <p:nvPr>
-            <p:ph type="sldNum" sz="quarter" idx="12"/>
-          </p:nvPr>
-        </p:nvSpPr>
-        <p:spPr/>
-        <p:txBody>
-          <a:bodyPr/>
-          <a:lstStyle/>
-          <a:p>
-            <a:pPr>
-              <a:defRPr/>
-            </a:pPr>
-            <a:fld id="{3FF2C605-4958-CF43-AA48-80339EFDB0AF}" type="slidenum">
-              <a:rPr lang="en-US" smtClean="0"/>
-              <a:pPr>
-                <a:defRPr/>
-              </a:pPr>
-              <a:t>5</a:t>
-            </a:fld>
-            <a:endParaRPr lang="en-US"/>
-          </a:p>
-        </p:txBody>
-      </p:sp>
-    </p:spTree>
-    <p:extLst>
-      <p:ext uri="{BB962C8B-B14F-4D97-AF65-F5344CB8AC3E}">
-        <p14:creationId xmlns:p14="http://schemas.microsoft.com/office/powerpoint/2010/main" val="1327727445"/>
-      </p:ext>
-    </p:extLst>
-  </p:cSld>
-  <p:clrMapOvr>
-    <a:masterClrMapping/>
-  </p:clrMapOvr>
-</p:sld>
-</file>
-
-<file path=ppt/slides/slide6.xml><?xml version="1.0" encoding="utf-8"?>
-<p:sld xmlns:a="http://schemas.openxmlformats.org/drawingml/2006/main" xmlns:r="http://schemas.openxmlformats.org/officeDocument/2006/relationships" xmlns:p="http://schemas.openxmlformats.org/presentationml/2006/main">
-  <p:cSld>
-    <p:spTree>
-      <p:nvGrpSpPr>
-        <p:cNvPr id="1" name=""/>
-        <p:cNvGrpSpPr/>
-        <p:nvPr/>
-      </p:nvGrpSpPr>
-      <p:grpSpPr>
-        <a:xfrm>
-          <a:off x="0" y="0"/>
-          <a:ext cx="0" cy="0"/>
-          <a:chOff x="0" y="0"/>
-          <a:chExt cx="0" cy="0"/>
-        </a:xfrm>
-      </p:grpSpPr>
-      <p:sp>
-        <p:nvSpPr>
-          <p:cNvPr id="2" name="Title 1">
-            <a:extLst>
-              <a:ext uri="{FF2B5EF4-FFF2-40B4-BE49-F238E27FC236}">
-                <a16:creationId xmlns:a16="http://schemas.microsoft.com/office/drawing/2014/main" id="{0CED2E93-2F2C-D943-B574-B8F853919CA4}"/>
-              </a:ext>
-            </a:extLst>
-          </p:cNvPr>
-          <p:cNvSpPr>
-            <a:spLocks noGrp="1"/>
-          </p:cNvSpPr>
-          <p:nvPr>
-            <p:ph type="title"/>
-          </p:nvPr>
-        </p:nvSpPr>
-        <p:spPr/>
-        <p:txBody>
-          <a:bodyPr/>
-          <a:lstStyle/>
-          <a:p>
-            <a:r>
-              <a:rPr lang="en-US" dirty="0"/>
-              <a:t>Limiting Phenomena</a:t>
-            </a:r>
-          </a:p>
-        </p:txBody>
-      </p:sp>
-      <p:sp>
-        <p:nvSpPr>
-          <p:cNvPr id="3" name="Content Placeholder 2">
-            <a:extLst>
-              <a:ext uri="{FF2B5EF4-FFF2-40B4-BE49-F238E27FC236}">
-                <a16:creationId xmlns:a16="http://schemas.microsoft.com/office/drawing/2014/main" id="{DAFD5F6C-95C0-1841-823E-3A3E067D6F52}"/>
-              </a:ext>
-            </a:extLst>
-          </p:cNvPr>
-          <p:cNvSpPr>
-            <a:spLocks noGrp="1"/>
-          </p:cNvSpPr>
-          <p:nvPr>
-            <p:ph idx="1"/>
-          </p:nvPr>
-        </p:nvSpPr>
-        <p:spPr/>
-        <p:txBody>
-          <a:bodyPr/>
-          <a:lstStyle/>
-          <a:p>
-            <a:r>
-              <a:rPr lang="en-US" sz="2000" dirty="0"/>
-              <a:t>Cladding elongation and assembly bow</a:t>
-            </a:r>
-          </a:p>
-          <a:p>
-            <a:r>
-              <a:rPr lang="en-US" sz="2000" dirty="0"/>
-              <a:t>During irradiation, the anisotropic character of the cladding material and the preferential migration of vacancies and interstitials in specific lattice planes drive an overall cladding axial growth, activated by the fast neutron flux</a:t>
-            </a:r>
-          </a:p>
-          <a:p>
-            <a:r>
-              <a:rPr lang="en-US" sz="2000" dirty="0"/>
-              <a:t>When contact is established between the pellet and the cladding, pellet axial elongation causes an additional axial cladding strain</a:t>
-            </a:r>
-          </a:p>
-          <a:p>
-            <a:r>
-              <a:rPr lang="en-US" sz="2000" dirty="0"/>
-              <a:t>This can lead to fuel rod bow with pitch reduction between the rods, reducing thermal margins</a:t>
-            </a:r>
-          </a:p>
-          <a:p>
-            <a:r>
-              <a:rPr lang="en-US" sz="2000" dirty="0"/>
-              <a:t>Differential elongation of guide tubes in a PWR assembly can lead to an overall assembly bow</a:t>
-            </a:r>
-          </a:p>
-          <a:p>
-            <a:endParaRPr lang="en-US" sz="2000" dirty="0"/>
-          </a:p>
-          <a:p>
-            <a:endParaRPr lang="en-US" sz="2000" dirty="0"/>
-          </a:p>
-          <a:p>
-            <a:endParaRPr lang="en-US" sz="2000" dirty="0"/>
-          </a:p>
-          <a:p>
-            <a:pPr lvl="1"/>
-            <a:endParaRPr lang="en-US" sz="2000" dirty="0"/>
-          </a:p>
-        </p:txBody>
-      </p:sp>
-      <p:sp>
-        <p:nvSpPr>
-          <p:cNvPr id="4" name="Slide Number Placeholder 3">
-            <a:extLst>
-              <a:ext uri="{FF2B5EF4-FFF2-40B4-BE49-F238E27FC236}">
-                <a16:creationId xmlns:a16="http://schemas.microsoft.com/office/drawing/2014/main" id="{E06E5C1D-C6AB-7244-BED5-F5845E129B4F}"/>
-              </a:ext>
-            </a:extLst>
-          </p:cNvPr>
-          <p:cNvSpPr>
-            <a:spLocks noGrp="1"/>
-          </p:cNvSpPr>
-          <p:nvPr>
-            <p:ph type="sldNum" sz="quarter" idx="12"/>
-          </p:nvPr>
-        </p:nvSpPr>
-        <p:spPr/>
-        <p:txBody>
-          <a:bodyPr/>
-          <a:lstStyle/>
-          <a:p>
-            <a:pPr>
-              <a:defRPr/>
-            </a:pPr>
-            <a:fld id="{3FF2C605-4958-CF43-AA48-80339EFDB0AF}" type="slidenum">
-              <a:rPr lang="en-US" smtClean="0"/>
-              <a:pPr>
-                <a:defRPr/>
-              </a:pPr>
-              <a:t>6</a:t>
-            </a:fld>
-            <a:endParaRPr lang="en-US"/>
-          </a:p>
-        </p:txBody>
-      </p:sp>
-    </p:spTree>
-    <p:extLst>
-      <p:ext uri="{BB962C8B-B14F-4D97-AF65-F5344CB8AC3E}">
-        <p14:creationId xmlns:p14="http://schemas.microsoft.com/office/powerpoint/2010/main" val="2736685164"/>
-      </p:ext>
-    </p:extLst>
-  </p:cSld>
-  <p:clrMapOvr>
-    <a:masterClrMapping/>
-  </p:clrMapOvr>
-</p:sld>
-</file>
-
-<file path=ppt/slides/slide7.xml><?xml version="1.0" encoding="utf-8"?>
-<p:sld xmlns:a="http://schemas.openxmlformats.org/drawingml/2006/main" xmlns:r="http://schemas.openxmlformats.org/officeDocument/2006/relationships" xmlns:p="http://schemas.openxmlformats.org/presentationml/2006/main">
-  <p:cSld>
-    <p:spTree>
-      <p:nvGrpSpPr>
-        <p:cNvPr id="1" name=""/>
-        <p:cNvGrpSpPr/>
-        <p:nvPr/>
-      </p:nvGrpSpPr>
-      <p:grpSpPr>
-        <a:xfrm>
-          <a:off x="0" y="0"/>
-          <a:ext cx="0" cy="0"/>
-          <a:chOff x="0" y="0"/>
-          <a:chExt cx="0" cy="0"/>
-        </a:xfrm>
-      </p:grpSpPr>
-      <p:sp>
-        <p:nvSpPr>
-          <p:cNvPr id="2" name="Title 1">
-            <a:extLst>
-              <a:ext uri="{FF2B5EF4-FFF2-40B4-BE49-F238E27FC236}">
-                <a16:creationId xmlns:a16="http://schemas.microsoft.com/office/drawing/2014/main" id="{8A29BCA4-0B4B-F740-8201-49C110294E2D}"/>
-              </a:ext>
-            </a:extLst>
-          </p:cNvPr>
-          <p:cNvSpPr>
-            <a:spLocks noGrp="1"/>
-          </p:cNvSpPr>
-          <p:nvPr>
-            <p:ph type="title"/>
-          </p:nvPr>
-        </p:nvSpPr>
-        <p:spPr/>
-        <p:txBody>
-          <a:bodyPr/>
-          <a:lstStyle/>
-          <a:p>
-            <a:r>
-              <a:rPr lang="en-US" dirty="0"/>
-              <a:t>Limiting Phenomena</a:t>
-            </a:r>
-          </a:p>
-        </p:txBody>
-      </p:sp>
-      <p:sp>
-        <p:nvSpPr>
-          <p:cNvPr id="3" name="Content Placeholder 2">
-            <a:extLst>
-              <a:ext uri="{FF2B5EF4-FFF2-40B4-BE49-F238E27FC236}">
-                <a16:creationId xmlns:a16="http://schemas.microsoft.com/office/drawing/2014/main" id="{C3D7765C-81F5-5540-9F76-54FF10BA4742}"/>
-              </a:ext>
-            </a:extLst>
-          </p:cNvPr>
-          <p:cNvSpPr>
-            <a:spLocks noGrp="1"/>
-          </p:cNvSpPr>
-          <p:nvPr>
-            <p:ph idx="1"/>
-          </p:nvPr>
-        </p:nvSpPr>
-        <p:spPr/>
-        <p:txBody>
-          <a:bodyPr/>
-          <a:lstStyle/>
-          <a:p>
-            <a:r>
-              <a:rPr lang="en-US" sz="2000" dirty="0"/>
-              <a:t>Cladding oxidation and hydrogen pickup</a:t>
-            </a:r>
-          </a:p>
-          <a:p>
-            <a:r>
-              <a:rPr lang="en-US" sz="2000" dirty="0"/>
-              <a:t>For the ZrO2 formation at the cladding waterside surface, a typical criterion is related to the ASTM criterion of a maximum cladding wall thickness reduction of 10%, which corresponds to an oxide thickness of the order of 100 microns</a:t>
-            </a:r>
-          </a:p>
-          <a:p>
-            <a:r>
-              <a:rPr lang="en-US" sz="2000" dirty="0"/>
-              <a:t>When the hydrogen concentration in the cladding exceeds the solubility limit, 70–100 ppm by weight at operating temperatures, zirconium hydrides will form</a:t>
-            </a:r>
-          </a:p>
-          <a:p>
-            <a:r>
-              <a:rPr lang="en-US" sz="2000" dirty="0"/>
-              <a:t>The impact of hydrides on key mechanical properties depends strongly on hydride distribution and orientation</a:t>
-            </a:r>
-          </a:p>
-          <a:p>
-            <a:r>
-              <a:rPr lang="en-US" sz="2000" dirty="0"/>
-              <a:t>Oxidation and hydrogen pickup are increasingly important at higher exposures, as the dependence on burnup is nonlinear</a:t>
-            </a:r>
-          </a:p>
-          <a:p>
-            <a:endParaRPr lang="en-US" sz="2000" dirty="0"/>
-          </a:p>
-          <a:p>
-            <a:endParaRPr lang="en-US" sz="2000" dirty="0"/>
-          </a:p>
-          <a:p>
-            <a:endParaRPr lang="en-US" sz="2000" dirty="0"/>
-          </a:p>
-          <a:p>
-            <a:endParaRPr lang="en-US" sz="2000" dirty="0"/>
-          </a:p>
-        </p:txBody>
-      </p:sp>
-      <p:sp>
-        <p:nvSpPr>
-          <p:cNvPr id="4" name="Slide Number Placeholder 3">
-            <a:extLst>
-              <a:ext uri="{FF2B5EF4-FFF2-40B4-BE49-F238E27FC236}">
-                <a16:creationId xmlns:a16="http://schemas.microsoft.com/office/drawing/2014/main" id="{4D9A9137-2D69-5849-8A63-E4E592AAFEB7}"/>
-              </a:ext>
-            </a:extLst>
-          </p:cNvPr>
-          <p:cNvSpPr>
-            <a:spLocks noGrp="1"/>
-          </p:cNvSpPr>
-          <p:nvPr>
-            <p:ph type="sldNum" sz="quarter" idx="12"/>
-          </p:nvPr>
-        </p:nvSpPr>
-        <p:spPr/>
-        <p:txBody>
-          <a:bodyPr/>
-          <a:lstStyle/>
-          <a:p>
-            <a:pPr>
-              <a:defRPr/>
-            </a:pPr>
-            <a:fld id="{3FF2C605-4958-CF43-AA48-80339EFDB0AF}" type="slidenum">
-              <a:rPr lang="en-US" smtClean="0"/>
-              <a:pPr>
-                <a:defRPr/>
-              </a:pPr>
-              <a:t>7</a:t>
-            </a:fld>
-            <a:endParaRPr lang="en-US"/>
-          </a:p>
-        </p:txBody>
-      </p:sp>
-    </p:spTree>
-    <p:extLst>
-      <p:ext uri="{BB962C8B-B14F-4D97-AF65-F5344CB8AC3E}">
-        <p14:creationId xmlns:p14="http://schemas.microsoft.com/office/powerpoint/2010/main" val="2336819243"/>
-      </p:ext>
-    </p:extLst>
-  </p:cSld>
-  <p:clrMapOvr>
-    <a:masterClrMapping/>
-  </p:clrMapOvr>
-</p:sld>
-</file>
-
-<file path=ppt/slides/slide8.xml><?xml version="1.0" encoding="utf-8"?>
-<p:sld xmlns:a="http://schemas.openxmlformats.org/drawingml/2006/main" xmlns:r="http://schemas.openxmlformats.org/officeDocument/2006/relationships" xmlns:p="http://schemas.openxmlformats.org/presentationml/2006/main">
-  <p:cSld>
-    <p:spTree>
-      <p:nvGrpSpPr>
-        <p:cNvPr id="1" name=""/>
-        <p:cNvGrpSpPr/>
-        <p:nvPr/>
-      </p:nvGrpSpPr>
-      <p:grpSpPr>
-        <a:xfrm>
-          <a:off x="0" y="0"/>
-          <a:ext cx="0" cy="0"/>
-          <a:chOff x="0" y="0"/>
-          <a:chExt cx="0" cy="0"/>
-        </a:xfrm>
-      </p:grpSpPr>
-      <p:sp>
-        <p:nvSpPr>
-          <p:cNvPr id="2" name="Title 1">
-            <a:extLst>
-              <a:ext uri="{FF2B5EF4-FFF2-40B4-BE49-F238E27FC236}">
-                <a16:creationId xmlns:a16="http://schemas.microsoft.com/office/drawing/2014/main" id="{8A29BCA4-0B4B-F740-8201-49C110294E2D}"/>
-              </a:ext>
-            </a:extLst>
-          </p:cNvPr>
-          <p:cNvSpPr>
-            <a:spLocks noGrp="1"/>
-          </p:cNvSpPr>
-          <p:nvPr>
-            <p:ph type="title"/>
-          </p:nvPr>
-        </p:nvSpPr>
-        <p:spPr/>
-        <p:txBody>
-          <a:bodyPr/>
-          <a:lstStyle/>
-          <a:p>
-            <a:r>
-              <a:rPr lang="en-US" dirty="0"/>
-              <a:t>Limiting Phenomena</a:t>
-            </a:r>
-          </a:p>
-        </p:txBody>
-      </p:sp>
-      <p:sp>
-        <p:nvSpPr>
-          <p:cNvPr id="3" name="Content Placeholder 2">
-            <a:extLst>
-              <a:ext uri="{FF2B5EF4-FFF2-40B4-BE49-F238E27FC236}">
-                <a16:creationId xmlns:a16="http://schemas.microsoft.com/office/drawing/2014/main" id="{C3D7765C-81F5-5540-9F76-54FF10BA4742}"/>
-              </a:ext>
-            </a:extLst>
-          </p:cNvPr>
-          <p:cNvSpPr>
-            <a:spLocks noGrp="1"/>
-          </p:cNvSpPr>
-          <p:nvPr>
-            <p:ph idx="1"/>
-          </p:nvPr>
-        </p:nvSpPr>
-        <p:spPr/>
-        <p:txBody>
-          <a:bodyPr/>
-          <a:lstStyle/>
-          <a:p>
-            <a:r>
-              <a:rPr lang="en-US" sz="2000" dirty="0"/>
-              <a:t>Cladding wear</a:t>
-            </a:r>
-          </a:p>
-          <a:p>
-            <a:r>
-              <a:rPr lang="en-US" sz="2000" dirty="0"/>
-              <a:t>The criterion for cladding wear at the contact points between grid spring/dimples and the fuel rod is often also related to the ASTM criterion of a maximum cladding wall thickness reduction of 10%</a:t>
-            </a:r>
-          </a:p>
-          <a:p>
-            <a:r>
-              <a:rPr lang="en-US" sz="2000" dirty="0"/>
-              <a:t>More wear is technically acceptable, as evidenced from operational experience</a:t>
-            </a:r>
-          </a:p>
-          <a:p>
-            <a:endParaRPr lang="en-US" sz="2000" dirty="0"/>
-          </a:p>
-          <a:p>
-            <a:endParaRPr lang="en-US" sz="2000" dirty="0"/>
-          </a:p>
-        </p:txBody>
-      </p:sp>
-      <p:sp>
-        <p:nvSpPr>
-          <p:cNvPr id="4" name="Slide Number Placeholder 3">
-            <a:extLst>
-              <a:ext uri="{FF2B5EF4-FFF2-40B4-BE49-F238E27FC236}">
-                <a16:creationId xmlns:a16="http://schemas.microsoft.com/office/drawing/2014/main" id="{4D9A9137-2D69-5849-8A63-E4E592AAFEB7}"/>
-              </a:ext>
-            </a:extLst>
-          </p:cNvPr>
-          <p:cNvSpPr>
-            <a:spLocks noGrp="1"/>
-          </p:cNvSpPr>
-          <p:nvPr>
-            <p:ph type="sldNum" sz="quarter" idx="12"/>
-          </p:nvPr>
-        </p:nvSpPr>
-        <p:spPr/>
-        <p:txBody>
-          <a:bodyPr/>
-          <a:lstStyle/>
-          <a:p>
-            <a:pPr>
-              <a:defRPr/>
-            </a:pPr>
-            <a:fld id="{3FF2C605-4958-CF43-AA48-80339EFDB0AF}" type="slidenum">
-              <a:rPr lang="en-US" smtClean="0"/>
-              <a:pPr>
-                <a:defRPr/>
-              </a:pPr>
-              <a:t>8</a:t>
-            </a:fld>
-            <a:endParaRPr lang="en-US"/>
-          </a:p>
-        </p:txBody>
-      </p:sp>
-    </p:spTree>
-    <p:extLst>
-      <p:ext uri="{BB962C8B-B14F-4D97-AF65-F5344CB8AC3E}">
-        <p14:creationId xmlns:p14="http://schemas.microsoft.com/office/powerpoint/2010/main" val="1060907922"/>
-      </p:ext>
-    </p:extLst>
-  </p:cSld>
-  <p:clrMapOvr>
-    <a:masterClrMapping/>
-  </p:clrMapOvr>
-</p:sld>
-</file>
-
 <file path=ppt/slides/slide9.xml><?xml version="1.0" encoding="utf-8"?>
 <p:sld xmlns:a="http://schemas.openxmlformats.org/drawingml/2006/main" xmlns:r="http://schemas.openxmlformats.org/officeDocument/2006/relationships" xmlns:p="http://schemas.openxmlformats.org/presentationml/2006/main">
   <p:cSld>
@@ -7864,7 +8564,7 @@
           <p:cNvPr id="2" name="Title 1">
             <a:extLst>
               <a:ext uri="{FF2B5EF4-FFF2-40B4-BE49-F238E27FC236}">
-                <a16:creationId xmlns:a16="http://schemas.microsoft.com/office/drawing/2014/main" id="{8A29BCA4-0B4B-F740-8201-49C110294E2D}"/>
+                <a16:creationId xmlns:a16="http://schemas.microsoft.com/office/drawing/2014/main" id="{4003DB6E-6236-DE0D-5E7F-983DCFB629AA}"/>
               </a:ext>
             </a:extLst>
           </p:cNvPr>
@@ -7882,7 +8582,7 @@
           <a:p>
             <a:r>
               <a:rPr lang="en-US" dirty="0"/>
-              <a:t>Limiting Phenomena</a:t>
+              <a:t>CRUD Cycle</a:t>
             </a:r>
           </a:p>
         </p:txBody>
@@ -7892,7 +8592,7 @@
           <p:cNvPr id="3" name="Content Placeholder 2">
             <a:extLst>
               <a:ext uri="{FF2B5EF4-FFF2-40B4-BE49-F238E27FC236}">
-                <a16:creationId xmlns:a16="http://schemas.microsoft.com/office/drawing/2014/main" id="{C3D7765C-81F5-5540-9F76-54FF10BA4742}"/>
+                <a16:creationId xmlns:a16="http://schemas.microsoft.com/office/drawing/2014/main" id="{FA5D788F-0BCE-8A8D-BBE6-5055369FFF4F}"/>
               </a:ext>
             </a:extLst>
           </p:cNvPr>
@@ -7909,49 +8609,33 @@
           <a:lstStyle/>
           <a:p>
             <a:r>
-              <a:rPr lang="en-US" sz="2000" dirty="0"/>
-              <a:t>Power to melt</a:t>
-            </a:r>
-          </a:p>
-          <a:p>
-            <a:r>
-              <a:rPr lang="en-US" sz="2000" dirty="0"/>
-              <a:t>The use of uranium dioxide or MOX provides a comfortable power to melt margin</a:t>
-            </a:r>
-          </a:p>
-          <a:p>
-            <a:r>
-              <a:rPr lang="en-US" sz="2000" dirty="0"/>
-              <a:t>The melting temperature decreases slightly with burnup, but remains above 2750C</a:t>
-            </a:r>
-          </a:p>
-          <a:p>
-            <a:r>
-              <a:rPr lang="en-US" sz="2000" dirty="0"/>
-              <a:t>At high burnup, above 50 </a:t>
-            </a:r>
-            <a:r>
-              <a:rPr lang="en-US" sz="2000" dirty="0" err="1"/>
-              <a:t>MWd</a:t>
-            </a:r>
-            <a:r>
-              <a:rPr lang="en-US" sz="2000" dirty="0"/>
-              <a:t>/</a:t>
-            </a:r>
-            <a:r>
-              <a:rPr lang="en-US" sz="2000" dirty="0" err="1"/>
-              <a:t>kgU</a:t>
-            </a:r>
-            <a:r>
-              <a:rPr lang="en-US" sz="2000" dirty="0"/>
-              <a:t>, considering the fuel thermal conductivity decrease, the power to melt is estimated to be around 600 W/cm, which is an unrealistic high LHR</a:t>
-            </a:r>
-          </a:p>
-          <a:p>
-            <a:endParaRPr lang="en-US" sz="2000" dirty="0"/>
-          </a:p>
-          <a:p>
-            <a:endParaRPr lang="en-US" sz="2000" dirty="0"/>
+              <a:rPr lang="en-US" sz="2200" dirty="0"/>
+              <a:t>First, metallic constituents from core internals or heat exchangers are dissolved in the high T water</a:t>
+            </a:r>
+          </a:p>
+          <a:p>
+            <a:r>
+              <a:rPr lang="en-US" sz="2200" dirty="0"/>
+              <a:t>Those constituents get deposited on the surface of the cladding, often in a spinel-type structure (AB2O4), with Fe, Ni, and Co some of the primary species</a:t>
+            </a:r>
+          </a:p>
+          <a:p>
+            <a:r>
+              <a:rPr lang="en-US" sz="2200" dirty="0"/>
+              <a:t>Proximity to the fuel leads to activation of these species, producing radionuclides in the CRUD, such as 60Co and 63Ni</a:t>
+            </a:r>
+          </a:p>
+          <a:p>
+            <a:r>
+              <a:rPr lang="en-US" sz="2200" dirty="0"/>
+              <a:t>CRUD can flake off, chip, or species can dissolve into the water and then collect on the out-of-core surfaces</a:t>
+            </a:r>
+          </a:p>
+          <a:p>
+            <a:endParaRPr lang="en-US" sz="2200" dirty="0"/>
+          </a:p>
+          <a:p>
+            <a:endParaRPr lang="en-US" sz="2200" dirty="0"/>
           </a:p>
         </p:txBody>
       </p:sp>
@@ -7960,7 +8644,7 @@
           <p:cNvPr id="4" name="Slide Number Placeholder 3">
             <a:extLst>
               <a:ext uri="{FF2B5EF4-FFF2-40B4-BE49-F238E27FC236}">
-                <a16:creationId xmlns:a16="http://schemas.microsoft.com/office/drawing/2014/main" id="{4D9A9137-2D69-5849-8A63-E4E592AAFEB7}"/>
+                <a16:creationId xmlns:a16="http://schemas.microsoft.com/office/drawing/2014/main" id="{00D7D0BE-349E-4BA5-07C1-532E93608356}"/>
               </a:ext>
             </a:extLst>
           </p:cNvPr>
@@ -7993,7 +8677,7 @@
     </p:spTree>
     <p:extLst>
       <p:ext uri="{BB962C8B-B14F-4D97-AF65-F5344CB8AC3E}">
-        <p14:creationId xmlns:p14="http://schemas.microsoft.com/office/powerpoint/2010/main" val="3450252657"/>
+        <p14:creationId xmlns:p14="http://schemas.microsoft.com/office/powerpoint/2010/main" val="3364569633"/>
       </p:ext>
     </p:extLst>
   </p:cSld>
